--- a/slides/07_knowledge-based.pptx
+++ b/slides/07_knowledge-based.pptx
@@ -5,7 +5,7 @@
     <p:sldMasterId id="2147483672" r:id="rId1"/>
   </p:sldMasterIdLst>
   <p:notesMasterIdLst>
-    <p:notesMasterId r:id="rId52"/>
+    <p:notesMasterId r:id="rId54"/>
   </p:notesMasterIdLst>
   <p:sldIdLst>
     <p:sldId id="372" r:id="rId2"/>
@@ -18,46 +18,48 @@
     <p:sldId id="408" r:id="rId9"/>
     <p:sldId id="404" r:id="rId10"/>
     <p:sldId id="394" r:id="rId11"/>
-    <p:sldId id="405" r:id="rId12"/>
-    <p:sldId id="396" r:id="rId13"/>
-    <p:sldId id="392" r:id="rId14"/>
-    <p:sldId id="407" r:id="rId15"/>
-    <p:sldId id="406" r:id="rId16"/>
-    <p:sldId id="395" r:id="rId17"/>
-    <p:sldId id="384" r:id="rId18"/>
-    <p:sldId id="385" r:id="rId19"/>
-    <p:sldId id="386" r:id="rId20"/>
-    <p:sldId id="403" r:id="rId21"/>
-    <p:sldId id="400" r:id="rId22"/>
-    <p:sldId id="360" r:id="rId23"/>
-    <p:sldId id="401" r:id="rId24"/>
-    <p:sldId id="281" r:id="rId25"/>
-    <p:sldId id="371" r:id="rId26"/>
-    <p:sldId id="282" r:id="rId27"/>
-    <p:sldId id="377" r:id="rId28"/>
-    <p:sldId id="370" r:id="rId29"/>
-    <p:sldId id="272" r:id="rId30"/>
-    <p:sldId id="280" r:id="rId31"/>
-    <p:sldId id="365" r:id="rId32"/>
-    <p:sldId id="361" r:id="rId33"/>
-    <p:sldId id="362" r:id="rId34"/>
-    <p:sldId id="363" r:id="rId35"/>
-    <p:sldId id="364" r:id="rId36"/>
-    <p:sldId id="367" r:id="rId37"/>
-    <p:sldId id="368" r:id="rId38"/>
-    <p:sldId id="382" r:id="rId39"/>
-    <p:sldId id="383" r:id="rId40"/>
-    <p:sldId id="330" r:id="rId41"/>
-    <p:sldId id="373" r:id="rId42"/>
-    <p:sldId id="260" r:id="rId43"/>
-    <p:sldId id="261" r:id="rId44"/>
-    <p:sldId id="266" r:id="rId45"/>
-    <p:sldId id="268" r:id="rId46"/>
-    <p:sldId id="270" r:id="rId47"/>
-    <p:sldId id="271" r:id="rId48"/>
-    <p:sldId id="374" r:id="rId49"/>
-    <p:sldId id="326" r:id="rId50"/>
-    <p:sldId id="378" r:id="rId51"/>
+    <p:sldId id="486" r:id="rId12"/>
+    <p:sldId id="405" r:id="rId13"/>
+    <p:sldId id="396" r:id="rId14"/>
+    <p:sldId id="392" r:id="rId15"/>
+    <p:sldId id="407" r:id="rId16"/>
+    <p:sldId id="406" r:id="rId17"/>
+    <p:sldId id="395" r:id="rId18"/>
+    <p:sldId id="384" r:id="rId19"/>
+    <p:sldId id="385" r:id="rId20"/>
+    <p:sldId id="386" r:id="rId21"/>
+    <p:sldId id="487" r:id="rId22"/>
+    <p:sldId id="403" r:id="rId23"/>
+    <p:sldId id="400" r:id="rId24"/>
+    <p:sldId id="360" r:id="rId25"/>
+    <p:sldId id="401" r:id="rId26"/>
+    <p:sldId id="281" r:id="rId27"/>
+    <p:sldId id="371" r:id="rId28"/>
+    <p:sldId id="282" r:id="rId29"/>
+    <p:sldId id="377" r:id="rId30"/>
+    <p:sldId id="370" r:id="rId31"/>
+    <p:sldId id="272" r:id="rId32"/>
+    <p:sldId id="280" r:id="rId33"/>
+    <p:sldId id="365" r:id="rId34"/>
+    <p:sldId id="361" r:id="rId35"/>
+    <p:sldId id="362" r:id="rId36"/>
+    <p:sldId id="363" r:id="rId37"/>
+    <p:sldId id="364" r:id="rId38"/>
+    <p:sldId id="367" r:id="rId39"/>
+    <p:sldId id="368" r:id="rId40"/>
+    <p:sldId id="382" r:id="rId41"/>
+    <p:sldId id="383" r:id="rId42"/>
+    <p:sldId id="330" r:id="rId43"/>
+    <p:sldId id="373" r:id="rId44"/>
+    <p:sldId id="260" r:id="rId45"/>
+    <p:sldId id="261" r:id="rId46"/>
+    <p:sldId id="266" r:id="rId47"/>
+    <p:sldId id="268" r:id="rId48"/>
+    <p:sldId id="270" r:id="rId49"/>
+    <p:sldId id="271" r:id="rId50"/>
+    <p:sldId id="374" r:id="rId51"/>
+    <p:sldId id="326" r:id="rId52"/>
+    <p:sldId id="378" r:id="rId53"/>
   </p:sldIdLst>
   <p:sldSz cx="9144000" cy="6858000" type="screen4x3"/>
   <p:notesSz cx="7315200" cy="9601200"/>
@@ -175,6 +177,7 @@
             <p14:sldId id="408"/>
             <p14:sldId id="404"/>
             <p14:sldId id="394"/>
+            <p14:sldId id="486"/>
             <p14:sldId id="405"/>
             <p14:sldId id="396"/>
             <p14:sldId id="392"/>
@@ -188,6 +191,7 @@
             <p14:sldId id="384"/>
             <p14:sldId id="385"/>
             <p14:sldId id="386"/>
+            <p14:sldId id="487"/>
             <p14:sldId id="403"/>
           </p14:sldIdLst>
         </p14:section>
@@ -8166,13 +8170,13 @@
       <dgm:prSet presAssocID="{5F0A003A-6DD9-4F05-BF2F-63CD47C516E9}" presName="iconRect" presStyleLbl="node1" presStyleIdx="0" presStyleCnt="3"/>
       <dgm:spPr>
         <a:blipFill>
-          <a:blip xmlns:r="http://schemas.openxmlformats.org/officeDocument/2006/relationships" r:embed="rId1">
+          <a:blip xmlns:r="http://schemas.openxmlformats.org/officeDocument/2006/relationships">
             <a:extLst>
               <a:ext uri="{28A0092B-C50C-407E-A947-70E740481C1C}">
                 <a14:useLocalDpi xmlns:a14="http://schemas.microsoft.com/office/drawing/2010/main" val="0"/>
               </a:ext>
               <a:ext uri="{96DAC541-7B7A-43D3-8B79-37D633B846F1}">
-                <asvg:svgBlip xmlns:asvg="http://schemas.microsoft.com/office/drawing/2016/SVG/main" r:embed="rId2"/>
+                <asvg:svgBlip xmlns:asvg="http://schemas.microsoft.com/office/drawing/2016/SVG/main" r:embed="rId1"/>
               </a:ext>
             </a:extLst>
           </a:blip>
@@ -8219,13 +8223,13 @@
       <dgm:prSet presAssocID="{0128F8B8-0712-4E4F-80F5-FDEF1C72BDBB}" presName="iconRect" presStyleLbl="node1" presStyleIdx="1" presStyleCnt="3"/>
       <dgm:spPr>
         <a:blipFill>
-          <a:blip xmlns:r="http://schemas.openxmlformats.org/officeDocument/2006/relationships" r:embed="rId3">
+          <a:blip xmlns:r="http://schemas.openxmlformats.org/officeDocument/2006/relationships">
             <a:extLst>
               <a:ext uri="{28A0092B-C50C-407E-A947-70E740481C1C}">
                 <a14:useLocalDpi xmlns:a14="http://schemas.microsoft.com/office/drawing/2010/main" val="0"/>
               </a:ext>
               <a:ext uri="{96DAC541-7B7A-43D3-8B79-37D633B846F1}">
-                <asvg:svgBlip xmlns:asvg="http://schemas.microsoft.com/office/drawing/2016/SVG/main" r:embed="rId4"/>
+                <asvg:svgBlip xmlns:asvg="http://schemas.microsoft.com/office/drawing/2016/SVG/main" r:embed="rId2"/>
               </a:ext>
             </a:extLst>
           </a:blip>
@@ -8278,13 +8282,13 @@
       <dgm:prSet presAssocID="{897FC9AA-169E-4730-A19A-2E032574A73A}" presName="iconRect" presStyleLbl="node1" presStyleIdx="2" presStyleCnt="3"/>
       <dgm:spPr>
         <a:blipFill>
-          <a:blip xmlns:r="http://schemas.openxmlformats.org/officeDocument/2006/relationships" r:embed="rId5">
+          <a:blip xmlns:r="http://schemas.openxmlformats.org/officeDocument/2006/relationships">
             <a:extLst>
               <a:ext uri="{28A0092B-C50C-407E-A947-70E740481C1C}">
                 <a14:useLocalDpi xmlns:a14="http://schemas.microsoft.com/office/drawing/2010/main" val="0"/>
               </a:ext>
               <a:ext uri="{96DAC541-7B7A-43D3-8B79-37D633B846F1}">
-                <asvg:svgBlip xmlns:asvg="http://schemas.microsoft.com/office/drawing/2016/SVG/main" r:embed="rId6"/>
+                <asvg:svgBlip xmlns:asvg="http://schemas.microsoft.com/office/drawing/2016/SVG/main" r:embed="rId3"/>
               </a:ext>
             </a:extLst>
           </a:blip>
@@ -11079,13 +11083,13 @@
           <a:avLst/>
         </a:prstGeom>
         <a:blipFill>
-          <a:blip xmlns:r="http://schemas.openxmlformats.org/officeDocument/2006/relationships" r:embed="rId1">
+          <a:blip xmlns:r="http://schemas.openxmlformats.org/officeDocument/2006/relationships">
             <a:extLst>
               <a:ext uri="{28A0092B-C50C-407E-A947-70E740481C1C}">
                 <a14:useLocalDpi xmlns:a14="http://schemas.microsoft.com/office/drawing/2010/main" val="0"/>
               </a:ext>
               <a:ext uri="{96DAC541-7B7A-43D3-8B79-37D633B846F1}">
-                <asvg:svgBlip xmlns:asvg="http://schemas.microsoft.com/office/drawing/2016/SVG/main" r:embed="rId2"/>
+                <asvg:svgBlip xmlns:asvg="http://schemas.microsoft.com/office/drawing/2016/SVG/main" r:embed="rId1"/>
               </a:ext>
             </a:extLst>
           </a:blip>
@@ -11234,13 +11238,13 @@
           <a:avLst/>
         </a:prstGeom>
         <a:blipFill>
-          <a:blip xmlns:r="http://schemas.openxmlformats.org/officeDocument/2006/relationships" r:embed="rId3">
+          <a:blip xmlns:r="http://schemas.openxmlformats.org/officeDocument/2006/relationships">
             <a:extLst>
               <a:ext uri="{28A0092B-C50C-407E-A947-70E740481C1C}">
                 <a14:useLocalDpi xmlns:a14="http://schemas.microsoft.com/office/drawing/2010/main" val="0"/>
               </a:ext>
               <a:ext uri="{96DAC541-7B7A-43D3-8B79-37D633B846F1}">
-                <asvg:svgBlip xmlns:asvg="http://schemas.microsoft.com/office/drawing/2016/SVG/main" r:embed="rId4"/>
+                <asvg:svgBlip xmlns:asvg="http://schemas.microsoft.com/office/drawing/2016/SVG/main" r:embed="rId2"/>
               </a:ext>
             </a:extLst>
           </a:blip>
@@ -11469,13 +11473,13 @@
           <a:avLst/>
         </a:prstGeom>
         <a:blipFill>
-          <a:blip xmlns:r="http://schemas.openxmlformats.org/officeDocument/2006/relationships" r:embed="rId5">
+          <a:blip xmlns:r="http://schemas.openxmlformats.org/officeDocument/2006/relationships">
             <a:extLst>
               <a:ext uri="{28A0092B-C50C-407E-A947-70E740481C1C}">
                 <a14:useLocalDpi xmlns:a14="http://schemas.microsoft.com/office/drawing/2010/main" val="0"/>
               </a:ext>
               <a:ext uri="{96DAC541-7B7A-43D3-8B79-37D633B846F1}">
-                <asvg:svgBlip xmlns:asvg="http://schemas.microsoft.com/office/drawing/2016/SVG/main" r:embed="rId6"/>
+                <asvg:svgBlip xmlns:asvg="http://schemas.microsoft.com/office/drawing/2016/SVG/main" r:embed="rId3"/>
               </a:ext>
             </a:extLst>
           </a:blip>
@@ -22319,7 +22323,7 @@
             <a:fld id="{441436E8-D6C9-439C-8057-F594059D4145}" type="datetimeFigureOut">
               <a:rPr lang="en-US" smtClean="0"/>
               <a:pPr/>
-              <a:t>6/5/2025</a:t>
+              <a:t>10/23/2026</a:t>
             </a:fld>
             <a:endParaRPr lang="en-US"/>
           </a:p>
@@ -22734,7 +22738,7 @@
             <a:fld id="{CFBD67E5-DBC4-4CEE-B749-873FCECA15D7}" type="slidenum">
               <a:rPr lang="en-US" smtClean="0"/>
               <a:pPr/>
-              <a:t>24</a:t>
+              <a:t>26</a:t>
             </a:fld>
             <a:endParaRPr lang="en-US"/>
           </a:p>
@@ -22816,7 +22820,7 @@
             <a:fld id="{5A826FDB-2EAA-4928-AF32-DAB919F695A6}" type="slidenum">
               <a:rPr lang="en-US" smtClean="0"/>
               <a:pPr/>
-              <a:t>25</a:t>
+              <a:t>27</a:t>
             </a:fld>
             <a:endParaRPr lang="en-US"/>
           </a:p>
@@ -22898,7 +22902,7 @@
             <a:fld id="{CFBD67E5-DBC4-4CEE-B749-873FCECA15D7}" type="slidenum">
               <a:rPr lang="en-US" smtClean="0"/>
               <a:pPr/>
-              <a:t>26</a:t>
+              <a:t>28</a:t>
             </a:fld>
             <a:endParaRPr lang="en-US"/>
           </a:p>
@@ -22980,7 +22984,7 @@
             <a:fld id="{CFBD67E5-DBC4-4CEE-B749-873FCECA15D7}" type="slidenum">
               <a:rPr lang="en-US" smtClean="0"/>
               <a:pPr/>
-              <a:t>27</a:t>
+              <a:t>29</a:t>
             </a:fld>
             <a:endParaRPr lang="en-US"/>
           </a:p>
@@ -23067,7 +23071,7 @@
             <a:fld id="{5A826FDB-2EAA-4928-AF32-DAB919F695A6}" type="slidenum">
               <a:rPr lang="en-US" smtClean="0"/>
               <a:pPr/>
-              <a:t>28</a:t>
+              <a:t>30</a:t>
             </a:fld>
             <a:endParaRPr lang="en-US"/>
           </a:p>
@@ -23239,7 +23243,7 @@
             <a:fld id="{CFBD67E5-DBC4-4CEE-B749-873FCECA15D7}" type="slidenum">
               <a:rPr lang="en-US" smtClean="0"/>
               <a:pPr/>
-              <a:t>29</a:t>
+              <a:t>31</a:t>
             </a:fld>
             <a:endParaRPr lang="en-US"/>
           </a:p>
@@ -23321,7 +23325,7 @@
             <a:fld id="{CFBD67E5-DBC4-4CEE-B749-873FCECA15D7}" type="slidenum">
               <a:rPr lang="en-US" smtClean="0"/>
               <a:pPr/>
-              <a:t>30</a:t>
+              <a:t>32</a:t>
             </a:fld>
             <a:endParaRPr lang="en-US"/>
           </a:p>
@@ -23403,7 +23407,7 @@
             <a:fld id="{CFBD67E5-DBC4-4CEE-B749-873FCECA15D7}" type="slidenum">
               <a:rPr lang="en-US" smtClean="0"/>
               <a:pPr/>
-              <a:t>31</a:t>
+              <a:t>33</a:t>
             </a:fld>
             <a:endParaRPr lang="en-US"/>
           </a:p>
@@ -23485,7 +23489,7 @@
             <a:fld id="{CFBD67E5-DBC4-4CEE-B749-873FCECA15D7}" type="slidenum">
               <a:rPr lang="en-US" smtClean="0"/>
               <a:pPr/>
-              <a:t>32</a:t>
+              <a:t>34</a:t>
             </a:fld>
             <a:endParaRPr lang="en-US"/>
           </a:p>
@@ -23567,7 +23571,7 @@
             <a:fld id="{CFBD67E5-DBC4-4CEE-B749-873FCECA15D7}" type="slidenum">
               <a:rPr lang="en-US" smtClean="0"/>
               <a:pPr/>
-              <a:t>33</a:t>
+              <a:t>35</a:t>
             </a:fld>
             <a:endParaRPr lang="en-US"/>
           </a:p>
@@ -23731,7 +23735,7 @@
             <a:fld id="{CFBD67E5-DBC4-4CEE-B749-873FCECA15D7}" type="slidenum">
               <a:rPr lang="en-US" smtClean="0"/>
               <a:pPr/>
-              <a:t>34</a:t>
+              <a:t>36</a:t>
             </a:fld>
             <a:endParaRPr lang="en-US"/>
           </a:p>
@@ -23813,7 +23817,7 @@
             <a:fld id="{CFBD67E5-DBC4-4CEE-B749-873FCECA15D7}" type="slidenum">
               <a:rPr lang="en-US" smtClean="0"/>
               <a:pPr/>
-              <a:t>35</a:t>
+              <a:t>37</a:t>
             </a:fld>
             <a:endParaRPr lang="en-US"/>
           </a:p>
@@ -23895,7 +23899,7 @@
             <a:fld id="{CFBD67E5-DBC4-4CEE-B749-873FCECA15D7}" type="slidenum">
               <a:rPr lang="en-US" smtClean="0"/>
               <a:pPr/>
-              <a:t>36</a:t>
+              <a:t>38</a:t>
             </a:fld>
             <a:endParaRPr lang="en-US"/>
           </a:p>
@@ -23993,7 +23997,7 @@
             <a:fld id="{CFBD67E5-DBC4-4CEE-B749-873FCECA15D7}" type="slidenum">
               <a:rPr lang="en-US" smtClean="0"/>
               <a:pPr/>
-              <a:t>37</a:t>
+              <a:t>39</a:t>
             </a:fld>
             <a:endParaRPr lang="en-US"/>
           </a:p>
@@ -24075,7 +24079,7 @@
             <a:fld id="{CFBD67E5-DBC4-4CEE-B749-873FCECA15D7}" type="slidenum">
               <a:rPr lang="en-US" smtClean="0"/>
               <a:pPr/>
-              <a:t>40</a:t>
+              <a:t>42</a:t>
             </a:fld>
             <a:endParaRPr lang="en-US"/>
           </a:p>
@@ -24157,7 +24161,7 @@
             <a:fld id="{B6DFCE81-ED3B-4626-8C28-1345F07C10AE}" type="slidenum">
               <a:rPr lang="en-US" smtClean="0"/>
               <a:pPr/>
-              <a:t>41</a:t>
+              <a:t>43</a:t>
             </a:fld>
             <a:endParaRPr lang="en-US"/>
           </a:p>
@@ -24239,7 +24243,7 @@
             <a:fld id="{B6DFCE81-ED3B-4626-8C28-1345F07C10AE}" type="slidenum">
               <a:rPr lang="en-US" smtClean="0"/>
               <a:pPr/>
-              <a:t>42</a:t>
+              <a:t>44</a:t>
             </a:fld>
             <a:endParaRPr lang="en-US"/>
           </a:p>
@@ -24321,7 +24325,7 @@
             <a:fld id="{B6DFCE81-ED3B-4626-8C28-1345F07C10AE}" type="slidenum">
               <a:rPr lang="en-US" smtClean="0"/>
               <a:pPr/>
-              <a:t>43</a:t>
+              <a:t>45</a:t>
             </a:fld>
             <a:endParaRPr lang="en-US"/>
           </a:p>
@@ -24403,7 +24407,7 @@
             <a:fld id="{B6DFCE81-ED3B-4626-8C28-1345F07C10AE}" type="slidenum">
               <a:rPr lang="en-US" smtClean="0"/>
               <a:pPr/>
-              <a:t>44</a:t>
+              <a:t>46</a:t>
             </a:fld>
             <a:endParaRPr lang="en-US"/>
           </a:p>
@@ -24485,7 +24489,7 @@
             <a:fld id="{B6DFCE81-ED3B-4626-8C28-1345F07C10AE}" type="slidenum">
               <a:rPr lang="en-US" smtClean="0"/>
               <a:pPr/>
-              <a:t>45</a:t>
+              <a:t>47</a:t>
             </a:fld>
             <a:endParaRPr lang="en-US"/>
           </a:p>
@@ -24654,7 +24658,7 @@
             <a:fld id="{B6DFCE81-ED3B-4626-8C28-1345F07C10AE}" type="slidenum">
               <a:rPr lang="en-US" smtClean="0"/>
               <a:pPr/>
-              <a:t>46</a:t>
+              <a:t>48</a:t>
             </a:fld>
             <a:endParaRPr lang="en-US"/>
           </a:p>
@@ -24736,7 +24740,7 @@
             <a:fld id="{B6DFCE81-ED3B-4626-8C28-1345F07C10AE}" type="slidenum">
               <a:rPr lang="en-US" smtClean="0"/>
               <a:pPr/>
-              <a:t>47</a:t>
+              <a:t>49</a:t>
             </a:fld>
             <a:endParaRPr lang="en-US"/>
           </a:p>
@@ -24818,7 +24822,7 @@
             <a:fld id="{B6DFCE81-ED3B-4626-8C28-1345F07C10AE}" type="slidenum">
               <a:rPr lang="en-US" smtClean="0"/>
               <a:pPr/>
-              <a:t>48</a:t>
+              <a:t>50</a:t>
             </a:fld>
             <a:endParaRPr lang="en-US"/>
           </a:p>
@@ -24899,7 +24903,7 @@
           <a:p>
             <a:fld id="{40C272FE-22A1-4627-9B37-0D8B985E52EC}" type="slidenum">
               <a:rPr lang="en-US" smtClean="0"/>
-              <a:t>49</a:t>
+              <a:t>51</a:t>
             </a:fld>
             <a:endParaRPr lang="en-US"/>
           </a:p>
@@ -25068,7 +25072,7 @@
             <a:fld id="{B6DFCE81-ED3B-4626-8C28-1345F07C10AE}" type="slidenum">
               <a:rPr lang="en-US" smtClean="0"/>
               <a:pPr/>
-              <a:t>12</a:t>
+              <a:t>13</a:t>
             </a:fld>
             <a:endParaRPr lang="en-US"/>
           </a:p>
@@ -25155,7 +25159,7 @@
             <a:fld id="{B6DFCE81-ED3B-4626-8C28-1345F07C10AE}" type="slidenum">
               <a:rPr lang="en-US" smtClean="0"/>
               <a:pPr/>
-              <a:t>16</a:t>
+              <a:t>17</a:t>
             </a:fld>
             <a:endParaRPr lang="en-US"/>
           </a:p>
@@ -25242,7 +25246,7 @@
             <a:fld id="{CFBD67E5-DBC4-4CEE-B749-873FCECA15D7}" type="slidenum">
               <a:rPr lang="en-US" smtClean="0"/>
               <a:pPr/>
-              <a:t>18</a:t>
+              <a:t>19</a:t>
             </a:fld>
             <a:endParaRPr lang="en-US"/>
           </a:p>
@@ -25329,7 +25333,7 @@
             <a:fld id="{CFBD67E5-DBC4-4CEE-B749-873FCECA15D7}" type="slidenum">
               <a:rPr lang="en-US" smtClean="0"/>
               <a:pPr/>
-              <a:t>22</a:t>
+              <a:t>24</a:t>
             </a:fld>
             <a:endParaRPr lang="en-US"/>
           </a:p>
@@ -25411,7 +25415,7 @@
             <a:fld id="{B6DFCE81-ED3B-4626-8C28-1345F07C10AE}" type="slidenum">
               <a:rPr lang="en-US" smtClean="0"/>
               <a:pPr/>
-              <a:t>23</a:t>
+              <a:t>25</a:t>
             </a:fld>
             <a:endParaRPr lang="en-US"/>
           </a:p>
@@ -30045,6 +30049,154 @@
   <p:cSld>
     <p:spTree>
       <p:nvGrpSpPr>
+        <p:cNvPr id="1" name=""/>
+        <p:cNvGrpSpPr/>
+        <p:nvPr/>
+      </p:nvGrpSpPr>
+      <p:grpSpPr>
+        <a:xfrm>
+          <a:off x="0" y="0"/>
+          <a:ext cx="0" cy="0"/>
+          <a:chOff x="0" y="0"/>
+          <a:chExt cx="0" cy="0"/>
+        </a:xfrm>
+      </p:grpSpPr>
+      <p:sp>
+        <p:nvSpPr>
+          <p:cNvPr id="4" name="Title 3">
+            <a:extLst>
+              <a:ext uri="{FF2B5EF4-FFF2-40B4-BE49-F238E27FC236}">
+                <a16:creationId xmlns:a16="http://schemas.microsoft.com/office/drawing/2014/main" id="{24CD2877-1046-6123-CF1E-BE9F2D8536CB}"/>
+              </a:ext>
+            </a:extLst>
+          </p:cNvPr>
+          <p:cNvSpPr>
+            <a:spLocks noGrp="1"/>
+          </p:cNvSpPr>
+          <p:nvPr>
+            <p:ph type="title"/>
+          </p:nvPr>
+        </p:nvSpPr>
+        <p:spPr>
+          <a:xfrm>
+            <a:off x="829115" y="2931914"/>
+            <a:ext cx="7886700" cy="876035"/>
+          </a:xfrm>
+        </p:spPr>
+        <p:txBody>
+          <a:bodyPr>
+            <a:noAutofit/>
+          </a:bodyPr>
+          <a:lstStyle/>
+          <a:p>
+            <a:r>
+              <a:rPr lang="en-US" sz="3200" b="1" dirty="0">
+                <a:latin typeface="+mn-lt"/>
+              </a:rPr>
+              <a:t>Code example</a:t>
+            </a:r>
+            <a:r>
+              <a:rPr lang="en-US" sz="3200" dirty="0">
+                <a:latin typeface="+mn-lt"/>
+              </a:rPr>
+              <a:t>: </a:t>
+            </a:r>
+            <a:br>
+              <a:rPr lang="en-US" sz="3200" dirty="0">
+                <a:latin typeface="+mn-lt"/>
+              </a:rPr>
+            </a:br>
+            <a:r>
+              <a:rPr lang="en-US" sz="3200" dirty="0">
+                <a:latin typeface="+mn-lt"/>
+              </a:rPr>
+              <a:t>A Simple Prolog Knowledge Base</a:t>
+            </a:r>
+            <a:br>
+              <a:rPr lang="en-US" sz="3200" dirty="0">
+                <a:latin typeface="+mn-lt"/>
+              </a:rPr>
+            </a:br>
+            <a:r>
+              <a:rPr lang="en-US" sz="3200" dirty="0">
+                <a:latin typeface="+mn-lt"/>
+              </a:rPr>
+              <a:t>The n-Queens Problem as a Logic Problem</a:t>
+            </a:r>
+            <a:br>
+              <a:rPr lang="en-US" sz="3200" dirty="0">
+                <a:latin typeface="+mn-lt"/>
+              </a:rPr>
+            </a:br>
+            <a:endParaRPr lang="en-US" sz="3200" dirty="0">
+              <a:latin typeface="+mn-lt"/>
+            </a:endParaRPr>
+          </a:p>
+        </p:txBody>
+      </p:sp>
+      <p:sp>
+        <p:nvSpPr>
+          <p:cNvPr id="5" name="TextBox 4">
+            <a:extLst>
+              <a:ext uri="{FF2B5EF4-FFF2-40B4-BE49-F238E27FC236}">
+                <a16:creationId xmlns:a16="http://schemas.microsoft.com/office/drawing/2014/main" id="{5AA484FF-058C-4694-424C-0B3B26DF9F45}"/>
+              </a:ext>
+            </a:extLst>
+          </p:cNvPr>
+          <p:cNvSpPr txBox="1"/>
+          <p:nvPr/>
+        </p:nvSpPr>
+        <p:spPr>
+          <a:xfrm>
+            <a:off x="893299" y="5365946"/>
+            <a:ext cx="6608298" cy="253916"/>
+          </a:xfrm>
+          <a:prstGeom prst="rect">
+            <a:avLst/>
+          </a:prstGeom>
+          <a:noFill/>
+        </p:spPr>
+        <p:txBody>
+          <a:bodyPr wrap="square" rtlCol="0">
+            <a:spAutoFit/>
+          </a:bodyPr>
+          <a:lstStyle/>
+          <a:p>
+            <a:r>
+              <a:rPr lang="en-US" sz="1050" dirty="0"/>
+              <a:t>See Code on </a:t>
+            </a:r>
+            <a:r>
+              <a:rPr lang="en-US" sz="1050" dirty="0">
+                <a:hlinkClick r:id="rId2"/>
+              </a:rPr>
+              <a:t>https://michael.hahsler.net/Introduction_to_Artificial_Intelligence/</a:t>
+            </a:r>
+            <a:r>
+              <a:rPr lang="en-US" sz="1050" dirty="0"/>
+              <a:t> </a:t>
+            </a:r>
+          </a:p>
+        </p:txBody>
+      </p:sp>
+    </p:spTree>
+    <p:extLst>
+      <p:ext uri="{BB962C8B-B14F-4D97-AF65-F5344CB8AC3E}">
+        <p14:creationId xmlns:p14="http://schemas.microsoft.com/office/powerpoint/2010/main" val="190193640"/>
+      </p:ext>
+    </p:extLst>
+  </p:cSld>
+  <p:clrMapOvr>
+    <a:masterClrMapping/>
+  </p:clrMapOvr>
+</p:sld>
+</file>
+
+<file path=ppt/slides/slide12.xml><?xml version="1.0" encoding="utf-8"?>
+<p:sld xmlns:a="http://schemas.openxmlformats.org/drawingml/2006/main" xmlns:r="http://schemas.openxmlformats.org/officeDocument/2006/relationships" xmlns:p="http://schemas.openxmlformats.org/presentationml/2006/main">
+  <p:cSld>
+    <p:spTree>
+      <p:nvGrpSpPr>
         <p:cNvPr id="1" name="">
           <a:extLst>
             <a:ext uri="{FF2B5EF4-FFF2-40B4-BE49-F238E27FC236}">
@@ -30138,7 +30290,7 @@
 </p:sld>
 </file>
 
-<file path=ppt/slides/slide12.xml><?xml version="1.0" encoding="utf-8"?>
+<file path=ppt/slides/slide13.xml><?xml version="1.0" encoding="utf-8"?>
 <p:sld xmlns:a="http://schemas.openxmlformats.org/drawingml/2006/main" xmlns:r="http://schemas.openxmlformats.org/officeDocument/2006/relationships" xmlns:p="http://schemas.openxmlformats.org/presentationml/2006/main">
   <p:cSld>
     <p:spTree>
@@ -30385,7 +30537,7 @@
 </p:sld>
 </file>
 
-<file path=ppt/slides/slide13.xml><?xml version="1.0" encoding="utf-8"?>
+<file path=ppt/slides/slide14.xml><?xml version="1.0" encoding="utf-8"?>
 <p:sld xmlns:a="http://schemas.openxmlformats.org/drawingml/2006/main" xmlns:r="http://schemas.openxmlformats.org/officeDocument/2006/relationships" xmlns:p="http://schemas.openxmlformats.org/presentationml/2006/main">
   <p:cSld>
     <p:spTree>
@@ -30793,7 +30945,7 @@
 </p:sld>
 </file>
 
-<file path=ppt/slides/slide14.xml><?xml version="1.0" encoding="utf-8"?>
+<file path=ppt/slides/slide15.xml><?xml version="1.0" encoding="utf-8"?>
 <p:sld xmlns:a="http://schemas.openxmlformats.org/drawingml/2006/main" xmlns:r="http://schemas.openxmlformats.org/officeDocument/2006/relationships" xmlns:p="http://schemas.openxmlformats.org/presentationml/2006/main">
   <p:cSld>
     <p:bg>
@@ -31179,7 +31331,7 @@
 </p:sld>
 </file>
 
-<file path=ppt/slides/slide15.xml><?xml version="1.0" encoding="utf-8"?>
+<file path=ppt/slides/slide16.xml><?xml version="1.0" encoding="utf-8"?>
 <p:sld xmlns:a="http://schemas.openxmlformats.org/drawingml/2006/main" xmlns:r="http://schemas.openxmlformats.org/officeDocument/2006/relationships" xmlns:p="http://schemas.openxmlformats.org/presentationml/2006/main">
   <p:cSld>
     <p:spTree>
@@ -31277,7 +31429,7 @@
 </p:sld>
 </file>
 
-<file path=ppt/slides/slide16.xml><?xml version="1.0" encoding="utf-8"?>
+<file path=ppt/slides/slide17.xml><?xml version="1.0" encoding="utf-8"?>
 <p:sld xmlns:a="http://schemas.openxmlformats.org/drawingml/2006/main" xmlns:r="http://schemas.openxmlformats.org/officeDocument/2006/relationships" xmlns:p="http://schemas.openxmlformats.org/presentationml/2006/main">
   <p:cSld>
     <p:spTree>
@@ -31590,7 +31742,7 @@
 </p:sld>
 </file>
 
-<file path=ppt/slides/slide17.xml><?xml version="1.0" encoding="utf-8"?>
+<file path=ppt/slides/slide18.xml><?xml version="1.0" encoding="utf-8"?>
 <p:sld xmlns:a="http://schemas.openxmlformats.org/drawingml/2006/main" xmlns:r="http://schemas.openxmlformats.org/officeDocument/2006/relationships" xmlns:p="http://schemas.openxmlformats.org/presentationml/2006/main">
   <p:cSld>
     <p:spTree>
@@ -32469,7 +32621,7 @@
 </p:sld>
 </file>
 
-<file path=ppt/slides/slide18.xml><?xml version="1.0" encoding="utf-8"?>
+<file path=ppt/slides/slide19.xml><?xml version="1.0" encoding="utf-8"?>
 <p:sld xmlns:a="http://schemas.openxmlformats.org/drawingml/2006/main" xmlns:r="http://schemas.openxmlformats.org/officeDocument/2006/relationships" xmlns:p="http://schemas.openxmlformats.org/presentationml/2006/main">
   <p:cSld>
     <p:spTree>
@@ -33031,7 +33183,134 @@
 </p:sld>
 </file>
 
-<file path=ppt/slides/slide19.xml><?xml version="1.0" encoding="utf-8"?>
+<file path=ppt/slides/slide2.xml><?xml version="1.0" encoding="utf-8"?>
+<p:sld xmlns:a="http://schemas.openxmlformats.org/drawingml/2006/main" xmlns:r="http://schemas.openxmlformats.org/officeDocument/2006/relationships" xmlns:p="http://schemas.openxmlformats.org/presentationml/2006/main">
+  <p:cSld>
+    <p:spTree>
+      <p:nvGrpSpPr>
+        <p:cNvPr id="1" name=""/>
+        <p:cNvGrpSpPr/>
+        <p:nvPr/>
+      </p:nvGrpSpPr>
+      <p:grpSpPr>
+        <a:xfrm>
+          <a:off x="0" y="0"/>
+          <a:ext cx="0" cy="0"/>
+          <a:chOff x="0" y="0"/>
+          <a:chExt cx="0" cy="0"/>
+        </a:xfrm>
+      </p:grpSpPr>
+      <p:sp>
+        <p:nvSpPr>
+          <p:cNvPr id="2" name="Title 1">
+            <a:extLst>
+              <a:ext uri="{FF2B5EF4-FFF2-40B4-BE49-F238E27FC236}">
+                <a16:creationId xmlns:a16="http://schemas.microsoft.com/office/drawing/2014/main" id="{0851C6F4-EAEE-3A2C-E0D3-13A2225B511B}"/>
+              </a:ext>
+            </a:extLst>
+          </p:cNvPr>
+          <p:cNvSpPr>
+            <a:spLocks noGrp="1"/>
+          </p:cNvSpPr>
+          <p:nvPr>
+            <p:ph type="title"/>
+          </p:nvPr>
+        </p:nvSpPr>
+        <p:spPr/>
+        <p:txBody>
+          <a:bodyPr/>
+          <a:lstStyle/>
+          <a:p>
+            <a:r>
+              <a:rPr lang="en-US" dirty="0"/>
+              <a:t>Agent Types So Far</a:t>
+            </a:r>
+          </a:p>
+        </p:txBody>
+      </p:sp>
+      <p:graphicFrame>
+        <p:nvGraphicFramePr>
+          <p:cNvPr id="5" name="Content Placeholder 1">
+            <a:extLst>
+              <a:ext uri="{FF2B5EF4-FFF2-40B4-BE49-F238E27FC236}">
+                <a16:creationId xmlns:a16="http://schemas.microsoft.com/office/drawing/2014/main" id="{A31C02F7-5C7D-7144-139C-8CA2E991DBEB}"/>
+              </a:ext>
+              <a:ext uri="{C183D7F6-B498-43B3-948B-1728B52AA6E4}">
+                <adec:decorative xmlns:adec="http://schemas.microsoft.com/office/drawing/2017/decorative" val="1"/>
+              </a:ext>
+            </a:extLst>
+          </p:cNvPr>
+          <p:cNvGraphicFramePr>
+            <a:graphicFrameLocks/>
+          </p:cNvGraphicFramePr>
+          <p:nvPr>
+            <p:extLst>
+              <p:ext uri="{D42A27DB-BD31-4B8C-83A1-F6EECF244321}">
+                <p14:modId xmlns:p14="http://schemas.microsoft.com/office/powerpoint/2010/main" val="1630392266"/>
+              </p:ext>
+            </p:extLst>
+          </p:nvPr>
+        </p:nvGraphicFramePr>
+        <p:xfrm>
+          <a:off x="2057400" y="1524000"/>
+          <a:ext cx="5715000" cy="4064416"/>
+        </p:xfrm>
+        <a:graphic>
+          <a:graphicData uri="http://schemas.openxmlformats.org/drawingml/2006/diagram">
+            <dgm:relIds xmlns:dgm="http://schemas.openxmlformats.org/drawingml/2006/diagram" xmlns:r="http://schemas.openxmlformats.org/officeDocument/2006/relationships" r:dm="rId2" r:lo="rId3" r:qs="rId4" r:cs="rId5"/>
+          </a:graphicData>
+        </a:graphic>
+      </p:graphicFrame>
+      <p:sp>
+        <p:nvSpPr>
+          <p:cNvPr id="6" name="TextBox 5">
+            <a:extLst>
+              <a:ext uri="{FF2B5EF4-FFF2-40B4-BE49-F238E27FC236}">
+                <a16:creationId xmlns:a16="http://schemas.microsoft.com/office/drawing/2014/main" id="{943A72C2-3233-1D0F-8071-D60FE2C38B53}"/>
+              </a:ext>
+            </a:extLst>
+          </p:cNvPr>
+          <p:cNvSpPr txBox="1"/>
+          <p:nvPr/>
+        </p:nvSpPr>
+        <p:spPr>
+          <a:xfrm>
+            <a:off x="611806" y="5846543"/>
+            <a:ext cx="7886700" cy="646331"/>
+          </a:xfrm>
+          <a:prstGeom prst="rect">
+            <a:avLst/>
+          </a:prstGeom>
+          <a:noFill/>
+        </p:spPr>
+        <p:txBody>
+          <a:bodyPr wrap="square" rtlCol="0">
+            <a:spAutoFit/>
+          </a:bodyPr>
+          <a:lstStyle/>
+          <a:p>
+            <a:pPr algn="ctr"/>
+            <a:r>
+              <a:rPr lang="en-US" dirty="0"/>
+              <a:t>We will introduce a different class of agents that relies on reasoning using knowledge. </a:t>
+            </a:r>
+          </a:p>
+        </p:txBody>
+      </p:sp>
+    </p:spTree>
+    <p:extLst>
+      <p:ext uri="{BB962C8B-B14F-4D97-AF65-F5344CB8AC3E}">
+        <p14:creationId xmlns:p14="http://schemas.microsoft.com/office/powerpoint/2010/main" val="1928471697"/>
+      </p:ext>
+    </p:extLst>
+  </p:cSld>
+  <p:clrMapOvr>
+    <a:masterClrMapping/>
+  </p:clrMapOvr>
+</p:sld>
+</file>
+
+<file path=ppt/slides/slide20.xml><?xml version="1.0" encoding="utf-8"?>
 <p:sld xmlns:a="http://schemas.openxmlformats.org/drawingml/2006/main" xmlns:r="http://schemas.openxmlformats.org/officeDocument/2006/relationships" xmlns:p="http://schemas.openxmlformats.org/presentationml/2006/main">
   <p:cSld>
     <p:spTree>
@@ -33488,12 +33767,18 @@
 </p:sld>
 </file>
 
-<file path=ppt/slides/slide2.xml><?xml version="1.0" encoding="utf-8"?>
+<file path=ppt/slides/slide21.xml><?xml version="1.0" encoding="utf-8"?>
 <p:sld xmlns:a="http://schemas.openxmlformats.org/drawingml/2006/main" xmlns:r="http://schemas.openxmlformats.org/officeDocument/2006/relationships" xmlns:p="http://schemas.openxmlformats.org/presentationml/2006/main">
   <p:cSld>
     <p:spTree>
       <p:nvGrpSpPr>
-        <p:cNvPr id="1" name=""/>
+        <p:cNvPr id="1" name="">
+          <a:extLst>
+            <a:ext uri="{FF2B5EF4-FFF2-40B4-BE49-F238E27FC236}">
+              <a16:creationId xmlns:a16="http://schemas.microsoft.com/office/drawing/2014/main" id="{14203831-BEA3-8727-30FD-294664BF5451}"/>
+            </a:ext>
+          </a:extLst>
+        </p:cNvPr>
         <p:cNvGrpSpPr/>
         <p:nvPr/>
       </p:nvGrpSpPr>
@@ -33507,10 +33792,10 @@
       </p:grpSpPr>
       <p:sp>
         <p:nvSpPr>
-          <p:cNvPr id="2" name="Title 1">
+          <p:cNvPr id="4" name="Title 3">
             <a:extLst>
               <a:ext uri="{FF2B5EF4-FFF2-40B4-BE49-F238E27FC236}">
-                <a16:creationId xmlns:a16="http://schemas.microsoft.com/office/drawing/2014/main" id="{0851C6F4-EAEE-3A2C-E0D3-13A2225B511B}"/>
+                <a16:creationId xmlns:a16="http://schemas.microsoft.com/office/drawing/2014/main" id="{D812F2D6-321D-CEF8-E821-8B8598192F6B}"/>
               </a:ext>
             </a:extLst>
           </p:cNvPr>
@@ -33521,57 +33806,64 @@
             <p:ph type="title"/>
           </p:nvPr>
         </p:nvSpPr>
-        <p:spPr/>
+        <p:spPr>
+          <a:xfrm>
+            <a:off x="829115" y="2931914"/>
+            <a:ext cx="7886700" cy="876035"/>
+          </a:xfrm>
+        </p:spPr>
         <p:txBody>
-          <a:bodyPr/>
+          <a:bodyPr>
+            <a:noAutofit/>
+          </a:bodyPr>
           <a:lstStyle/>
           <a:p>
             <a:r>
-              <a:rPr lang="en-US" dirty="0"/>
-              <a:t>Agent Types So Far</a:t>
-            </a:r>
+              <a:rPr lang="en-US" sz="3200" b="1" dirty="0">
+                <a:latin typeface="+mn-lt"/>
+              </a:rPr>
+              <a:t>Code example</a:t>
+            </a:r>
+            <a:r>
+              <a:rPr lang="en-US" sz="3200" dirty="0">
+                <a:latin typeface="+mn-lt"/>
+              </a:rPr>
+              <a:t>: </a:t>
+            </a:r>
+            <a:br>
+              <a:rPr lang="en-US" sz="3200">
+                <a:latin typeface="+mn-lt"/>
+              </a:rPr>
+            </a:br>
+            <a:r>
+              <a:rPr lang="en-US" sz="3200">
+                <a:latin typeface="+mn-lt"/>
+              </a:rPr>
+              <a:t>Large </a:t>
+            </a:r>
+            <a:r>
+              <a:rPr lang="en-US" sz="3200" dirty="0">
+                <a:latin typeface="+mn-lt"/>
+              </a:rPr>
+              <a:t>Language Models</a:t>
+            </a:r>
+            <a:br>
+              <a:rPr lang="en-US" sz="3200" dirty="0">
+                <a:latin typeface="+mn-lt"/>
+              </a:rPr>
+            </a:br>
+            <a:endParaRPr lang="en-US" sz="3200" dirty="0">
+              <a:latin typeface="+mn-lt"/>
+            </a:endParaRPr>
           </a:p>
         </p:txBody>
       </p:sp>
-      <p:graphicFrame>
-        <p:nvGraphicFramePr>
-          <p:cNvPr id="5" name="Content Placeholder 1">
+      <p:sp>
+        <p:nvSpPr>
+          <p:cNvPr id="5" name="TextBox 4">
             <a:extLst>
               <a:ext uri="{FF2B5EF4-FFF2-40B4-BE49-F238E27FC236}">
-                <a16:creationId xmlns:a16="http://schemas.microsoft.com/office/drawing/2014/main" id="{A31C02F7-5C7D-7144-139C-8CA2E991DBEB}"/>
-              </a:ext>
-              <a:ext uri="{C183D7F6-B498-43B3-948B-1728B52AA6E4}">
-                <adec:decorative xmlns:adec="http://schemas.microsoft.com/office/drawing/2017/decorative" val="1"/>
-              </a:ext>
-            </a:extLst>
-          </p:cNvPr>
-          <p:cNvGraphicFramePr>
-            <a:graphicFrameLocks/>
-          </p:cNvGraphicFramePr>
-          <p:nvPr>
-            <p:extLst>
-              <p:ext uri="{D42A27DB-BD31-4B8C-83A1-F6EECF244321}">
-                <p14:modId xmlns:p14="http://schemas.microsoft.com/office/powerpoint/2010/main" val="1630392266"/>
-              </p:ext>
-            </p:extLst>
-          </p:nvPr>
-        </p:nvGraphicFramePr>
-        <p:xfrm>
-          <a:off x="2057400" y="1524000"/>
-          <a:ext cx="5715000" cy="4064416"/>
-        </p:xfrm>
-        <a:graphic>
-          <a:graphicData uri="http://schemas.openxmlformats.org/drawingml/2006/diagram">
-            <dgm:relIds xmlns:dgm="http://schemas.openxmlformats.org/drawingml/2006/diagram" xmlns:r="http://schemas.openxmlformats.org/officeDocument/2006/relationships" r:dm="rId2" r:lo="rId3" r:qs="rId4" r:cs="rId5"/>
-          </a:graphicData>
-        </a:graphic>
-      </p:graphicFrame>
-      <p:sp>
-        <p:nvSpPr>
-          <p:cNvPr id="6" name="TextBox 5">
-            <a:extLst>
-              <a:ext uri="{FF2B5EF4-FFF2-40B4-BE49-F238E27FC236}">
-                <a16:creationId xmlns:a16="http://schemas.microsoft.com/office/drawing/2014/main" id="{943A72C2-3233-1D0F-8071-D60FE2C38B53}"/>
+                <a16:creationId xmlns:a16="http://schemas.microsoft.com/office/drawing/2014/main" id="{FCD24ECB-30E7-6706-F5B5-9AFDE9CFE15F}"/>
               </a:ext>
             </a:extLst>
           </p:cNvPr>
@@ -33580,8 +33872,8 @@
         </p:nvSpPr>
         <p:spPr>
           <a:xfrm>
-            <a:off x="611806" y="5846543"/>
-            <a:ext cx="7886700" cy="646331"/>
+            <a:off x="893299" y="5365946"/>
+            <a:ext cx="6608298" cy="253916"/>
           </a:xfrm>
           <a:prstGeom prst="rect">
             <a:avLst/>
@@ -33594,10 +33886,19 @@
           </a:bodyPr>
           <a:lstStyle/>
           <a:p>
-            <a:pPr algn="ctr"/>
-            <a:r>
-              <a:rPr lang="en-US" dirty="0"/>
-              <a:t>We will introduce a different class of agents that relies on reasoning using knowledge. </a:t>
+            <a:r>
+              <a:rPr lang="en-US" sz="1050" dirty="0"/>
+              <a:t>See Code on </a:t>
+            </a:r>
+            <a:r>
+              <a:rPr lang="en-US" sz="1050" dirty="0">
+                <a:hlinkClick r:id="rId2"/>
+              </a:rPr>
+              <a:t>https://michael.hahsler.net/Introduction_to_Artificial_Intelligence/</a:t>
+            </a:r>
+            <a:r>
+              <a:rPr lang="en-US" sz="1050" dirty="0"/>
+              <a:t> </a:t>
             </a:r>
           </a:p>
         </p:txBody>
@@ -33605,7 +33906,7 @@
     </p:spTree>
     <p:extLst>
       <p:ext uri="{BB962C8B-B14F-4D97-AF65-F5344CB8AC3E}">
-        <p14:creationId xmlns:p14="http://schemas.microsoft.com/office/powerpoint/2010/main" val="1928471697"/>
+        <p14:creationId xmlns:p14="http://schemas.microsoft.com/office/powerpoint/2010/main" val="274855787"/>
       </p:ext>
     </p:extLst>
   </p:cSld>
@@ -33615,7 +33916,7 @@
 </p:sld>
 </file>
 
-<file path=ppt/slides/slide20.xml><?xml version="1.0" encoding="utf-8"?>
+<file path=ppt/slides/slide22.xml><?xml version="1.0" encoding="utf-8"?>
 <p:sld xmlns:a="http://schemas.openxmlformats.org/drawingml/2006/main" xmlns:r="http://schemas.openxmlformats.org/officeDocument/2006/relationships" xmlns:p="http://schemas.openxmlformats.org/presentationml/2006/main">
   <p:cSld>
     <p:bg>
@@ -34015,7 +34316,7 @@
 </p:sld>
 </file>
 
-<file path=ppt/slides/slide21.xml><?xml version="1.0" encoding="utf-8"?>
+<file path=ppt/slides/slide23.xml><?xml version="1.0" encoding="utf-8"?>
 <p:sld xmlns:a="http://schemas.openxmlformats.org/drawingml/2006/main" xmlns:r="http://schemas.openxmlformats.org/officeDocument/2006/relationships" xmlns:p="http://schemas.openxmlformats.org/presentationml/2006/main">
   <p:cSld>
     <p:bg>
@@ -34376,7 +34677,7 @@
 </p:sld>
 </file>
 
-<file path=ppt/slides/slide22.xml><?xml version="1.0" encoding="utf-8"?>
+<file path=ppt/slides/slide24.xml><?xml version="1.0" encoding="utf-8"?>
 <p:sld xmlns:a="http://schemas.openxmlformats.org/drawingml/2006/main" xmlns:r="http://schemas.openxmlformats.org/officeDocument/2006/relationships" xmlns:p="http://schemas.openxmlformats.org/presentationml/2006/main">
   <p:cSld>
     <p:bg>
@@ -34469,7 +34770,7 @@
 </p:sld>
 </file>
 
-<file path=ppt/slides/slide23.xml><?xml version="1.0" encoding="utf-8"?>
+<file path=ppt/slides/slide25.xml><?xml version="1.0" encoding="utf-8"?>
 <p:sld xmlns:a="http://schemas.openxmlformats.org/drawingml/2006/main" xmlns:r="http://schemas.openxmlformats.org/officeDocument/2006/relationships" xmlns:p="http://schemas.openxmlformats.org/presentationml/2006/main">
   <p:cSld>
     <p:spTree>
@@ -34604,7 +34905,7 @@
 </p:sld>
 </file>
 
-<file path=ppt/slides/slide24.xml><?xml version="1.0" encoding="utf-8"?>
+<file path=ppt/slides/slide26.xml><?xml version="1.0" encoding="utf-8"?>
 <p:sld xmlns:a="http://schemas.openxmlformats.org/drawingml/2006/main" xmlns:r="http://schemas.openxmlformats.org/officeDocument/2006/relationships" xmlns:p="http://schemas.openxmlformats.org/presentationml/2006/main">
   <p:cSld>
     <p:spTree>
@@ -34834,7 +35135,7 @@
 </p:sld>
 </file>
 
-<file path=ppt/slides/slide25.xml><?xml version="1.0" encoding="utf-8"?>
+<file path=ppt/slides/slide27.xml><?xml version="1.0" encoding="utf-8"?>
 <p:sld xmlns:a="http://schemas.openxmlformats.org/drawingml/2006/main" xmlns:r="http://schemas.openxmlformats.org/officeDocument/2006/relationships" xmlns:p="http://schemas.openxmlformats.org/presentationml/2006/main">
   <p:cSld>
     <p:spTree>
@@ -34915,7 +35216,7 @@
 </p:sld>
 </file>
 
-<file path=ppt/slides/slide26.xml><?xml version="1.0" encoding="utf-8"?>
+<file path=ppt/slides/slide28.xml><?xml version="1.0" encoding="utf-8"?>
 <p:sld xmlns:a="http://schemas.openxmlformats.org/drawingml/2006/main" xmlns:r="http://schemas.openxmlformats.org/officeDocument/2006/relationships" xmlns:p="http://schemas.openxmlformats.org/presentationml/2006/main">
   <p:cSld>
     <p:spTree>
@@ -35345,7 +35646,7 @@
 </p:sld>
 </file>
 
-<file path=ppt/slides/slide27.xml><?xml version="1.0" encoding="utf-8"?>
+<file path=ppt/slides/slide29.xml><?xml version="1.0" encoding="utf-8"?>
 <p:sld xmlns:a="http://schemas.openxmlformats.org/drawingml/2006/main" xmlns:r="http://schemas.openxmlformats.org/officeDocument/2006/relationships" xmlns:p="http://schemas.openxmlformats.org/presentationml/2006/main">
   <p:cSld>
     <p:spTree>
@@ -35844,7 +36145,99 @@
 </p:sld>
 </file>
 
-<file path=ppt/slides/slide28.xml><?xml version="1.0" encoding="utf-8"?>
+<file path=ppt/slides/slide3.xml><?xml version="1.0" encoding="utf-8"?>
+<p:sld xmlns:a="http://schemas.openxmlformats.org/drawingml/2006/main" xmlns:r="http://schemas.openxmlformats.org/officeDocument/2006/relationships" xmlns:p="http://schemas.openxmlformats.org/presentationml/2006/main">
+  <p:cSld>
+    <p:spTree>
+      <p:nvGrpSpPr>
+        <p:cNvPr id="1" name=""/>
+        <p:cNvGrpSpPr/>
+        <p:nvPr/>
+      </p:nvGrpSpPr>
+      <p:grpSpPr>
+        <a:xfrm>
+          <a:off x="0" y="0"/>
+          <a:ext cx="0" cy="0"/>
+          <a:chOff x="0" y="0"/>
+          <a:chExt cx="0" cy="0"/>
+        </a:xfrm>
+      </p:grpSpPr>
+      <p:sp>
+        <p:nvSpPr>
+          <p:cNvPr id="2" name="Title 1">
+            <a:extLst>
+              <a:ext uri="{FF2B5EF4-FFF2-40B4-BE49-F238E27FC236}">
+                <a16:creationId xmlns:a16="http://schemas.microsoft.com/office/drawing/2014/main" id="{5842A7C6-15BC-C9D5-E9E1-8402BE754809}"/>
+              </a:ext>
+            </a:extLst>
+          </p:cNvPr>
+          <p:cNvSpPr>
+            <a:spLocks noGrp="1"/>
+          </p:cNvSpPr>
+          <p:nvPr>
+            <p:ph type="title"/>
+          </p:nvPr>
+        </p:nvSpPr>
+        <p:spPr/>
+        <p:txBody>
+          <a:bodyPr/>
+          <a:lstStyle/>
+          <a:p>
+            <a:r>
+              <a:rPr lang="en-US" dirty="0"/>
+              <a:t>Outline</a:t>
+            </a:r>
+          </a:p>
+        </p:txBody>
+      </p:sp>
+      <p:graphicFrame>
+        <p:nvGraphicFramePr>
+          <p:cNvPr id="4" name="Content Placeholder 3">
+            <a:extLst>
+              <a:ext uri="{FF2B5EF4-FFF2-40B4-BE49-F238E27FC236}">
+                <a16:creationId xmlns:a16="http://schemas.microsoft.com/office/drawing/2014/main" id="{C6D9D45A-DBCC-78B1-7955-6C5FCC400515}"/>
+              </a:ext>
+              <a:ext uri="{C183D7F6-B498-43B3-948B-1728B52AA6E4}">
+                <adec:decorative xmlns:adec="http://schemas.microsoft.com/office/drawing/2017/decorative" val="1"/>
+              </a:ext>
+            </a:extLst>
+          </p:cNvPr>
+          <p:cNvGraphicFramePr>
+            <a:graphicFrameLocks noGrp="1"/>
+          </p:cNvGraphicFramePr>
+          <p:nvPr>
+            <p:ph idx="1"/>
+            <p:extLst>
+              <p:ext uri="{D42A27DB-BD31-4B8C-83A1-F6EECF244321}">
+                <p14:modId xmlns:p14="http://schemas.microsoft.com/office/powerpoint/2010/main" val="1218406165"/>
+              </p:ext>
+            </p:extLst>
+          </p:nvPr>
+        </p:nvGraphicFramePr>
+        <p:xfrm>
+          <a:off x="628650" y="1825625"/>
+          <a:ext cx="7886700" cy="4351338"/>
+        </p:xfrm>
+        <a:graphic>
+          <a:graphicData uri="http://schemas.openxmlformats.org/drawingml/2006/diagram">
+            <dgm:relIds xmlns:dgm="http://schemas.openxmlformats.org/drawingml/2006/diagram" xmlns:r="http://schemas.openxmlformats.org/officeDocument/2006/relationships" r:dm="rId2" r:lo="rId3" r:qs="rId4" r:cs="rId5"/>
+          </a:graphicData>
+        </a:graphic>
+      </p:graphicFrame>
+    </p:spTree>
+    <p:extLst>
+      <p:ext uri="{BB962C8B-B14F-4D97-AF65-F5344CB8AC3E}">
+        <p14:creationId xmlns:p14="http://schemas.microsoft.com/office/powerpoint/2010/main" val="672780991"/>
+      </p:ext>
+    </p:extLst>
+  </p:cSld>
+  <p:clrMapOvr>
+    <a:masterClrMapping/>
+  </p:clrMapOvr>
+</p:sld>
+</file>
+
+<file path=ppt/slides/slide30.xml><?xml version="1.0" encoding="utf-8"?>
 <p:sld xmlns:a="http://schemas.openxmlformats.org/drawingml/2006/main" xmlns:r="http://schemas.openxmlformats.org/officeDocument/2006/relationships" xmlns:p="http://schemas.openxmlformats.org/presentationml/2006/main">
   <p:cSld>
     <p:spTree>
@@ -36024,7 +36417,7 @@
 </p:sld>
 </file>
 
-<file path=ppt/slides/slide29.xml><?xml version="1.0" encoding="utf-8"?>
+<file path=ppt/slides/slide31.xml><?xml version="1.0" encoding="utf-8"?>
 <p:sld xmlns:a="http://schemas.openxmlformats.org/drawingml/2006/main" xmlns:r="http://schemas.openxmlformats.org/officeDocument/2006/relationships" xmlns:p="http://schemas.openxmlformats.org/presentationml/2006/main">
   <p:cSld>
     <p:spTree>
@@ -36657,99 +37050,7 @@
 </p:sld>
 </file>
 
-<file path=ppt/slides/slide3.xml><?xml version="1.0" encoding="utf-8"?>
-<p:sld xmlns:a="http://schemas.openxmlformats.org/drawingml/2006/main" xmlns:r="http://schemas.openxmlformats.org/officeDocument/2006/relationships" xmlns:p="http://schemas.openxmlformats.org/presentationml/2006/main">
-  <p:cSld>
-    <p:spTree>
-      <p:nvGrpSpPr>
-        <p:cNvPr id="1" name=""/>
-        <p:cNvGrpSpPr/>
-        <p:nvPr/>
-      </p:nvGrpSpPr>
-      <p:grpSpPr>
-        <a:xfrm>
-          <a:off x="0" y="0"/>
-          <a:ext cx="0" cy="0"/>
-          <a:chOff x="0" y="0"/>
-          <a:chExt cx="0" cy="0"/>
-        </a:xfrm>
-      </p:grpSpPr>
-      <p:sp>
-        <p:nvSpPr>
-          <p:cNvPr id="2" name="Title 1">
-            <a:extLst>
-              <a:ext uri="{FF2B5EF4-FFF2-40B4-BE49-F238E27FC236}">
-                <a16:creationId xmlns:a16="http://schemas.microsoft.com/office/drawing/2014/main" id="{5842A7C6-15BC-C9D5-E9E1-8402BE754809}"/>
-              </a:ext>
-            </a:extLst>
-          </p:cNvPr>
-          <p:cNvSpPr>
-            <a:spLocks noGrp="1"/>
-          </p:cNvSpPr>
-          <p:nvPr>
-            <p:ph type="title"/>
-          </p:nvPr>
-        </p:nvSpPr>
-        <p:spPr/>
-        <p:txBody>
-          <a:bodyPr/>
-          <a:lstStyle/>
-          <a:p>
-            <a:r>
-              <a:rPr lang="en-US" dirty="0"/>
-              <a:t>Outline</a:t>
-            </a:r>
-          </a:p>
-        </p:txBody>
-      </p:sp>
-      <p:graphicFrame>
-        <p:nvGraphicFramePr>
-          <p:cNvPr id="4" name="Content Placeholder 3">
-            <a:extLst>
-              <a:ext uri="{FF2B5EF4-FFF2-40B4-BE49-F238E27FC236}">
-                <a16:creationId xmlns:a16="http://schemas.microsoft.com/office/drawing/2014/main" id="{C6D9D45A-DBCC-78B1-7955-6C5FCC400515}"/>
-              </a:ext>
-              <a:ext uri="{C183D7F6-B498-43B3-948B-1728B52AA6E4}">
-                <adec:decorative xmlns:adec="http://schemas.microsoft.com/office/drawing/2017/decorative" val="1"/>
-              </a:ext>
-            </a:extLst>
-          </p:cNvPr>
-          <p:cNvGraphicFramePr>
-            <a:graphicFrameLocks noGrp="1"/>
-          </p:cNvGraphicFramePr>
-          <p:nvPr>
-            <p:ph idx="1"/>
-            <p:extLst>
-              <p:ext uri="{D42A27DB-BD31-4B8C-83A1-F6EECF244321}">
-                <p14:modId xmlns:p14="http://schemas.microsoft.com/office/powerpoint/2010/main" val="1218406165"/>
-              </p:ext>
-            </p:extLst>
-          </p:nvPr>
-        </p:nvGraphicFramePr>
-        <p:xfrm>
-          <a:off x="628650" y="1825625"/>
-          <a:ext cx="7886700" cy="4351338"/>
-        </p:xfrm>
-        <a:graphic>
-          <a:graphicData uri="http://schemas.openxmlformats.org/drawingml/2006/diagram">
-            <dgm:relIds xmlns:dgm="http://schemas.openxmlformats.org/drawingml/2006/diagram" xmlns:r="http://schemas.openxmlformats.org/officeDocument/2006/relationships" r:dm="rId2" r:lo="rId3" r:qs="rId4" r:cs="rId5"/>
-          </a:graphicData>
-        </a:graphic>
-      </p:graphicFrame>
-    </p:spTree>
-    <p:extLst>
-      <p:ext uri="{BB962C8B-B14F-4D97-AF65-F5344CB8AC3E}">
-        <p14:creationId xmlns:p14="http://schemas.microsoft.com/office/powerpoint/2010/main" val="672780991"/>
-      </p:ext>
-    </p:extLst>
-  </p:cSld>
-  <p:clrMapOvr>
-    <a:masterClrMapping/>
-  </p:clrMapOvr>
-</p:sld>
-</file>
-
-<file path=ppt/slides/slide30.xml><?xml version="1.0" encoding="utf-8"?>
+<file path=ppt/slides/slide32.xml><?xml version="1.0" encoding="utf-8"?>
 <p:sld xmlns:a="http://schemas.openxmlformats.org/drawingml/2006/main" xmlns:r="http://schemas.openxmlformats.org/officeDocument/2006/relationships" xmlns:p="http://schemas.openxmlformats.org/presentationml/2006/main">
   <p:cSld>
     <p:spTree>
@@ -37105,7 +37406,7 @@
 </p:sld>
 </file>
 
-<file path=ppt/slides/slide31.xml><?xml version="1.0" encoding="utf-8"?>
+<file path=ppt/slides/slide33.xml><?xml version="1.0" encoding="utf-8"?>
 <p:sld xmlns:a="http://schemas.openxmlformats.org/drawingml/2006/main" xmlns:r="http://schemas.openxmlformats.org/officeDocument/2006/relationships" xmlns:p="http://schemas.openxmlformats.org/presentationml/2006/main">
   <p:cSld>
     <p:spTree>
@@ -37616,7 +37917,7 @@
 </p:sld>
 </file>
 
-<file path=ppt/slides/slide32.xml><?xml version="1.0" encoding="utf-8"?>
+<file path=ppt/slides/slide34.xml><?xml version="1.0" encoding="utf-8"?>
 <p:sld xmlns:a="http://schemas.openxmlformats.org/drawingml/2006/main" xmlns:r="http://schemas.openxmlformats.org/officeDocument/2006/relationships" xmlns:p="http://schemas.openxmlformats.org/presentationml/2006/main">
   <p:cSld>
     <p:spTree>
@@ -38443,7 +38744,7 @@
 </p:sld>
 </file>
 
-<file path=ppt/slides/slide33.xml><?xml version="1.0" encoding="utf-8"?>
+<file path=ppt/slides/slide35.xml><?xml version="1.0" encoding="utf-8"?>
 <p:sld xmlns:a="http://schemas.openxmlformats.org/drawingml/2006/main" xmlns:r="http://schemas.openxmlformats.org/officeDocument/2006/relationships" xmlns:p="http://schemas.openxmlformats.org/presentationml/2006/main">
   <p:cSld>
     <p:spTree>
@@ -38691,7 +38992,7 @@
 </p:sld>
 </file>
 
-<file path=ppt/slides/slide34.xml><?xml version="1.0" encoding="utf-8"?>
+<file path=ppt/slides/slide36.xml><?xml version="1.0" encoding="utf-8"?>
 <p:sld xmlns:a="http://schemas.openxmlformats.org/drawingml/2006/main" xmlns:r="http://schemas.openxmlformats.org/officeDocument/2006/relationships" xmlns:p="http://schemas.openxmlformats.org/presentationml/2006/main">
   <p:cSld>
     <p:spTree>
@@ -38939,7 +39240,7 @@
 </p:sld>
 </file>
 
-<file path=ppt/slides/slide35.xml><?xml version="1.0" encoding="utf-8"?>
+<file path=ppt/slides/slide37.xml><?xml version="1.0" encoding="utf-8"?>
 <p:sld xmlns:a="http://schemas.openxmlformats.org/drawingml/2006/main" xmlns:r="http://schemas.openxmlformats.org/officeDocument/2006/relationships" xmlns:p="http://schemas.openxmlformats.org/presentationml/2006/main">
   <p:cSld>
     <p:spTree>
@@ -39519,7 +39820,7 @@
 </p:sld>
 </file>
 
-<file path=ppt/slides/slide36.xml><?xml version="1.0" encoding="utf-8"?>
+<file path=ppt/slides/slide38.xml><?xml version="1.0" encoding="utf-8"?>
 <p:sld xmlns:a="http://schemas.openxmlformats.org/drawingml/2006/main" xmlns:r="http://schemas.openxmlformats.org/officeDocument/2006/relationships" xmlns:p="http://schemas.openxmlformats.org/presentationml/2006/main">
   <p:cSld>
     <p:spTree>
@@ -40186,7 +40487,7 @@
 </p:sld>
 </file>
 
-<file path=ppt/slides/slide37.xml><?xml version="1.0" encoding="utf-8"?>
+<file path=ppt/slides/slide39.xml><?xml version="1.0" encoding="utf-8"?>
 <p:sld xmlns:a="http://schemas.openxmlformats.org/drawingml/2006/main" xmlns:r="http://schemas.openxmlformats.org/officeDocument/2006/relationships" xmlns:p="http://schemas.openxmlformats.org/presentationml/2006/main">
   <p:cSld>
     <p:spTree>
@@ -40588,1027 +40889,6 @@
       <p:bldP spid="3" grpId="0" uiExpand="1" build="p"/>
     </p:bldLst>
   </p:timing>
-</p:sld>
-</file>
-
-<file path=ppt/slides/slide38.xml><?xml version="1.0" encoding="utf-8"?>
-<p:sld xmlns:a="http://schemas.openxmlformats.org/drawingml/2006/main" xmlns:r="http://schemas.openxmlformats.org/officeDocument/2006/relationships" xmlns:p="http://schemas.openxmlformats.org/presentationml/2006/main">
-  <p:cSld>
-    <p:spTree>
-      <p:nvGrpSpPr>
-        <p:cNvPr id="1" name=""/>
-        <p:cNvGrpSpPr/>
-        <p:nvPr/>
-      </p:nvGrpSpPr>
-      <p:grpSpPr>
-        <a:xfrm>
-          <a:off x="0" y="0"/>
-          <a:ext cx="0" cy="0"/>
-          <a:chOff x="0" y="0"/>
-          <a:chExt cx="0" cy="0"/>
-        </a:xfrm>
-      </p:grpSpPr>
-      <p:sp>
-        <p:nvSpPr>
-          <p:cNvPr id="2" name="Title 1">
-            <a:extLst>
-              <a:ext uri="{FF2B5EF4-FFF2-40B4-BE49-F238E27FC236}">
-                <a16:creationId xmlns:a16="http://schemas.microsoft.com/office/drawing/2014/main" id="{2DCB16B1-C2AC-4FB7-A71E-01A526A028CB}"/>
-              </a:ext>
-            </a:extLst>
-          </p:cNvPr>
-          <p:cNvSpPr>
-            <a:spLocks noGrp="1"/>
-          </p:cNvSpPr>
-          <p:nvPr>
-            <p:ph type="title"/>
-          </p:nvPr>
-        </p:nvSpPr>
-        <p:spPr/>
-        <p:txBody>
-          <a:bodyPr/>
-          <a:lstStyle/>
-          <a:p>
-            <a:r>
-              <a:rPr lang="en-US" dirty="0"/>
-              <a:t>Example: Wumpus World</a:t>
-            </a:r>
-          </a:p>
-        </p:txBody>
-      </p:sp>
-      <p:pic>
-        <p:nvPicPr>
-          <p:cNvPr id="4" name="Picture 3">
-            <a:extLst>
-              <a:ext uri="{FF2B5EF4-FFF2-40B4-BE49-F238E27FC236}">
-                <a16:creationId xmlns:a16="http://schemas.microsoft.com/office/drawing/2014/main" id="{6BFFBE72-B33A-4C9F-A4A2-836861E9718E}"/>
-              </a:ext>
-              <a:ext uri="{C183D7F6-B498-43B3-948B-1728B52AA6E4}">
-                <adec:decorative xmlns:adec="http://schemas.microsoft.com/office/drawing/2017/decorative" val="1"/>
-              </a:ext>
-            </a:extLst>
-          </p:cNvPr>
-          <p:cNvPicPr>
-            <a:picLocks noChangeAspect="1"/>
-          </p:cNvPicPr>
-          <p:nvPr/>
-        </p:nvPicPr>
-        <p:blipFill>
-          <a:blip r:embed="rId2"/>
-          <a:stretch>
-            <a:fillRect/>
-          </a:stretch>
-        </p:blipFill>
-        <p:spPr>
-          <a:xfrm>
-            <a:off x="1219200" y="3360726"/>
-            <a:ext cx="7005441" cy="3149679"/>
-          </a:xfrm>
-          <a:prstGeom prst="rect">
-            <a:avLst/>
-          </a:prstGeom>
-        </p:spPr>
-      </p:pic>
-      <p:pic>
-        <p:nvPicPr>
-          <p:cNvPr id="5" name="Picture 4" descr="A figure showing the 4-by-4 wumpus world.">
-            <a:extLst>
-              <a:ext uri="{FF2B5EF4-FFF2-40B4-BE49-F238E27FC236}">
-                <a16:creationId xmlns:a16="http://schemas.microsoft.com/office/drawing/2014/main" id="{9BF49D0A-87B7-452A-B0A8-C3B26D130EBB}"/>
-              </a:ext>
-            </a:extLst>
-          </p:cNvPr>
-          <p:cNvPicPr>
-            <a:picLocks noChangeAspect="1"/>
-          </p:cNvPicPr>
-          <p:nvPr/>
-        </p:nvPicPr>
-        <p:blipFill>
-          <a:blip r:embed="rId3"/>
-          <a:stretch>
-            <a:fillRect/>
-          </a:stretch>
-        </p:blipFill>
-        <p:spPr>
-          <a:xfrm>
-            <a:off x="5990995" y="347595"/>
-            <a:ext cx="2889398" cy="2686188"/>
-          </a:xfrm>
-          <a:prstGeom prst="rect">
-            <a:avLst/>
-          </a:prstGeom>
-        </p:spPr>
-      </p:pic>
-    </p:spTree>
-    <p:extLst>
-      <p:ext uri="{BB962C8B-B14F-4D97-AF65-F5344CB8AC3E}">
-        <p14:creationId xmlns:p14="http://schemas.microsoft.com/office/powerpoint/2010/main" val="3741195340"/>
-      </p:ext>
-    </p:extLst>
-  </p:cSld>
-  <p:clrMapOvr>
-    <a:masterClrMapping/>
-  </p:clrMapOvr>
-</p:sld>
-</file>
-
-<file path=ppt/slides/slide39.xml><?xml version="1.0" encoding="utf-8"?>
-<p:sld xmlns:a="http://schemas.openxmlformats.org/drawingml/2006/main" xmlns:r="http://schemas.openxmlformats.org/officeDocument/2006/relationships" xmlns:p="http://schemas.openxmlformats.org/presentationml/2006/main">
-  <p:cSld>
-    <p:spTree>
-      <p:nvGrpSpPr>
-        <p:cNvPr id="1" name=""/>
-        <p:cNvGrpSpPr/>
-        <p:nvPr/>
-      </p:nvGrpSpPr>
-      <p:grpSpPr>
-        <a:xfrm>
-          <a:off x="0" y="0"/>
-          <a:ext cx="0" cy="0"/>
-          <a:chOff x="0" y="0"/>
-          <a:chExt cx="0" cy="0"/>
-        </a:xfrm>
-      </p:grpSpPr>
-      <p:sp>
-        <p:nvSpPr>
-          <p:cNvPr id="2" name="Title 1">
-            <a:extLst>
-              <a:ext uri="{FF2B5EF4-FFF2-40B4-BE49-F238E27FC236}">
-                <a16:creationId xmlns:a16="http://schemas.microsoft.com/office/drawing/2014/main" id="{2DCB16B1-C2AC-4FB7-A71E-01A526A028CB}"/>
-              </a:ext>
-            </a:extLst>
-          </p:cNvPr>
-          <p:cNvSpPr>
-            <a:spLocks noGrp="1"/>
-          </p:cNvSpPr>
-          <p:nvPr>
-            <p:ph type="title"/>
-          </p:nvPr>
-        </p:nvSpPr>
-        <p:spPr/>
-        <p:txBody>
-          <a:bodyPr/>
-          <a:lstStyle/>
-          <a:p>
-            <a:r>
-              <a:rPr lang="en-US" dirty="0"/>
-              <a:t>Example: Wumpus World</a:t>
-            </a:r>
-          </a:p>
-        </p:txBody>
-      </p:sp>
-      <mc:AlternateContent xmlns:mc="http://schemas.openxmlformats.org/markup-compatibility/2006" xmlns:a14="http://schemas.microsoft.com/office/drawing/2010/main">
-        <mc:Choice Requires="a14">
-          <p:sp>
-            <p:nvSpPr>
-              <p:cNvPr id="3" name="Content Placeholder 2">
-                <a:extLst>
-                  <a:ext uri="{FF2B5EF4-FFF2-40B4-BE49-F238E27FC236}">
-                    <a16:creationId xmlns:a16="http://schemas.microsoft.com/office/drawing/2014/main" id="{C857998B-2C70-4155-B400-75A197557126}"/>
-                  </a:ext>
-                </a:extLst>
-              </p:cNvPr>
-              <p:cNvSpPr>
-                <a:spLocks noGrp="1"/>
-              </p:cNvSpPr>
-              <p:nvPr>
-                <p:ph idx="1"/>
-              </p:nvPr>
-            </p:nvSpPr>
-            <p:spPr>
-              <a:xfrm>
-                <a:off x="628650" y="1447800"/>
-                <a:ext cx="5467350" cy="4729163"/>
-              </a:xfrm>
-            </p:spPr>
-            <p:txBody>
-              <a:bodyPr>
-                <a:normAutofit/>
-              </a:bodyPr>
-              <a:lstStyle/>
-              <a:p>
-                <a:pPr marL="0" indent="0">
-                  <a:buNone/>
-                </a:pPr>
-                <a:r>
-                  <a:rPr lang="en-US" b="1" dirty="0"/>
-                  <a:t>Initial KB </a:t>
-                </a:r>
-                <a:r>
-                  <a:rPr lang="en-US" dirty="0"/>
-                  <a:t>needs to contain rules like these for each square:</a:t>
-                </a:r>
-              </a:p>
-              <a:p>
-                <a:pPr marL="0" indent="0">
-                  <a:buNone/>
-                </a:pPr>
-                <a14:m>
-                  <m:oMathPara xmlns:m="http://schemas.openxmlformats.org/officeDocument/2006/math">
-                    <m:oMathParaPr>
-                      <m:jc m:val="left"/>
-                    </m:oMathParaPr>
-                    <m:oMath xmlns:m="http://schemas.openxmlformats.org/officeDocument/2006/math">
-                      <m:r>
-                        <a:rPr lang="en-US" b="0" i="1" smtClean="0">
-                          <a:latin typeface="Cambria Math" panose="02040503050406030204" pitchFamily="18" charset="0"/>
-                        </a:rPr>
-                        <m:t>𝐵𝑟𝑒𝑒𝑧𝑒</m:t>
-                      </m:r>
-                      <m:d>
-                        <m:dPr>
-                          <m:ctrlPr>
-                            <a:rPr lang="en-US" b="0" i="1" smtClean="0">
-                              <a:latin typeface="Cambria Math" panose="02040503050406030204" pitchFamily="18" charset="0"/>
-                            </a:rPr>
-                          </m:ctrlPr>
-                        </m:dPr>
-                        <m:e>
-                          <m:r>
-                            <a:rPr lang="en-US" b="0" i="1" smtClean="0">
-                              <a:latin typeface="Cambria Math" panose="02040503050406030204" pitchFamily="18" charset="0"/>
-                            </a:rPr>
-                            <m:t>1,1</m:t>
-                          </m:r>
-                        </m:e>
-                      </m:d>
-                      <m:r>
-                        <a:rPr lang="en-US" i="1">
-                          <a:latin typeface="Cambria Math" panose="02040503050406030204" pitchFamily="18" charset="0"/>
-                          <a:ea typeface="Cambria Math" panose="02040503050406030204" pitchFamily="18" charset="0"/>
-                        </a:rPr>
-                        <m:t>⟺</m:t>
-                      </m:r>
-                      <m:r>
-                        <a:rPr lang="en-US" b="0" i="1" smtClean="0">
-                          <a:latin typeface="Cambria Math" panose="02040503050406030204" pitchFamily="18" charset="0"/>
-                          <a:ea typeface="Cambria Math" panose="02040503050406030204" pitchFamily="18" charset="0"/>
-                        </a:rPr>
-                        <m:t>𝑃𝑖𝑡</m:t>
-                      </m:r>
-                      <m:d>
-                        <m:dPr>
-                          <m:ctrlPr>
-                            <a:rPr lang="en-US" b="0" i="1" smtClean="0">
-                              <a:latin typeface="Cambria Math" panose="02040503050406030204" pitchFamily="18" charset="0"/>
-                              <a:ea typeface="Cambria Math" panose="02040503050406030204" pitchFamily="18" charset="0"/>
-                            </a:rPr>
-                          </m:ctrlPr>
-                        </m:dPr>
-                        <m:e>
-                          <m:r>
-                            <a:rPr lang="en-US" b="0" i="1" smtClean="0">
-                              <a:latin typeface="Cambria Math" panose="02040503050406030204" pitchFamily="18" charset="0"/>
-                              <a:ea typeface="Cambria Math" panose="02040503050406030204" pitchFamily="18" charset="0"/>
-                            </a:rPr>
-                            <m:t>1,2</m:t>
-                          </m:r>
-                        </m:e>
-                      </m:d>
-                      <m:r>
-                        <a:rPr lang="en-US" b="0" i="1" smtClean="0">
-                          <a:latin typeface="Cambria Math" panose="02040503050406030204" pitchFamily="18" charset="0"/>
-                          <a:ea typeface="Cambria Math" panose="02040503050406030204" pitchFamily="18" charset="0"/>
-                        </a:rPr>
-                        <m:t>∨</m:t>
-                      </m:r>
-                      <m:r>
-                        <a:rPr lang="en-US" b="0" i="1" smtClean="0">
-                          <a:latin typeface="Cambria Math" panose="02040503050406030204" pitchFamily="18" charset="0"/>
-                          <a:ea typeface="Cambria Math" panose="02040503050406030204" pitchFamily="18" charset="0"/>
-                        </a:rPr>
-                        <m:t>𝑃𝑖𝑡</m:t>
-                      </m:r>
-                      <m:d>
-                        <m:dPr>
-                          <m:ctrlPr>
-                            <a:rPr lang="en-US" b="0" i="1" smtClean="0">
-                              <a:latin typeface="Cambria Math" panose="02040503050406030204" pitchFamily="18" charset="0"/>
-                              <a:ea typeface="Cambria Math" panose="02040503050406030204" pitchFamily="18" charset="0"/>
-                            </a:rPr>
-                          </m:ctrlPr>
-                        </m:dPr>
-                        <m:e>
-                          <m:r>
-                            <a:rPr lang="en-US" b="0" i="1" smtClean="0">
-                              <a:latin typeface="Cambria Math" panose="02040503050406030204" pitchFamily="18" charset="0"/>
-                              <a:ea typeface="Cambria Math" panose="02040503050406030204" pitchFamily="18" charset="0"/>
-                            </a:rPr>
-                            <m:t>2,1</m:t>
-                          </m:r>
-                        </m:e>
-                      </m:d>
-                    </m:oMath>
-                  </m:oMathPara>
-                </a14:m>
-                <a:endParaRPr lang="en-US" b="0" i="1" dirty="0">
-                  <a:latin typeface="Cambria Math" panose="02040503050406030204" pitchFamily="18" charset="0"/>
-                </a:endParaRPr>
-              </a:p>
-              <a:p>
-                <a:pPr marL="0" indent="0">
-                  <a:buNone/>
-                </a:pPr>
-                <a14:m>
-                  <m:oMathPara xmlns:m="http://schemas.openxmlformats.org/officeDocument/2006/math">
-                    <m:oMathParaPr>
-                      <m:jc m:val="left"/>
-                    </m:oMathParaPr>
-                    <m:oMath xmlns:m="http://schemas.openxmlformats.org/officeDocument/2006/math">
-                      <m:r>
-                        <a:rPr lang="en-US" b="0" i="1" smtClean="0">
-                          <a:latin typeface="Cambria Math" panose="02040503050406030204" pitchFamily="18" charset="0"/>
-                        </a:rPr>
-                        <m:t>𝐵𝑟𝑒𝑒𝑧𝑒</m:t>
-                      </m:r>
-                      <m:d>
-                        <m:dPr>
-                          <m:ctrlPr>
-                            <a:rPr lang="en-US" b="0" i="1" smtClean="0">
-                              <a:latin typeface="Cambria Math" panose="02040503050406030204" pitchFamily="18" charset="0"/>
-                            </a:rPr>
-                          </m:ctrlPr>
-                        </m:dPr>
-                        <m:e>
-                          <m:r>
-                            <a:rPr lang="en-US" b="0" i="1" smtClean="0">
-                              <a:latin typeface="Cambria Math" panose="02040503050406030204" pitchFamily="18" charset="0"/>
-                            </a:rPr>
-                            <m:t>1,2</m:t>
-                          </m:r>
-                        </m:e>
-                      </m:d>
-                      <m:r>
-                        <a:rPr lang="en-US" i="1">
-                          <a:latin typeface="Cambria Math" panose="02040503050406030204" pitchFamily="18" charset="0"/>
-                          <a:ea typeface="Cambria Math" panose="02040503050406030204" pitchFamily="18" charset="0"/>
-                        </a:rPr>
-                        <m:t>⟺</m:t>
-                      </m:r>
-                      <m:r>
-                        <a:rPr lang="en-US" b="0" i="1" smtClean="0">
-                          <a:latin typeface="Cambria Math" panose="02040503050406030204" pitchFamily="18" charset="0"/>
-                          <a:ea typeface="Cambria Math" panose="02040503050406030204" pitchFamily="18" charset="0"/>
-                        </a:rPr>
-                        <m:t>𝑃𝑖𝑡</m:t>
-                      </m:r>
-                      <m:d>
-                        <m:dPr>
-                          <m:ctrlPr>
-                            <a:rPr lang="en-US" b="0" i="1" smtClean="0">
-                              <a:latin typeface="Cambria Math" panose="02040503050406030204" pitchFamily="18" charset="0"/>
-                              <a:ea typeface="Cambria Math" panose="02040503050406030204" pitchFamily="18" charset="0"/>
-                            </a:rPr>
-                          </m:ctrlPr>
-                        </m:dPr>
-                        <m:e>
-                          <m:r>
-                            <a:rPr lang="en-US" b="0" i="1" smtClean="0">
-                              <a:latin typeface="Cambria Math" panose="02040503050406030204" pitchFamily="18" charset="0"/>
-                              <a:ea typeface="Cambria Math" panose="02040503050406030204" pitchFamily="18" charset="0"/>
-                            </a:rPr>
-                            <m:t>1,1</m:t>
-                          </m:r>
-                        </m:e>
-                      </m:d>
-                      <m:r>
-                        <a:rPr lang="en-US" b="0" i="1" smtClean="0">
-                          <a:latin typeface="Cambria Math" panose="02040503050406030204" pitchFamily="18" charset="0"/>
-                          <a:ea typeface="Cambria Math" panose="02040503050406030204" pitchFamily="18" charset="0"/>
-                        </a:rPr>
-                        <m:t>∨</m:t>
-                      </m:r>
-                      <m:r>
-                        <a:rPr lang="en-US" b="0" i="1" smtClean="0">
-                          <a:latin typeface="Cambria Math" panose="02040503050406030204" pitchFamily="18" charset="0"/>
-                          <a:ea typeface="Cambria Math" panose="02040503050406030204" pitchFamily="18" charset="0"/>
-                        </a:rPr>
-                        <m:t>𝑃𝑖𝑡</m:t>
-                      </m:r>
-                      <m:d>
-                        <m:dPr>
-                          <m:ctrlPr>
-                            <a:rPr lang="en-US" b="0" i="1" smtClean="0">
-                              <a:latin typeface="Cambria Math" panose="02040503050406030204" pitchFamily="18" charset="0"/>
-                              <a:ea typeface="Cambria Math" panose="02040503050406030204" pitchFamily="18" charset="0"/>
-                            </a:rPr>
-                          </m:ctrlPr>
-                        </m:dPr>
-                        <m:e>
-                          <m:r>
-                            <a:rPr lang="en-US" b="0" i="1" smtClean="0">
-                              <a:latin typeface="Cambria Math" panose="02040503050406030204" pitchFamily="18" charset="0"/>
-                              <a:ea typeface="Cambria Math" panose="02040503050406030204" pitchFamily="18" charset="0"/>
-                            </a:rPr>
-                            <m:t>1,3</m:t>
-                          </m:r>
-                        </m:e>
-                      </m:d>
-                      <m:r>
-                        <a:rPr lang="en-US" b="0" i="1" smtClean="0">
-                          <a:latin typeface="Cambria Math" panose="02040503050406030204" pitchFamily="18" charset="0"/>
-                          <a:ea typeface="Cambria Math" panose="02040503050406030204" pitchFamily="18" charset="0"/>
-                        </a:rPr>
-                        <m:t> ∨</m:t>
-                      </m:r>
-                      <m:r>
-                        <a:rPr lang="en-US" b="0" i="1" smtClean="0">
-                          <a:latin typeface="Cambria Math" panose="02040503050406030204" pitchFamily="18" charset="0"/>
-                          <a:ea typeface="Cambria Math" panose="02040503050406030204" pitchFamily="18" charset="0"/>
-                        </a:rPr>
-                        <m:t>𝑃𝑖𝑡</m:t>
-                      </m:r>
-                      <m:d>
-                        <m:dPr>
-                          <m:ctrlPr>
-                            <a:rPr lang="en-US" b="0" i="1" smtClean="0">
-                              <a:latin typeface="Cambria Math" panose="02040503050406030204" pitchFamily="18" charset="0"/>
-                              <a:ea typeface="Cambria Math" panose="02040503050406030204" pitchFamily="18" charset="0"/>
-                            </a:rPr>
-                          </m:ctrlPr>
-                        </m:dPr>
-                        <m:e>
-                          <m:r>
-                            <a:rPr lang="en-US" b="0" i="1" smtClean="0">
-                              <a:latin typeface="Cambria Math" panose="02040503050406030204" pitchFamily="18" charset="0"/>
-                              <a:ea typeface="Cambria Math" panose="02040503050406030204" pitchFamily="18" charset="0"/>
-                            </a:rPr>
-                            <m:t>2,2</m:t>
-                          </m:r>
-                        </m:e>
-                      </m:d>
-                    </m:oMath>
-                  </m:oMathPara>
-                </a14:m>
-                <a:endParaRPr lang="en-US" b="0" dirty="0">
-                  <a:ea typeface="Cambria Math" panose="02040503050406030204" pitchFamily="18" charset="0"/>
-                </a:endParaRPr>
-              </a:p>
-              <a:p>
-                <a:pPr marL="0" indent="0">
-                  <a:buNone/>
-                </a:pPr>
-                <a14:m>
-                  <m:oMathPara xmlns:m="http://schemas.openxmlformats.org/officeDocument/2006/math">
-                    <m:oMathParaPr>
-                      <m:jc m:val="left"/>
-                    </m:oMathParaPr>
-                    <m:oMath xmlns:m="http://schemas.openxmlformats.org/officeDocument/2006/math">
-                      <m:r>
-                        <m:rPr>
-                          <m:sty m:val="p"/>
-                        </m:rPr>
-                        <a:rPr lang="en-US" b="0" i="0" smtClean="0">
-                          <a:latin typeface="Cambria Math" panose="02040503050406030204" pitchFamily="18" charset="0"/>
-                        </a:rPr>
-                        <m:t>Stench</m:t>
-                      </m:r>
-                      <m:d>
-                        <m:dPr>
-                          <m:ctrlPr>
-                            <a:rPr lang="en-US" b="0" i="1" smtClean="0">
-                              <a:latin typeface="Cambria Math" panose="02040503050406030204" pitchFamily="18" charset="0"/>
-                            </a:rPr>
-                          </m:ctrlPr>
-                        </m:dPr>
-                        <m:e>
-                          <m:r>
-                            <a:rPr lang="en-US" b="0" i="1" smtClean="0">
-                              <a:latin typeface="Cambria Math" panose="02040503050406030204" pitchFamily="18" charset="0"/>
-                            </a:rPr>
-                            <m:t>1,1</m:t>
-                          </m:r>
-                        </m:e>
-                      </m:d>
-                      <m:r>
-                        <a:rPr lang="en-US" i="1">
-                          <a:latin typeface="Cambria Math" panose="02040503050406030204" pitchFamily="18" charset="0"/>
-                          <a:ea typeface="Cambria Math" panose="02040503050406030204" pitchFamily="18" charset="0"/>
-                        </a:rPr>
-                        <m:t>⟺</m:t>
-                      </m:r>
-                      <m:r>
-                        <a:rPr lang="en-US" b="0" i="1" smtClean="0">
-                          <a:latin typeface="Cambria Math" panose="02040503050406030204" pitchFamily="18" charset="0"/>
-                          <a:ea typeface="Cambria Math" panose="02040503050406030204" pitchFamily="18" charset="0"/>
-                        </a:rPr>
-                        <m:t>𝑊</m:t>
-                      </m:r>
-                      <m:d>
-                        <m:dPr>
-                          <m:ctrlPr>
-                            <a:rPr lang="en-US" b="0" i="1" smtClean="0">
-                              <a:latin typeface="Cambria Math" panose="02040503050406030204" pitchFamily="18" charset="0"/>
-                              <a:ea typeface="Cambria Math" panose="02040503050406030204" pitchFamily="18" charset="0"/>
-                            </a:rPr>
-                          </m:ctrlPr>
-                        </m:dPr>
-                        <m:e>
-                          <m:r>
-                            <a:rPr lang="en-US" b="0" i="1" smtClean="0">
-                              <a:latin typeface="Cambria Math" panose="02040503050406030204" pitchFamily="18" charset="0"/>
-                              <a:ea typeface="Cambria Math" panose="02040503050406030204" pitchFamily="18" charset="0"/>
-                            </a:rPr>
-                            <m:t>1,2</m:t>
-                          </m:r>
-                        </m:e>
-                      </m:d>
-                      <m:r>
-                        <a:rPr lang="en-US" b="0" i="1" smtClean="0">
-                          <a:latin typeface="Cambria Math" panose="02040503050406030204" pitchFamily="18" charset="0"/>
-                          <a:ea typeface="Cambria Math" panose="02040503050406030204" pitchFamily="18" charset="0"/>
-                        </a:rPr>
-                        <m:t>∨</m:t>
-                      </m:r>
-                      <m:r>
-                        <a:rPr lang="en-US" b="0" i="1" smtClean="0">
-                          <a:latin typeface="Cambria Math" panose="02040503050406030204" pitchFamily="18" charset="0"/>
-                          <a:ea typeface="Cambria Math" panose="02040503050406030204" pitchFamily="18" charset="0"/>
-                        </a:rPr>
-                        <m:t>𝑊</m:t>
-                      </m:r>
-                      <m:d>
-                        <m:dPr>
-                          <m:ctrlPr>
-                            <a:rPr lang="en-US" b="0" i="1" smtClean="0">
-                              <a:latin typeface="Cambria Math" panose="02040503050406030204" pitchFamily="18" charset="0"/>
-                              <a:ea typeface="Cambria Math" panose="02040503050406030204" pitchFamily="18" charset="0"/>
-                            </a:rPr>
-                          </m:ctrlPr>
-                        </m:dPr>
-                        <m:e>
-                          <m:r>
-                            <a:rPr lang="en-US" b="0" i="1" smtClean="0">
-                              <a:latin typeface="Cambria Math" panose="02040503050406030204" pitchFamily="18" charset="0"/>
-                              <a:ea typeface="Cambria Math" panose="02040503050406030204" pitchFamily="18" charset="0"/>
-                            </a:rPr>
-                            <m:t>2,1</m:t>
-                          </m:r>
-                        </m:e>
-                      </m:d>
-                    </m:oMath>
-                    <m:oMath xmlns:m="http://schemas.openxmlformats.org/officeDocument/2006/math">
-                      <m:r>
-                        <a:rPr lang="en-US" b="0" i="1" smtClean="0">
-                          <a:latin typeface="Cambria Math" panose="02040503050406030204" pitchFamily="18" charset="0"/>
-                        </a:rPr>
-                        <m:t>…</m:t>
-                      </m:r>
-                    </m:oMath>
-                  </m:oMathPara>
-                </a14:m>
-                <a:endParaRPr lang="en-US" dirty="0"/>
-              </a:p>
-              <a:p>
-                <a:pPr marL="0" indent="0">
-                  <a:buNone/>
-                </a:pPr>
-                <a:r>
-                  <a:rPr lang="en-US" b="1" dirty="0"/>
-                  <a:t>Percepts</a:t>
-                </a:r>
-                <a:r>
-                  <a:rPr lang="en-US" dirty="0"/>
-                  <a:t> at (1,1) are no breeze or stench. Add the following facts to the KB:</a:t>
-                </a:r>
-              </a:p>
-              <a:p>
-                <a:pPr marL="0" indent="0">
-                  <a:buNone/>
-                </a:pPr>
-                <a14:m>
-                  <m:oMathPara xmlns:m="http://schemas.openxmlformats.org/officeDocument/2006/math">
-                    <m:oMathParaPr>
-                      <m:jc m:val="left"/>
-                    </m:oMathParaPr>
-                    <m:oMath xmlns:m="http://schemas.openxmlformats.org/officeDocument/2006/math">
-                      <m:r>
-                        <a:rPr lang="en-US" i="1" smtClean="0">
-                          <a:latin typeface="Cambria Math" panose="02040503050406030204" pitchFamily="18" charset="0"/>
-                          <a:ea typeface="Cambria Math" panose="02040503050406030204" pitchFamily="18" charset="0"/>
-                        </a:rPr>
-                        <m:t>¬</m:t>
-                      </m:r>
-                      <m:r>
-                        <a:rPr lang="en-US" b="0" i="1" smtClean="0">
-                          <a:latin typeface="Cambria Math" panose="02040503050406030204" pitchFamily="18" charset="0"/>
-                          <a:ea typeface="Cambria Math" panose="02040503050406030204" pitchFamily="18" charset="0"/>
-                        </a:rPr>
-                        <m:t>𝐵𝑟𝑒𝑒𝑧𝑒</m:t>
-                      </m:r>
-                      <m:r>
-                        <a:rPr lang="en-US" b="0" i="1" smtClean="0">
-                          <a:latin typeface="Cambria Math" panose="02040503050406030204" pitchFamily="18" charset="0"/>
-                          <a:ea typeface="Cambria Math" panose="02040503050406030204" pitchFamily="18" charset="0"/>
-                        </a:rPr>
-                        <m:t>(1,1)</m:t>
-                      </m:r>
-                    </m:oMath>
-                  </m:oMathPara>
-                </a14:m>
-                <a:endParaRPr lang="en-US" i="1" dirty="0">
-                  <a:latin typeface="Cambria Math" panose="02040503050406030204" pitchFamily="18" charset="0"/>
-                  <a:ea typeface="Cambria Math" panose="02040503050406030204" pitchFamily="18" charset="0"/>
-                </a:endParaRPr>
-              </a:p>
-              <a:p>
-                <a:pPr marL="0" indent="0">
-                  <a:buNone/>
-                </a:pPr>
-                <a14:m>
-                  <m:oMathPara xmlns:m="http://schemas.openxmlformats.org/officeDocument/2006/math">
-                    <m:oMathParaPr>
-                      <m:jc m:val="left"/>
-                    </m:oMathParaPr>
-                    <m:oMath xmlns:m="http://schemas.openxmlformats.org/officeDocument/2006/math">
-                      <m:r>
-                        <a:rPr lang="en-US" i="1" smtClean="0">
-                          <a:latin typeface="Cambria Math" panose="02040503050406030204" pitchFamily="18" charset="0"/>
-                          <a:ea typeface="Cambria Math" panose="02040503050406030204" pitchFamily="18" charset="0"/>
-                        </a:rPr>
-                        <m:t>¬</m:t>
-                      </m:r>
-                      <m:r>
-                        <a:rPr lang="en-US" b="0" i="1" smtClean="0">
-                          <a:latin typeface="Cambria Math" panose="02040503050406030204" pitchFamily="18" charset="0"/>
-                          <a:ea typeface="Cambria Math" panose="02040503050406030204" pitchFamily="18" charset="0"/>
-                        </a:rPr>
-                        <m:t>𝑆𝑡𝑒𝑛𝑐h</m:t>
-                      </m:r>
-                      <m:r>
-                        <a:rPr lang="en-US" b="0" i="1" smtClean="0">
-                          <a:latin typeface="Cambria Math" panose="02040503050406030204" pitchFamily="18" charset="0"/>
-                          <a:ea typeface="Cambria Math" panose="02040503050406030204" pitchFamily="18" charset="0"/>
-                        </a:rPr>
-                        <m:t>(1,1)</m:t>
-                      </m:r>
-                    </m:oMath>
-                  </m:oMathPara>
-                </a14:m>
-                <a:endParaRPr lang="en-US" dirty="0"/>
-              </a:p>
-              <a:p>
-                <a:pPr marL="0" indent="0">
-                  <a:buNone/>
-                </a:pPr>
-                <a:r>
-                  <a:rPr lang="en-US" b="1" dirty="0"/>
-                  <a:t>Inference</a:t>
-                </a:r>
-                <a:r>
-                  <a:rPr lang="en-US" dirty="0"/>
-                  <a:t> will tell us that the following facts are entailed: </a:t>
-                </a:r>
-                <a:br>
-                  <a:rPr lang="en-US" dirty="0"/>
-                </a:br>
-                <a14:m>
-                  <m:oMath xmlns:m="http://schemas.openxmlformats.org/officeDocument/2006/math">
-                    <m:r>
-                      <a:rPr lang="en-US" i="1" smtClean="0">
-                        <a:latin typeface="Cambria Math" panose="02040503050406030204" pitchFamily="18" charset="0"/>
-                        <a:ea typeface="Cambria Math" panose="02040503050406030204" pitchFamily="18" charset="0"/>
-                      </a:rPr>
-                      <m:t>¬</m:t>
-                    </m:r>
-                    <m:r>
-                      <a:rPr lang="en-US" b="0" i="1" smtClean="0">
-                        <a:latin typeface="Cambria Math" panose="02040503050406030204" pitchFamily="18" charset="0"/>
-                        <a:ea typeface="Cambria Math" panose="02040503050406030204" pitchFamily="18" charset="0"/>
-                      </a:rPr>
-                      <m:t>𝑃𝑖𝑡</m:t>
-                    </m:r>
-                    <m:r>
-                      <a:rPr lang="en-US" b="0" i="1" smtClean="0">
-                        <a:latin typeface="Cambria Math" panose="02040503050406030204" pitchFamily="18" charset="0"/>
-                        <a:ea typeface="Cambria Math" panose="02040503050406030204" pitchFamily="18" charset="0"/>
-                      </a:rPr>
-                      <m:t>(1,2)</m:t>
-                    </m:r>
-                  </m:oMath>
-                </a14:m>
-                <a:r>
-                  <a:rPr lang="en-US" i="1" dirty="0">
-                    <a:latin typeface="Cambria Math" panose="02040503050406030204" pitchFamily="18" charset="0"/>
-                    <a:ea typeface="Cambria Math" panose="02040503050406030204" pitchFamily="18" charset="0"/>
-                  </a:rPr>
-                  <a:t>, </a:t>
-                </a:r>
-                <a14:m>
-                  <m:oMath xmlns:m="http://schemas.openxmlformats.org/officeDocument/2006/math">
-                    <m:r>
-                      <a:rPr lang="en-US" i="1" smtClean="0">
-                        <a:latin typeface="Cambria Math" panose="02040503050406030204" pitchFamily="18" charset="0"/>
-                        <a:ea typeface="Cambria Math" panose="02040503050406030204" pitchFamily="18" charset="0"/>
-                      </a:rPr>
-                      <m:t>¬</m:t>
-                    </m:r>
-                    <m:r>
-                      <a:rPr lang="en-US" b="0" i="1" smtClean="0">
-                        <a:latin typeface="Cambria Math" panose="02040503050406030204" pitchFamily="18" charset="0"/>
-                        <a:ea typeface="Cambria Math" panose="02040503050406030204" pitchFamily="18" charset="0"/>
-                      </a:rPr>
-                      <m:t>𝑃𝑖𝑡</m:t>
-                    </m:r>
-                    <m:r>
-                      <a:rPr lang="en-US" b="0" i="1" smtClean="0">
-                        <a:latin typeface="Cambria Math" panose="02040503050406030204" pitchFamily="18" charset="0"/>
-                        <a:ea typeface="Cambria Math" panose="02040503050406030204" pitchFamily="18" charset="0"/>
-                      </a:rPr>
-                      <m:t>(2,1)</m:t>
-                    </m:r>
-                  </m:oMath>
-                </a14:m>
-                <a:r>
-                  <a:rPr lang="en-US" i="1" dirty="0">
-                    <a:latin typeface="Cambria Math" panose="02040503050406030204" pitchFamily="18" charset="0"/>
-                    <a:ea typeface="Cambria Math" panose="02040503050406030204" pitchFamily="18" charset="0"/>
-                  </a:rPr>
-                  <a:t>, </a:t>
-                </a:r>
-                <a14:m>
-                  <m:oMath xmlns:m="http://schemas.openxmlformats.org/officeDocument/2006/math">
-                    <m:r>
-                      <a:rPr lang="en-US" i="1" smtClean="0">
-                        <a:latin typeface="Cambria Math" panose="02040503050406030204" pitchFamily="18" charset="0"/>
-                        <a:ea typeface="Cambria Math" panose="02040503050406030204" pitchFamily="18" charset="0"/>
-                      </a:rPr>
-                      <m:t>¬</m:t>
-                    </m:r>
-                    <m:r>
-                      <a:rPr lang="en-US" b="0" i="1" smtClean="0">
-                        <a:latin typeface="Cambria Math" panose="02040503050406030204" pitchFamily="18" charset="0"/>
-                        <a:ea typeface="Cambria Math" panose="02040503050406030204" pitchFamily="18" charset="0"/>
-                      </a:rPr>
-                      <m:t>𝑊</m:t>
-                    </m:r>
-                    <m:r>
-                      <a:rPr lang="en-US" b="0" i="1" smtClean="0">
-                        <a:latin typeface="Cambria Math" panose="02040503050406030204" pitchFamily="18" charset="0"/>
-                        <a:ea typeface="Cambria Math" panose="02040503050406030204" pitchFamily="18" charset="0"/>
-                      </a:rPr>
-                      <m:t>(1,2)</m:t>
-                    </m:r>
-                  </m:oMath>
-                </a14:m>
-                <a:r>
-                  <a:rPr lang="en-US" i="1" dirty="0">
-                    <a:latin typeface="Cambria Math" panose="02040503050406030204" pitchFamily="18" charset="0"/>
-                    <a:ea typeface="Cambria Math" panose="02040503050406030204" pitchFamily="18" charset="0"/>
-                  </a:rPr>
-                  <a:t>, </a:t>
-                </a:r>
-                <a14:m>
-                  <m:oMath xmlns:m="http://schemas.openxmlformats.org/officeDocument/2006/math">
-                    <m:r>
-                      <a:rPr lang="en-US" i="1" smtClean="0">
-                        <a:latin typeface="Cambria Math" panose="02040503050406030204" pitchFamily="18" charset="0"/>
-                        <a:ea typeface="Cambria Math" panose="02040503050406030204" pitchFamily="18" charset="0"/>
-                      </a:rPr>
-                      <m:t>¬</m:t>
-                    </m:r>
-                    <m:r>
-                      <a:rPr lang="en-US" b="0" i="1" smtClean="0">
-                        <a:latin typeface="Cambria Math" panose="02040503050406030204" pitchFamily="18" charset="0"/>
-                        <a:ea typeface="Cambria Math" panose="02040503050406030204" pitchFamily="18" charset="0"/>
-                      </a:rPr>
-                      <m:t>𝑊</m:t>
-                    </m:r>
-                    <m:d>
-                      <m:dPr>
-                        <m:ctrlPr>
-                          <a:rPr lang="en-US" b="0" i="1" smtClean="0">
-                            <a:latin typeface="Cambria Math" panose="02040503050406030204" pitchFamily="18" charset="0"/>
-                            <a:ea typeface="Cambria Math" panose="02040503050406030204" pitchFamily="18" charset="0"/>
-                          </a:rPr>
-                        </m:ctrlPr>
-                      </m:dPr>
-                      <m:e>
-                        <m:r>
-                          <a:rPr lang="en-US" b="0" i="1" smtClean="0">
-                            <a:latin typeface="Cambria Math" panose="02040503050406030204" pitchFamily="18" charset="0"/>
-                            <a:ea typeface="Cambria Math" panose="02040503050406030204" pitchFamily="18" charset="0"/>
-                          </a:rPr>
-                          <m:t>2,1</m:t>
-                        </m:r>
-                      </m:e>
-                    </m:d>
-                  </m:oMath>
-                </a14:m>
-                <a:endParaRPr lang="en-US" i="1" dirty="0">
-                  <a:latin typeface="Cambria Math" panose="02040503050406030204" pitchFamily="18" charset="0"/>
-                  <a:ea typeface="Cambria Math" panose="02040503050406030204" pitchFamily="18" charset="0"/>
-                </a:endParaRPr>
-              </a:p>
-              <a:p>
-                <a:pPr marL="0" indent="0">
-                  <a:buNone/>
-                </a:pPr>
-                <a:r>
-                  <a:rPr lang="en-US" dirty="0">
-                    <a:latin typeface="Cambria Math" panose="02040503050406030204" pitchFamily="18" charset="0"/>
-                    <a:ea typeface="Cambria Math" panose="02040503050406030204" pitchFamily="18" charset="0"/>
-                  </a:rPr>
-                  <a:t>This means that (1,2) and (2,1) are safe.</a:t>
-                </a:r>
-              </a:p>
-              <a:p>
-                <a:pPr marL="0" indent="0">
-                  <a:buNone/>
-                </a:pPr>
-                <a:endParaRPr lang="en-US" i="1" dirty="0">
-                  <a:latin typeface="Cambria Math" panose="02040503050406030204" pitchFamily="18" charset="0"/>
-                  <a:ea typeface="Cambria Math" panose="02040503050406030204" pitchFamily="18" charset="0"/>
-                </a:endParaRPr>
-              </a:p>
-              <a:p>
-                <a:pPr marL="0" indent="0">
-                  <a:buNone/>
-                </a:pPr>
-                <a:endParaRPr lang="en-US" i="1" dirty="0">
-                  <a:latin typeface="Cambria Math" panose="02040503050406030204" pitchFamily="18" charset="0"/>
-                  <a:ea typeface="Cambria Math" panose="02040503050406030204" pitchFamily="18" charset="0"/>
-                </a:endParaRPr>
-              </a:p>
-              <a:p>
-                <a:pPr marL="0" indent="0">
-                  <a:buNone/>
-                </a:pPr>
-                <a:endParaRPr lang="en-US" i="1" dirty="0">
-                  <a:latin typeface="Cambria Math" panose="02040503050406030204" pitchFamily="18" charset="0"/>
-                  <a:ea typeface="Cambria Math" panose="02040503050406030204" pitchFamily="18" charset="0"/>
-                </a:endParaRPr>
-              </a:p>
-              <a:p>
-                <a:pPr marL="0" indent="0">
-                  <a:buNone/>
-                </a:pPr>
-                <a:endParaRPr lang="en-US" dirty="0"/>
-              </a:p>
-              <a:p>
-                <a:pPr marL="0" indent="0">
-                  <a:buNone/>
-                </a:pPr>
-                <a:endParaRPr lang="en-US" dirty="0"/>
-              </a:p>
-              <a:p>
-                <a:pPr marL="0" indent="0">
-                  <a:buNone/>
-                </a:pPr>
-                <a:endParaRPr lang="en-US" dirty="0"/>
-              </a:p>
-            </p:txBody>
-          </p:sp>
-        </mc:Choice>
-        <mc:Fallback xmlns="">
-          <p:sp>
-            <p:nvSpPr>
-              <p:cNvPr id="3" name="Content Placeholder 2">
-                <a:extLst>
-                  <a:ext uri="{FF2B5EF4-FFF2-40B4-BE49-F238E27FC236}">
-                    <a16:creationId xmlns:a16="http://schemas.microsoft.com/office/drawing/2014/main" id="{C857998B-2C70-4155-B400-75A197557126}"/>
-                  </a:ext>
-                </a:extLst>
-              </p:cNvPr>
-              <p:cNvSpPr>
-                <a:spLocks noGrp="1" noRot="1" noChangeAspect="1" noMove="1" noResize="1" noEditPoints="1" noAdjustHandles="1" noChangeArrowheads="1" noChangeShapeType="1" noTextEdit="1"/>
-              </p:cNvSpPr>
-              <p:nvPr>
-                <p:ph idx="1"/>
-              </p:nvPr>
-            </p:nvSpPr>
-            <p:spPr>
-              <a:xfrm>
-                <a:off x="628650" y="1447800"/>
-                <a:ext cx="5467350" cy="4729163"/>
-              </a:xfrm>
-              <a:blipFill>
-                <a:blip r:embed="rId2"/>
-                <a:stretch>
-                  <a:fillRect l="-1338" t="-1548"/>
-                </a:stretch>
-              </a:blipFill>
-            </p:spPr>
-            <p:txBody>
-              <a:bodyPr/>
-              <a:lstStyle/>
-              <a:p>
-                <a:r>
-                  <a:rPr lang="en-US">
-                    <a:noFill/>
-                  </a:rPr>
-                  <a:t> </a:t>
-                </a:r>
-              </a:p>
-            </p:txBody>
-          </p:sp>
-        </mc:Fallback>
-      </mc:AlternateContent>
-      <p:sp>
-        <p:nvSpPr>
-          <p:cNvPr id="4" name="Right Brace 3">
-            <a:extLst>
-              <a:ext uri="{FF2B5EF4-FFF2-40B4-BE49-F238E27FC236}">
-                <a16:creationId xmlns:a16="http://schemas.microsoft.com/office/drawing/2014/main" id="{D454507F-F69E-E92C-6546-001A90DE165C}"/>
-              </a:ext>
-              <a:ext uri="{C183D7F6-B498-43B3-948B-1728B52AA6E4}">
-                <adec:decorative xmlns:adec="http://schemas.microsoft.com/office/drawing/2017/decorative" val="1"/>
-              </a:ext>
-            </a:extLst>
-          </p:cNvPr>
-          <p:cNvSpPr/>
-          <p:nvPr/>
-        </p:nvSpPr>
-        <p:spPr>
-          <a:xfrm>
-            <a:off x="6172200" y="1676400"/>
-            <a:ext cx="304800" cy="1447800"/>
-          </a:xfrm>
-          <a:prstGeom prst="rightBrace">
-            <a:avLst/>
-          </a:prstGeom>
-        </p:spPr>
-        <p:style>
-          <a:lnRef idx="1">
-            <a:schemeClr val="accent1"/>
-          </a:lnRef>
-          <a:fillRef idx="0">
-            <a:schemeClr val="accent1"/>
-          </a:fillRef>
-          <a:effectRef idx="0">
-            <a:schemeClr val="accent1"/>
-          </a:effectRef>
-          <a:fontRef idx="minor">
-            <a:schemeClr val="tx1"/>
-          </a:fontRef>
-        </p:style>
-        <p:txBody>
-          <a:bodyPr rtlCol="0" anchor="ctr"/>
-          <a:lstStyle/>
-          <a:p>
-            <a:pPr algn="ctr"/>
-            <a:endParaRPr lang="en-US"/>
-          </a:p>
-        </p:txBody>
-      </p:sp>
-      <p:sp>
-        <p:nvSpPr>
-          <p:cNvPr id="6" name="TextBox 5">
-            <a:extLst>
-              <a:ext uri="{FF2B5EF4-FFF2-40B4-BE49-F238E27FC236}">
-                <a16:creationId xmlns:a16="http://schemas.microsoft.com/office/drawing/2014/main" id="{6A1F8CC8-26FA-F614-67DA-273A6D5C931B}"/>
-              </a:ext>
-            </a:extLst>
-          </p:cNvPr>
-          <p:cNvSpPr txBox="1"/>
-          <p:nvPr/>
-        </p:nvSpPr>
-        <p:spPr>
-          <a:xfrm>
-            <a:off x="6628765" y="1555682"/>
-            <a:ext cx="2064173" cy="1754326"/>
-          </a:xfrm>
-          <a:prstGeom prst="rect">
-            <a:avLst/>
-          </a:prstGeom>
-        </p:spPr>
-        <p:style>
-          <a:lnRef idx="3">
-            <a:schemeClr val="lt1"/>
-          </a:lnRef>
-          <a:fillRef idx="1">
-            <a:schemeClr val="accent6"/>
-          </a:fillRef>
-          <a:effectRef idx="1">
-            <a:schemeClr val="accent6"/>
-          </a:effectRef>
-          <a:fontRef idx="minor">
-            <a:schemeClr val="lt1"/>
-          </a:fontRef>
-        </p:style>
-        <p:txBody>
-          <a:bodyPr wrap="square" rtlCol="0">
-            <a:spAutoFit/>
-          </a:bodyPr>
-          <a:lstStyle/>
-          <a:p>
-            <a:r>
-              <a:rPr lang="en-US" dirty="0"/>
-              <a:t>We have to enumerate all possible scenarios in propositional logic! First-order logic can help.</a:t>
-            </a:r>
-          </a:p>
-        </p:txBody>
-      </p:sp>
-    </p:spTree>
-    <p:extLst>
-      <p:ext uri="{BB962C8B-B14F-4D97-AF65-F5344CB8AC3E}">
-        <p14:creationId xmlns:p14="http://schemas.microsoft.com/office/powerpoint/2010/main" val="2010285182"/>
-      </p:ext>
-    </p:extLst>
-  </p:cSld>
-  <p:clrMapOvr>
-    <a:masterClrMapping/>
-  </p:clrMapOvr>
 </p:sld>
 </file>
 
@@ -42382,6 +41662,1027 @@
       </p:grpSpPr>
       <p:sp>
         <p:nvSpPr>
+          <p:cNvPr id="2" name="Title 1">
+            <a:extLst>
+              <a:ext uri="{FF2B5EF4-FFF2-40B4-BE49-F238E27FC236}">
+                <a16:creationId xmlns:a16="http://schemas.microsoft.com/office/drawing/2014/main" id="{2DCB16B1-C2AC-4FB7-A71E-01A526A028CB}"/>
+              </a:ext>
+            </a:extLst>
+          </p:cNvPr>
+          <p:cNvSpPr>
+            <a:spLocks noGrp="1"/>
+          </p:cNvSpPr>
+          <p:nvPr>
+            <p:ph type="title"/>
+          </p:nvPr>
+        </p:nvSpPr>
+        <p:spPr/>
+        <p:txBody>
+          <a:bodyPr/>
+          <a:lstStyle/>
+          <a:p>
+            <a:r>
+              <a:rPr lang="en-US" dirty="0"/>
+              <a:t>Example: Wumpus World</a:t>
+            </a:r>
+          </a:p>
+        </p:txBody>
+      </p:sp>
+      <p:pic>
+        <p:nvPicPr>
+          <p:cNvPr id="4" name="Picture 3">
+            <a:extLst>
+              <a:ext uri="{FF2B5EF4-FFF2-40B4-BE49-F238E27FC236}">
+                <a16:creationId xmlns:a16="http://schemas.microsoft.com/office/drawing/2014/main" id="{6BFFBE72-B33A-4C9F-A4A2-836861E9718E}"/>
+              </a:ext>
+              <a:ext uri="{C183D7F6-B498-43B3-948B-1728B52AA6E4}">
+                <adec:decorative xmlns:adec="http://schemas.microsoft.com/office/drawing/2017/decorative" val="1"/>
+              </a:ext>
+            </a:extLst>
+          </p:cNvPr>
+          <p:cNvPicPr>
+            <a:picLocks noChangeAspect="1"/>
+          </p:cNvPicPr>
+          <p:nvPr/>
+        </p:nvPicPr>
+        <p:blipFill>
+          <a:blip r:embed="rId2"/>
+          <a:stretch>
+            <a:fillRect/>
+          </a:stretch>
+        </p:blipFill>
+        <p:spPr>
+          <a:xfrm>
+            <a:off x="1219200" y="3360726"/>
+            <a:ext cx="7005441" cy="3149679"/>
+          </a:xfrm>
+          <a:prstGeom prst="rect">
+            <a:avLst/>
+          </a:prstGeom>
+        </p:spPr>
+      </p:pic>
+      <p:pic>
+        <p:nvPicPr>
+          <p:cNvPr id="5" name="Picture 4" descr="A figure showing the 4-by-4 wumpus world.">
+            <a:extLst>
+              <a:ext uri="{FF2B5EF4-FFF2-40B4-BE49-F238E27FC236}">
+                <a16:creationId xmlns:a16="http://schemas.microsoft.com/office/drawing/2014/main" id="{9BF49D0A-87B7-452A-B0A8-C3B26D130EBB}"/>
+              </a:ext>
+            </a:extLst>
+          </p:cNvPr>
+          <p:cNvPicPr>
+            <a:picLocks noChangeAspect="1"/>
+          </p:cNvPicPr>
+          <p:nvPr/>
+        </p:nvPicPr>
+        <p:blipFill>
+          <a:blip r:embed="rId3"/>
+          <a:stretch>
+            <a:fillRect/>
+          </a:stretch>
+        </p:blipFill>
+        <p:spPr>
+          <a:xfrm>
+            <a:off x="5990995" y="347595"/>
+            <a:ext cx="2889398" cy="2686188"/>
+          </a:xfrm>
+          <a:prstGeom prst="rect">
+            <a:avLst/>
+          </a:prstGeom>
+        </p:spPr>
+      </p:pic>
+    </p:spTree>
+    <p:extLst>
+      <p:ext uri="{BB962C8B-B14F-4D97-AF65-F5344CB8AC3E}">
+        <p14:creationId xmlns:p14="http://schemas.microsoft.com/office/powerpoint/2010/main" val="3741195340"/>
+      </p:ext>
+    </p:extLst>
+  </p:cSld>
+  <p:clrMapOvr>
+    <a:masterClrMapping/>
+  </p:clrMapOvr>
+</p:sld>
+</file>
+
+<file path=ppt/slides/slide41.xml><?xml version="1.0" encoding="utf-8"?>
+<p:sld xmlns:a="http://schemas.openxmlformats.org/drawingml/2006/main" xmlns:r="http://schemas.openxmlformats.org/officeDocument/2006/relationships" xmlns:p="http://schemas.openxmlformats.org/presentationml/2006/main">
+  <p:cSld>
+    <p:spTree>
+      <p:nvGrpSpPr>
+        <p:cNvPr id="1" name=""/>
+        <p:cNvGrpSpPr/>
+        <p:nvPr/>
+      </p:nvGrpSpPr>
+      <p:grpSpPr>
+        <a:xfrm>
+          <a:off x="0" y="0"/>
+          <a:ext cx="0" cy="0"/>
+          <a:chOff x="0" y="0"/>
+          <a:chExt cx="0" cy="0"/>
+        </a:xfrm>
+      </p:grpSpPr>
+      <p:sp>
+        <p:nvSpPr>
+          <p:cNvPr id="2" name="Title 1">
+            <a:extLst>
+              <a:ext uri="{FF2B5EF4-FFF2-40B4-BE49-F238E27FC236}">
+                <a16:creationId xmlns:a16="http://schemas.microsoft.com/office/drawing/2014/main" id="{2DCB16B1-C2AC-4FB7-A71E-01A526A028CB}"/>
+              </a:ext>
+            </a:extLst>
+          </p:cNvPr>
+          <p:cNvSpPr>
+            <a:spLocks noGrp="1"/>
+          </p:cNvSpPr>
+          <p:nvPr>
+            <p:ph type="title"/>
+          </p:nvPr>
+        </p:nvSpPr>
+        <p:spPr/>
+        <p:txBody>
+          <a:bodyPr/>
+          <a:lstStyle/>
+          <a:p>
+            <a:r>
+              <a:rPr lang="en-US" dirty="0"/>
+              <a:t>Example: Wumpus World</a:t>
+            </a:r>
+          </a:p>
+        </p:txBody>
+      </p:sp>
+      <mc:AlternateContent xmlns:mc="http://schemas.openxmlformats.org/markup-compatibility/2006" xmlns:a14="http://schemas.microsoft.com/office/drawing/2010/main">
+        <mc:Choice Requires="a14">
+          <p:sp>
+            <p:nvSpPr>
+              <p:cNvPr id="3" name="Content Placeholder 2">
+                <a:extLst>
+                  <a:ext uri="{FF2B5EF4-FFF2-40B4-BE49-F238E27FC236}">
+                    <a16:creationId xmlns:a16="http://schemas.microsoft.com/office/drawing/2014/main" id="{C857998B-2C70-4155-B400-75A197557126}"/>
+                  </a:ext>
+                </a:extLst>
+              </p:cNvPr>
+              <p:cNvSpPr>
+                <a:spLocks noGrp="1"/>
+              </p:cNvSpPr>
+              <p:nvPr>
+                <p:ph idx="1"/>
+              </p:nvPr>
+            </p:nvSpPr>
+            <p:spPr>
+              <a:xfrm>
+                <a:off x="628650" y="1447800"/>
+                <a:ext cx="5467350" cy="4729163"/>
+              </a:xfrm>
+            </p:spPr>
+            <p:txBody>
+              <a:bodyPr>
+                <a:normAutofit/>
+              </a:bodyPr>
+              <a:lstStyle/>
+              <a:p>
+                <a:pPr marL="0" indent="0">
+                  <a:buNone/>
+                </a:pPr>
+                <a:r>
+                  <a:rPr lang="en-US" b="1" dirty="0"/>
+                  <a:t>Initial KB </a:t>
+                </a:r>
+                <a:r>
+                  <a:rPr lang="en-US" dirty="0"/>
+                  <a:t>needs to contain rules like these for each square:</a:t>
+                </a:r>
+              </a:p>
+              <a:p>
+                <a:pPr marL="0" indent="0">
+                  <a:buNone/>
+                </a:pPr>
+                <a14:m>
+                  <m:oMathPara xmlns:m="http://schemas.openxmlformats.org/officeDocument/2006/math">
+                    <m:oMathParaPr>
+                      <m:jc m:val="left"/>
+                    </m:oMathParaPr>
+                    <m:oMath>
+                      <m:r>
+                        <a:rPr lang="en-US" b="0" i="1" smtClean="0">
+                          <a:latin typeface="Cambria Math" panose="02040503050406030204" pitchFamily="18" charset="0"/>
+                        </a:rPr>
+                        <m:t>𝐵𝑟𝑒𝑒𝑧𝑒</m:t>
+                      </m:r>
+                      <m:d>
+                        <m:dPr>
+                          <m:ctrlPr>
+                            <a:rPr lang="en-US" b="0" i="1" smtClean="0">
+                              <a:latin typeface="Cambria Math" panose="02040503050406030204" pitchFamily="18" charset="0"/>
+                            </a:rPr>
+                          </m:ctrlPr>
+                        </m:dPr>
+                        <m:e>
+                          <m:r>
+                            <a:rPr lang="en-US" b="0" i="1" smtClean="0">
+                              <a:latin typeface="Cambria Math" panose="02040503050406030204" pitchFamily="18" charset="0"/>
+                            </a:rPr>
+                            <m:t>1,1</m:t>
+                          </m:r>
+                        </m:e>
+                      </m:d>
+                      <m:r>
+                        <a:rPr lang="en-US" i="1">
+                          <a:latin typeface="Cambria Math" panose="02040503050406030204" pitchFamily="18" charset="0"/>
+                          <a:ea typeface="Cambria Math" panose="02040503050406030204" pitchFamily="18" charset="0"/>
+                        </a:rPr>
+                        <m:t>⟺</m:t>
+                      </m:r>
+                      <m:r>
+                        <a:rPr lang="en-US" b="0" i="1" smtClean="0">
+                          <a:latin typeface="Cambria Math" panose="02040503050406030204" pitchFamily="18" charset="0"/>
+                          <a:ea typeface="Cambria Math" panose="02040503050406030204" pitchFamily="18" charset="0"/>
+                        </a:rPr>
+                        <m:t>𝑃𝑖𝑡</m:t>
+                      </m:r>
+                      <m:d>
+                        <m:dPr>
+                          <m:ctrlPr>
+                            <a:rPr lang="en-US" b="0" i="1" smtClean="0">
+                              <a:latin typeface="Cambria Math" panose="02040503050406030204" pitchFamily="18" charset="0"/>
+                              <a:ea typeface="Cambria Math" panose="02040503050406030204" pitchFamily="18" charset="0"/>
+                            </a:rPr>
+                          </m:ctrlPr>
+                        </m:dPr>
+                        <m:e>
+                          <m:r>
+                            <a:rPr lang="en-US" b="0" i="1" smtClean="0">
+                              <a:latin typeface="Cambria Math" panose="02040503050406030204" pitchFamily="18" charset="0"/>
+                              <a:ea typeface="Cambria Math" panose="02040503050406030204" pitchFamily="18" charset="0"/>
+                            </a:rPr>
+                            <m:t>1,2</m:t>
+                          </m:r>
+                        </m:e>
+                      </m:d>
+                      <m:r>
+                        <a:rPr lang="en-US" b="0" i="1" smtClean="0">
+                          <a:latin typeface="Cambria Math" panose="02040503050406030204" pitchFamily="18" charset="0"/>
+                          <a:ea typeface="Cambria Math" panose="02040503050406030204" pitchFamily="18" charset="0"/>
+                        </a:rPr>
+                        <m:t>∨</m:t>
+                      </m:r>
+                      <m:r>
+                        <a:rPr lang="en-US" b="0" i="1" smtClean="0">
+                          <a:latin typeface="Cambria Math" panose="02040503050406030204" pitchFamily="18" charset="0"/>
+                          <a:ea typeface="Cambria Math" panose="02040503050406030204" pitchFamily="18" charset="0"/>
+                        </a:rPr>
+                        <m:t>𝑃𝑖𝑡</m:t>
+                      </m:r>
+                      <m:d>
+                        <m:dPr>
+                          <m:ctrlPr>
+                            <a:rPr lang="en-US" b="0" i="1" smtClean="0">
+                              <a:latin typeface="Cambria Math" panose="02040503050406030204" pitchFamily="18" charset="0"/>
+                              <a:ea typeface="Cambria Math" panose="02040503050406030204" pitchFamily="18" charset="0"/>
+                            </a:rPr>
+                          </m:ctrlPr>
+                        </m:dPr>
+                        <m:e>
+                          <m:r>
+                            <a:rPr lang="en-US" b="0" i="1" smtClean="0">
+                              <a:latin typeface="Cambria Math" panose="02040503050406030204" pitchFamily="18" charset="0"/>
+                              <a:ea typeface="Cambria Math" panose="02040503050406030204" pitchFamily="18" charset="0"/>
+                            </a:rPr>
+                            <m:t>2,1</m:t>
+                          </m:r>
+                        </m:e>
+                      </m:d>
+                    </m:oMath>
+                  </m:oMathPara>
+                </a14:m>
+                <a:endParaRPr lang="en-US" b="0" i="1" dirty="0">
+                  <a:latin typeface="Cambria Math" panose="02040503050406030204" pitchFamily="18" charset="0"/>
+                </a:endParaRPr>
+              </a:p>
+              <a:p>
+                <a:pPr marL="0" indent="0">
+                  <a:buNone/>
+                </a:pPr>
+                <a14:m>
+                  <m:oMathPara xmlns:m="http://schemas.openxmlformats.org/officeDocument/2006/math">
+                    <m:oMathParaPr>
+                      <m:jc m:val="left"/>
+                    </m:oMathParaPr>
+                    <m:oMath>
+                      <m:r>
+                        <a:rPr lang="en-US" b="0" i="1" smtClean="0">
+                          <a:latin typeface="Cambria Math" panose="02040503050406030204" pitchFamily="18" charset="0"/>
+                        </a:rPr>
+                        <m:t>𝐵𝑟𝑒𝑒𝑧𝑒</m:t>
+                      </m:r>
+                      <m:d>
+                        <m:dPr>
+                          <m:ctrlPr>
+                            <a:rPr lang="en-US" b="0" i="1" smtClean="0">
+                              <a:latin typeface="Cambria Math" panose="02040503050406030204" pitchFamily="18" charset="0"/>
+                            </a:rPr>
+                          </m:ctrlPr>
+                        </m:dPr>
+                        <m:e>
+                          <m:r>
+                            <a:rPr lang="en-US" b="0" i="1" smtClean="0">
+                              <a:latin typeface="Cambria Math" panose="02040503050406030204" pitchFamily="18" charset="0"/>
+                            </a:rPr>
+                            <m:t>1,2</m:t>
+                          </m:r>
+                        </m:e>
+                      </m:d>
+                      <m:r>
+                        <a:rPr lang="en-US" i="1">
+                          <a:latin typeface="Cambria Math" panose="02040503050406030204" pitchFamily="18" charset="0"/>
+                          <a:ea typeface="Cambria Math" panose="02040503050406030204" pitchFamily="18" charset="0"/>
+                        </a:rPr>
+                        <m:t>⟺</m:t>
+                      </m:r>
+                      <m:r>
+                        <a:rPr lang="en-US" b="0" i="1" smtClean="0">
+                          <a:latin typeface="Cambria Math" panose="02040503050406030204" pitchFamily="18" charset="0"/>
+                          <a:ea typeface="Cambria Math" panose="02040503050406030204" pitchFamily="18" charset="0"/>
+                        </a:rPr>
+                        <m:t>𝑃𝑖𝑡</m:t>
+                      </m:r>
+                      <m:d>
+                        <m:dPr>
+                          <m:ctrlPr>
+                            <a:rPr lang="en-US" b="0" i="1" smtClean="0">
+                              <a:latin typeface="Cambria Math" panose="02040503050406030204" pitchFamily="18" charset="0"/>
+                              <a:ea typeface="Cambria Math" panose="02040503050406030204" pitchFamily="18" charset="0"/>
+                            </a:rPr>
+                          </m:ctrlPr>
+                        </m:dPr>
+                        <m:e>
+                          <m:r>
+                            <a:rPr lang="en-US" b="0" i="1" smtClean="0">
+                              <a:latin typeface="Cambria Math" panose="02040503050406030204" pitchFamily="18" charset="0"/>
+                              <a:ea typeface="Cambria Math" panose="02040503050406030204" pitchFamily="18" charset="0"/>
+                            </a:rPr>
+                            <m:t>1,1</m:t>
+                          </m:r>
+                        </m:e>
+                      </m:d>
+                      <m:r>
+                        <a:rPr lang="en-US" b="0" i="1" smtClean="0">
+                          <a:latin typeface="Cambria Math" panose="02040503050406030204" pitchFamily="18" charset="0"/>
+                          <a:ea typeface="Cambria Math" panose="02040503050406030204" pitchFamily="18" charset="0"/>
+                        </a:rPr>
+                        <m:t>∨</m:t>
+                      </m:r>
+                      <m:r>
+                        <a:rPr lang="en-US" b="0" i="1" smtClean="0">
+                          <a:latin typeface="Cambria Math" panose="02040503050406030204" pitchFamily="18" charset="0"/>
+                          <a:ea typeface="Cambria Math" panose="02040503050406030204" pitchFamily="18" charset="0"/>
+                        </a:rPr>
+                        <m:t>𝑃𝑖𝑡</m:t>
+                      </m:r>
+                      <m:d>
+                        <m:dPr>
+                          <m:ctrlPr>
+                            <a:rPr lang="en-US" b="0" i="1" smtClean="0">
+                              <a:latin typeface="Cambria Math" panose="02040503050406030204" pitchFamily="18" charset="0"/>
+                              <a:ea typeface="Cambria Math" panose="02040503050406030204" pitchFamily="18" charset="0"/>
+                            </a:rPr>
+                          </m:ctrlPr>
+                        </m:dPr>
+                        <m:e>
+                          <m:r>
+                            <a:rPr lang="en-US" b="0" i="1" smtClean="0">
+                              <a:latin typeface="Cambria Math" panose="02040503050406030204" pitchFamily="18" charset="0"/>
+                              <a:ea typeface="Cambria Math" panose="02040503050406030204" pitchFamily="18" charset="0"/>
+                            </a:rPr>
+                            <m:t>1,3</m:t>
+                          </m:r>
+                        </m:e>
+                      </m:d>
+                      <m:r>
+                        <a:rPr lang="en-US" b="0" i="1" smtClean="0">
+                          <a:latin typeface="Cambria Math" panose="02040503050406030204" pitchFamily="18" charset="0"/>
+                          <a:ea typeface="Cambria Math" panose="02040503050406030204" pitchFamily="18" charset="0"/>
+                        </a:rPr>
+                        <m:t> ∨</m:t>
+                      </m:r>
+                      <m:r>
+                        <a:rPr lang="en-US" b="0" i="1" smtClean="0">
+                          <a:latin typeface="Cambria Math" panose="02040503050406030204" pitchFamily="18" charset="0"/>
+                          <a:ea typeface="Cambria Math" panose="02040503050406030204" pitchFamily="18" charset="0"/>
+                        </a:rPr>
+                        <m:t>𝑃𝑖𝑡</m:t>
+                      </m:r>
+                      <m:d>
+                        <m:dPr>
+                          <m:ctrlPr>
+                            <a:rPr lang="en-US" b="0" i="1" smtClean="0">
+                              <a:latin typeface="Cambria Math" panose="02040503050406030204" pitchFamily="18" charset="0"/>
+                              <a:ea typeface="Cambria Math" panose="02040503050406030204" pitchFamily="18" charset="0"/>
+                            </a:rPr>
+                          </m:ctrlPr>
+                        </m:dPr>
+                        <m:e>
+                          <m:r>
+                            <a:rPr lang="en-US" b="0" i="1" smtClean="0">
+                              <a:latin typeface="Cambria Math" panose="02040503050406030204" pitchFamily="18" charset="0"/>
+                              <a:ea typeface="Cambria Math" panose="02040503050406030204" pitchFamily="18" charset="0"/>
+                            </a:rPr>
+                            <m:t>2,2</m:t>
+                          </m:r>
+                        </m:e>
+                      </m:d>
+                    </m:oMath>
+                  </m:oMathPara>
+                </a14:m>
+                <a:endParaRPr lang="en-US" b="0" dirty="0">
+                  <a:ea typeface="Cambria Math" panose="02040503050406030204" pitchFamily="18" charset="0"/>
+                </a:endParaRPr>
+              </a:p>
+              <a:p>
+                <a:pPr marL="0" indent="0">
+                  <a:buNone/>
+                </a:pPr>
+                <a14:m>
+                  <m:oMathPara xmlns:m="http://schemas.openxmlformats.org/officeDocument/2006/math">
+                    <m:oMathParaPr>
+                      <m:jc m:val="left"/>
+                    </m:oMathParaPr>
+                    <m:oMath>
+                      <m:r>
+                        <m:rPr>
+                          <m:sty m:val="p"/>
+                        </m:rPr>
+                        <a:rPr lang="en-US" b="0" i="0" smtClean="0">
+                          <a:latin typeface="Cambria Math" panose="02040503050406030204" pitchFamily="18" charset="0"/>
+                        </a:rPr>
+                        <m:t>Stench</m:t>
+                      </m:r>
+                      <m:d>
+                        <m:dPr>
+                          <m:ctrlPr>
+                            <a:rPr lang="en-US" b="0" i="1" smtClean="0">
+                              <a:latin typeface="Cambria Math" panose="02040503050406030204" pitchFamily="18" charset="0"/>
+                            </a:rPr>
+                          </m:ctrlPr>
+                        </m:dPr>
+                        <m:e>
+                          <m:r>
+                            <a:rPr lang="en-US" b="0" i="1" smtClean="0">
+                              <a:latin typeface="Cambria Math" panose="02040503050406030204" pitchFamily="18" charset="0"/>
+                            </a:rPr>
+                            <m:t>1,1</m:t>
+                          </m:r>
+                        </m:e>
+                      </m:d>
+                      <m:r>
+                        <a:rPr lang="en-US" i="1">
+                          <a:latin typeface="Cambria Math" panose="02040503050406030204" pitchFamily="18" charset="0"/>
+                          <a:ea typeface="Cambria Math" panose="02040503050406030204" pitchFamily="18" charset="0"/>
+                        </a:rPr>
+                        <m:t>⟺</m:t>
+                      </m:r>
+                      <m:r>
+                        <a:rPr lang="en-US" b="0" i="1" smtClean="0">
+                          <a:latin typeface="Cambria Math" panose="02040503050406030204" pitchFamily="18" charset="0"/>
+                          <a:ea typeface="Cambria Math" panose="02040503050406030204" pitchFamily="18" charset="0"/>
+                        </a:rPr>
+                        <m:t>𝑊</m:t>
+                      </m:r>
+                      <m:d>
+                        <m:dPr>
+                          <m:ctrlPr>
+                            <a:rPr lang="en-US" b="0" i="1" smtClean="0">
+                              <a:latin typeface="Cambria Math" panose="02040503050406030204" pitchFamily="18" charset="0"/>
+                              <a:ea typeface="Cambria Math" panose="02040503050406030204" pitchFamily="18" charset="0"/>
+                            </a:rPr>
+                          </m:ctrlPr>
+                        </m:dPr>
+                        <m:e>
+                          <m:r>
+                            <a:rPr lang="en-US" b="0" i="1" smtClean="0">
+                              <a:latin typeface="Cambria Math" panose="02040503050406030204" pitchFamily="18" charset="0"/>
+                              <a:ea typeface="Cambria Math" panose="02040503050406030204" pitchFamily="18" charset="0"/>
+                            </a:rPr>
+                            <m:t>1,2</m:t>
+                          </m:r>
+                        </m:e>
+                      </m:d>
+                      <m:r>
+                        <a:rPr lang="en-US" b="0" i="1" smtClean="0">
+                          <a:latin typeface="Cambria Math" panose="02040503050406030204" pitchFamily="18" charset="0"/>
+                          <a:ea typeface="Cambria Math" panose="02040503050406030204" pitchFamily="18" charset="0"/>
+                        </a:rPr>
+                        <m:t>∨</m:t>
+                      </m:r>
+                      <m:r>
+                        <a:rPr lang="en-US" b="0" i="1" smtClean="0">
+                          <a:latin typeface="Cambria Math" panose="02040503050406030204" pitchFamily="18" charset="0"/>
+                          <a:ea typeface="Cambria Math" panose="02040503050406030204" pitchFamily="18" charset="0"/>
+                        </a:rPr>
+                        <m:t>𝑊</m:t>
+                      </m:r>
+                      <m:d>
+                        <m:dPr>
+                          <m:ctrlPr>
+                            <a:rPr lang="en-US" b="0" i="1" smtClean="0">
+                              <a:latin typeface="Cambria Math" panose="02040503050406030204" pitchFamily="18" charset="0"/>
+                              <a:ea typeface="Cambria Math" panose="02040503050406030204" pitchFamily="18" charset="0"/>
+                            </a:rPr>
+                          </m:ctrlPr>
+                        </m:dPr>
+                        <m:e>
+                          <m:r>
+                            <a:rPr lang="en-US" b="0" i="1" smtClean="0">
+                              <a:latin typeface="Cambria Math" panose="02040503050406030204" pitchFamily="18" charset="0"/>
+                              <a:ea typeface="Cambria Math" panose="02040503050406030204" pitchFamily="18" charset="0"/>
+                            </a:rPr>
+                            <m:t>2,1</m:t>
+                          </m:r>
+                        </m:e>
+                      </m:d>
+                    </m:oMath>
+                    <m:oMath>
+                      <m:r>
+                        <a:rPr lang="en-US" b="0" i="1" smtClean="0">
+                          <a:latin typeface="Cambria Math" panose="02040503050406030204" pitchFamily="18" charset="0"/>
+                        </a:rPr>
+                        <m:t>…</m:t>
+                      </m:r>
+                    </m:oMath>
+                  </m:oMathPara>
+                </a14:m>
+                <a:endParaRPr lang="en-US" dirty="0"/>
+              </a:p>
+              <a:p>
+                <a:pPr marL="0" indent="0">
+                  <a:buNone/>
+                </a:pPr>
+                <a:r>
+                  <a:rPr lang="en-US" b="1" dirty="0"/>
+                  <a:t>Percepts</a:t>
+                </a:r>
+                <a:r>
+                  <a:rPr lang="en-US" dirty="0"/>
+                  <a:t> at (1,1) are no breeze or stench. Add the following facts to the KB:</a:t>
+                </a:r>
+              </a:p>
+              <a:p>
+                <a:pPr marL="0" indent="0">
+                  <a:buNone/>
+                </a:pPr>
+                <a14:m>
+                  <m:oMathPara xmlns:m="http://schemas.openxmlformats.org/officeDocument/2006/math">
+                    <m:oMathParaPr>
+                      <m:jc m:val="left"/>
+                    </m:oMathParaPr>
+                    <m:oMath>
+                      <m:r>
+                        <a:rPr lang="en-US" i="1" smtClean="0">
+                          <a:latin typeface="Cambria Math" panose="02040503050406030204" pitchFamily="18" charset="0"/>
+                          <a:ea typeface="Cambria Math" panose="02040503050406030204" pitchFamily="18" charset="0"/>
+                        </a:rPr>
+                        <m:t>¬</m:t>
+                      </m:r>
+                      <m:r>
+                        <a:rPr lang="en-US" b="0" i="1" smtClean="0">
+                          <a:latin typeface="Cambria Math" panose="02040503050406030204" pitchFamily="18" charset="0"/>
+                          <a:ea typeface="Cambria Math" panose="02040503050406030204" pitchFamily="18" charset="0"/>
+                        </a:rPr>
+                        <m:t>𝐵𝑟𝑒𝑒𝑧𝑒</m:t>
+                      </m:r>
+                      <m:r>
+                        <a:rPr lang="en-US" b="0" i="1" smtClean="0">
+                          <a:latin typeface="Cambria Math" panose="02040503050406030204" pitchFamily="18" charset="0"/>
+                          <a:ea typeface="Cambria Math" panose="02040503050406030204" pitchFamily="18" charset="0"/>
+                        </a:rPr>
+                        <m:t>(1,1)</m:t>
+                      </m:r>
+                    </m:oMath>
+                  </m:oMathPara>
+                </a14:m>
+                <a:endParaRPr lang="en-US" i="1" dirty="0">
+                  <a:latin typeface="Cambria Math" panose="02040503050406030204" pitchFamily="18" charset="0"/>
+                  <a:ea typeface="Cambria Math" panose="02040503050406030204" pitchFamily="18" charset="0"/>
+                </a:endParaRPr>
+              </a:p>
+              <a:p>
+                <a:pPr marL="0" indent="0">
+                  <a:buNone/>
+                </a:pPr>
+                <a14:m>
+                  <m:oMathPara xmlns:m="http://schemas.openxmlformats.org/officeDocument/2006/math">
+                    <m:oMathParaPr>
+                      <m:jc m:val="left"/>
+                    </m:oMathParaPr>
+                    <m:oMath>
+                      <m:r>
+                        <a:rPr lang="en-US" i="1" smtClean="0">
+                          <a:latin typeface="Cambria Math" panose="02040503050406030204" pitchFamily="18" charset="0"/>
+                          <a:ea typeface="Cambria Math" panose="02040503050406030204" pitchFamily="18" charset="0"/>
+                        </a:rPr>
+                        <m:t>¬</m:t>
+                      </m:r>
+                      <m:r>
+                        <a:rPr lang="en-US" b="0" i="1" smtClean="0">
+                          <a:latin typeface="Cambria Math" panose="02040503050406030204" pitchFamily="18" charset="0"/>
+                          <a:ea typeface="Cambria Math" panose="02040503050406030204" pitchFamily="18" charset="0"/>
+                        </a:rPr>
+                        <m:t>𝑆𝑡𝑒𝑛𝑐ℎ</m:t>
+                      </m:r>
+                      <m:r>
+                        <a:rPr lang="en-US" b="0" i="1" smtClean="0">
+                          <a:latin typeface="Cambria Math" panose="02040503050406030204" pitchFamily="18" charset="0"/>
+                          <a:ea typeface="Cambria Math" panose="02040503050406030204" pitchFamily="18" charset="0"/>
+                        </a:rPr>
+                        <m:t>(1,1)</m:t>
+                      </m:r>
+                    </m:oMath>
+                  </m:oMathPara>
+                </a14:m>
+                <a:endParaRPr lang="en-US" dirty="0"/>
+              </a:p>
+              <a:p>
+                <a:pPr marL="0" indent="0">
+                  <a:buNone/>
+                </a:pPr>
+                <a:r>
+                  <a:rPr lang="en-US" b="1" dirty="0"/>
+                  <a:t>Inference</a:t>
+                </a:r>
+                <a:r>
+                  <a:rPr lang="en-US" dirty="0"/>
+                  <a:t> will tell us that the following facts are entailed: </a:t>
+                </a:r>
+                <a:br>
+                  <a:rPr lang="en-US" dirty="0"/>
+                </a:br>
+                <a14:m>
+                  <m:oMath xmlns:m="http://schemas.openxmlformats.org/officeDocument/2006/math">
+                    <m:r>
+                      <a:rPr lang="en-US" i="1" smtClean="0">
+                        <a:latin typeface="Cambria Math" panose="02040503050406030204" pitchFamily="18" charset="0"/>
+                        <a:ea typeface="Cambria Math" panose="02040503050406030204" pitchFamily="18" charset="0"/>
+                      </a:rPr>
+                      <m:t>¬</m:t>
+                    </m:r>
+                    <m:r>
+                      <a:rPr lang="en-US" b="0" i="1" smtClean="0">
+                        <a:latin typeface="Cambria Math" panose="02040503050406030204" pitchFamily="18" charset="0"/>
+                        <a:ea typeface="Cambria Math" panose="02040503050406030204" pitchFamily="18" charset="0"/>
+                      </a:rPr>
+                      <m:t>𝑃𝑖𝑡</m:t>
+                    </m:r>
+                    <m:r>
+                      <a:rPr lang="en-US" b="0" i="1" smtClean="0">
+                        <a:latin typeface="Cambria Math" panose="02040503050406030204" pitchFamily="18" charset="0"/>
+                        <a:ea typeface="Cambria Math" panose="02040503050406030204" pitchFamily="18" charset="0"/>
+                      </a:rPr>
+                      <m:t>(1,2)</m:t>
+                    </m:r>
+                  </m:oMath>
+                </a14:m>
+                <a:r>
+                  <a:rPr lang="en-US" i="1" dirty="0">
+                    <a:latin typeface="Cambria Math" panose="02040503050406030204" pitchFamily="18" charset="0"/>
+                    <a:ea typeface="Cambria Math" panose="02040503050406030204" pitchFamily="18" charset="0"/>
+                  </a:rPr>
+                  <a:t>, </a:t>
+                </a:r>
+                <a14:m>
+                  <m:oMath xmlns:m="http://schemas.openxmlformats.org/officeDocument/2006/math">
+                    <m:r>
+                      <a:rPr lang="en-US" i="1" smtClean="0">
+                        <a:latin typeface="Cambria Math" panose="02040503050406030204" pitchFamily="18" charset="0"/>
+                        <a:ea typeface="Cambria Math" panose="02040503050406030204" pitchFamily="18" charset="0"/>
+                      </a:rPr>
+                      <m:t>¬</m:t>
+                    </m:r>
+                    <m:r>
+                      <a:rPr lang="en-US" b="0" i="1" smtClean="0">
+                        <a:latin typeface="Cambria Math" panose="02040503050406030204" pitchFamily="18" charset="0"/>
+                        <a:ea typeface="Cambria Math" panose="02040503050406030204" pitchFamily="18" charset="0"/>
+                      </a:rPr>
+                      <m:t>𝑃𝑖𝑡</m:t>
+                    </m:r>
+                    <m:r>
+                      <a:rPr lang="en-US" b="0" i="1" smtClean="0">
+                        <a:latin typeface="Cambria Math" panose="02040503050406030204" pitchFamily="18" charset="0"/>
+                        <a:ea typeface="Cambria Math" panose="02040503050406030204" pitchFamily="18" charset="0"/>
+                      </a:rPr>
+                      <m:t>(2,1)</m:t>
+                    </m:r>
+                  </m:oMath>
+                </a14:m>
+                <a:r>
+                  <a:rPr lang="en-US" i="1" dirty="0">
+                    <a:latin typeface="Cambria Math" panose="02040503050406030204" pitchFamily="18" charset="0"/>
+                    <a:ea typeface="Cambria Math" panose="02040503050406030204" pitchFamily="18" charset="0"/>
+                  </a:rPr>
+                  <a:t>, </a:t>
+                </a:r>
+                <a14:m>
+                  <m:oMath xmlns:m="http://schemas.openxmlformats.org/officeDocument/2006/math">
+                    <m:r>
+                      <a:rPr lang="en-US" i="1" smtClean="0">
+                        <a:latin typeface="Cambria Math" panose="02040503050406030204" pitchFamily="18" charset="0"/>
+                        <a:ea typeface="Cambria Math" panose="02040503050406030204" pitchFamily="18" charset="0"/>
+                      </a:rPr>
+                      <m:t>¬</m:t>
+                    </m:r>
+                    <m:r>
+                      <a:rPr lang="en-US" b="0" i="1" smtClean="0">
+                        <a:latin typeface="Cambria Math" panose="02040503050406030204" pitchFamily="18" charset="0"/>
+                        <a:ea typeface="Cambria Math" panose="02040503050406030204" pitchFamily="18" charset="0"/>
+                      </a:rPr>
+                      <m:t>𝑊</m:t>
+                    </m:r>
+                    <m:r>
+                      <a:rPr lang="en-US" b="0" i="1" smtClean="0">
+                        <a:latin typeface="Cambria Math" panose="02040503050406030204" pitchFamily="18" charset="0"/>
+                        <a:ea typeface="Cambria Math" panose="02040503050406030204" pitchFamily="18" charset="0"/>
+                      </a:rPr>
+                      <m:t>(1,2)</m:t>
+                    </m:r>
+                  </m:oMath>
+                </a14:m>
+                <a:r>
+                  <a:rPr lang="en-US" i="1" dirty="0">
+                    <a:latin typeface="Cambria Math" panose="02040503050406030204" pitchFamily="18" charset="0"/>
+                    <a:ea typeface="Cambria Math" panose="02040503050406030204" pitchFamily="18" charset="0"/>
+                  </a:rPr>
+                  <a:t>, </a:t>
+                </a:r>
+                <a14:m>
+                  <m:oMath xmlns:m="http://schemas.openxmlformats.org/officeDocument/2006/math">
+                    <m:r>
+                      <a:rPr lang="en-US" i="1" smtClean="0">
+                        <a:latin typeface="Cambria Math" panose="02040503050406030204" pitchFamily="18" charset="0"/>
+                        <a:ea typeface="Cambria Math" panose="02040503050406030204" pitchFamily="18" charset="0"/>
+                      </a:rPr>
+                      <m:t>¬</m:t>
+                    </m:r>
+                    <m:r>
+                      <a:rPr lang="en-US" b="0" i="1" smtClean="0">
+                        <a:latin typeface="Cambria Math" panose="02040503050406030204" pitchFamily="18" charset="0"/>
+                        <a:ea typeface="Cambria Math" panose="02040503050406030204" pitchFamily="18" charset="0"/>
+                      </a:rPr>
+                      <m:t>𝑊</m:t>
+                    </m:r>
+                    <m:d>
+                      <m:dPr>
+                        <m:ctrlPr>
+                          <a:rPr lang="en-US" b="0" i="1" smtClean="0">
+                            <a:latin typeface="Cambria Math" panose="02040503050406030204" pitchFamily="18" charset="0"/>
+                            <a:ea typeface="Cambria Math" panose="02040503050406030204" pitchFamily="18" charset="0"/>
+                          </a:rPr>
+                        </m:ctrlPr>
+                      </m:dPr>
+                      <m:e>
+                        <m:r>
+                          <a:rPr lang="en-US" b="0" i="1" smtClean="0">
+                            <a:latin typeface="Cambria Math" panose="02040503050406030204" pitchFamily="18" charset="0"/>
+                            <a:ea typeface="Cambria Math" panose="02040503050406030204" pitchFamily="18" charset="0"/>
+                          </a:rPr>
+                          <m:t>2,1</m:t>
+                        </m:r>
+                      </m:e>
+                    </m:d>
+                  </m:oMath>
+                </a14:m>
+                <a:endParaRPr lang="en-US" i="1" dirty="0">
+                  <a:latin typeface="Cambria Math" panose="02040503050406030204" pitchFamily="18" charset="0"/>
+                  <a:ea typeface="Cambria Math" panose="02040503050406030204" pitchFamily="18" charset="0"/>
+                </a:endParaRPr>
+              </a:p>
+              <a:p>
+                <a:pPr marL="0" indent="0">
+                  <a:buNone/>
+                </a:pPr>
+                <a:r>
+                  <a:rPr lang="en-US" dirty="0">
+                    <a:latin typeface="Cambria Math" panose="02040503050406030204" pitchFamily="18" charset="0"/>
+                    <a:ea typeface="Cambria Math" panose="02040503050406030204" pitchFamily="18" charset="0"/>
+                  </a:rPr>
+                  <a:t>This means that (1,2) and (2,1) are safe.</a:t>
+                </a:r>
+              </a:p>
+              <a:p>
+                <a:pPr marL="0" indent="0">
+                  <a:buNone/>
+                </a:pPr>
+                <a:endParaRPr lang="en-US" i="1" dirty="0">
+                  <a:latin typeface="Cambria Math" panose="02040503050406030204" pitchFamily="18" charset="0"/>
+                  <a:ea typeface="Cambria Math" panose="02040503050406030204" pitchFamily="18" charset="0"/>
+                </a:endParaRPr>
+              </a:p>
+              <a:p>
+                <a:pPr marL="0" indent="0">
+                  <a:buNone/>
+                </a:pPr>
+                <a:endParaRPr lang="en-US" i="1" dirty="0">
+                  <a:latin typeface="Cambria Math" panose="02040503050406030204" pitchFamily="18" charset="0"/>
+                  <a:ea typeface="Cambria Math" panose="02040503050406030204" pitchFamily="18" charset="0"/>
+                </a:endParaRPr>
+              </a:p>
+              <a:p>
+                <a:pPr marL="0" indent="0">
+                  <a:buNone/>
+                </a:pPr>
+                <a:endParaRPr lang="en-US" i="1" dirty="0">
+                  <a:latin typeface="Cambria Math" panose="02040503050406030204" pitchFamily="18" charset="0"/>
+                  <a:ea typeface="Cambria Math" panose="02040503050406030204" pitchFamily="18" charset="0"/>
+                </a:endParaRPr>
+              </a:p>
+              <a:p>
+                <a:pPr marL="0" indent="0">
+                  <a:buNone/>
+                </a:pPr>
+                <a:endParaRPr lang="en-US" dirty="0"/>
+              </a:p>
+              <a:p>
+                <a:pPr marL="0" indent="0">
+                  <a:buNone/>
+                </a:pPr>
+                <a:endParaRPr lang="en-US" dirty="0"/>
+              </a:p>
+              <a:p>
+                <a:pPr marL="0" indent="0">
+                  <a:buNone/>
+                </a:pPr>
+                <a:endParaRPr lang="en-US" dirty="0"/>
+              </a:p>
+            </p:txBody>
+          </p:sp>
+        </mc:Choice>
+        <mc:Fallback xmlns="">
+          <p:sp>
+            <p:nvSpPr>
+              <p:cNvPr id="3" name="Content Placeholder 2">
+                <a:extLst>
+                  <a:ext uri="{FF2B5EF4-FFF2-40B4-BE49-F238E27FC236}">
+                    <a16:creationId xmlns:a16="http://schemas.microsoft.com/office/drawing/2014/main" id="{C857998B-2C70-4155-B400-75A197557126}"/>
+                  </a:ext>
+                </a:extLst>
+              </p:cNvPr>
+              <p:cNvSpPr>
+                <a:spLocks noGrp="1" noRot="1" noChangeAspect="1" noMove="1" noResize="1" noEditPoints="1" noAdjustHandles="1" noChangeArrowheads="1" noChangeShapeType="1" noTextEdit="1"/>
+              </p:cNvSpPr>
+              <p:nvPr>
+                <p:ph idx="1"/>
+              </p:nvPr>
+            </p:nvSpPr>
+            <p:spPr>
+              <a:xfrm>
+                <a:off x="628650" y="1447800"/>
+                <a:ext cx="5467350" cy="4729163"/>
+              </a:xfrm>
+              <a:blipFill>
+                <a:blip r:embed="rId2"/>
+                <a:stretch>
+                  <a:fillRect l="-1338" t="-1548"/>
+                </a:stretch>
+              </a:blipFill>
+            </p:spPr>
+            <p:txBody>
+              <a:bodyPr/>
+              <a:lstStyle/>
+              <a:p>
+                <a:r>
+                  <a:rPr lang="en-US">
+                    <a:noFill/>
+                  </a:rPr>
+                  <a:t> </a:t>
+                </a:r>
+              </a:p>
+            </p:txBody>
+          </p:sp>
+        </mc:Fallback>
+      </mc:AlternateContent>
+      <p:sp>
+        <p:nvSpPr>
+          <p:cNvPr id="4" name="Right Brace 3">
+            <a:extLst>
+              <a:ext uri="{FF2B5EF4-FFF2-40B4-BE49-F238E27FC236}">
+                <a16:creationId xmlns:a16="http://schemas.microsoft.com/office/drawing/2014/main" id="{D454507F-F69E-E92C-6546-001A90DE165C}"/>
+              </a:ext>
+              <a:ext uri="{C183D7F6-B498-43B3-948B-1728B52AA6E4}">
+                <adec:decorative xmlns:adec="http://schemas.microsoft.com/office/drawing/2017/decorative" val="1"/>
+              </a:ext>
+            </a:extLst>
+          </p:cNvPr>
+          <p:cNvSpPr/>
+          <p:nvPr/>
+        </p:nvSpPr>
+        <p:spPr>
+          <a:xfrm>
+            <a:off x="6172200" y="1676400"/>
+            <a:ext cx="304800" cy="1447800"/>
+          </a:xfrm>
+          <a:prstGeom prst="rightBrace">
+            <a:avLst/>
+          </a:prstGeom>
+        </p:spPr>
+        <p:style>
+          <a:lnRef idx="1">
+            <a:schemeClr val="accent1"/>
+          </a:lnRef>
+          <a:fillRef idx="0">
+            <a:schemeClr val="accent1"/>
+          </a:fillRef>
+          <a:effectRef idx="0">
+            <a:schemeClr val="accent1"/>
+          </a:effectRef>
+          <a:fontRef idx="minor">
+            <a:schemeClr val="tx1"/>
+          </a:fontRef>
+        </p:style>
+        <p:txBody>
+          <a:bodyPr rtlCol="0" anchor="ctr"/>
+          <a:lstStyle/>
+          <a:p>
+            <a:pPr algn="ctr"/>
+            <a:endParaRPr lang="en-US"/>
+          </a:p>
+        </p:txBody>
+      </p:sp>
+      <p:sp>
+        <p:nvSpPr>
+          <p:cNvPr id="6" name="TextBox 5">
+            <a:extLst>
+              <a:ext uri="{FF2B5EF4-FFF2-40B4-BE49-F238E27FC236}">
+                <a16:creationId xmlns:a16="http://schemas.microsoft.com/office/drawing/2014/main" id="{6A1F8CC8-26FA-F614-67DA-273A6D5C931B}"/>
+              </a:ext>
+            </a:extLst>
+          </p:cNvPr>
+          <p:cNvSpPr txBox="1"/>
+          <p:nvPr/>
+        </p:nvSpPr>
+        <p:spPr>
+          <a:xfrm>
+            <a:off x="6628765" y="1555682"/>
+            <a:ext cx="2064173" cy="1754326"/>
+          </a:xfrm>
+          <a:prstGeom prst="rect">
+            <a:avLst/>
+          </a:prstGeom>
+        </p:spPr>
+        <p:style>
+          <a:lnRef idx="3">
+            <a:schemeClr val="lt1"/>
+          </a:lnRef>
+          <a:fillRef idx="1">
+            <a:schemeClr val="accent6"/>
+          </a:fillRef>
+          <a:effectRef idx="1">
+            <a:schemeClr val="accent6"/>
+          </a:effectRef>
+          <a:fontRef idx="minor">
+            <a:schemeClr val="lt1"/>
+          </a:fontRef>
+        </p:style>
+        <p:txBody>
+          <a:bodyPr wrap="square" rtlCol="0">
+            <a:spAutoFit/>
+          </a:bodyPr>
+          <a:lstStyle/>
+          <a:p>
+            <a:r>
+              <a:rPr lang="en-US" dirty="0"/>
+              <a:t>We have to enumerate all possible scenarios in propositional logic! First-order logic can help.</a:t>
+            </a:r>
+          </a:p>
+        </p:txBody>
+      </p:sp>
+    </p:spTree>
+    <p:extLst>
+      <p:ext uri="{BB962C8B-B14F-4D97-AF65-F5344CB8AC3E}">
+        <p14:creationId xmlns:p14="http://schemas.microsoft.com/office/powerpoint/2010/main" val="2010285182"/>
+      </p:ext>
+    </p:extLst>
+  </p:cSld>
+  <p:clrMapOvr>
+    <a:masterClrMapping/>
+  </p:clrMapOvr>
+</p:sld>
+</file>
+
+<file path=ppt/slides/slide42.xml><?xml version="1.0" encoding="utf-8"?>
+<p:sld xmlns:a="http://schemas.openxmlformats.org/drawingml/2006/main" xmlns:r="http://schemas.openxmlformats.org/officeDocument/2006/relationships" xmlns:p="http://schemas.openxmlformats.org/presentationml/2006/main">
+  <p:cSld>
+    <p:spTree>
+      <p:nvGrpSpPr>
+        <p:cNvPr id="1" name=""/>
+        <p:cNvGrpSpPr/>
+        <p:nvPr/>
+      </p:nvGrpSpPr>
+      <p:grpSpPr>
+        <a:xfrm>
+          <a:off x="0" y="0"/>
+          <a:ext cx="0" cy="0"/>
+          <a:chOff x="0" y="0"/>
+          <a:chExt cx="0" cy="0"/>
+        </a:xfrm>
+      </p:grpSpPr>
+      <p:sp>
+        <p:nvSpPr>
           <p:cNvPr id="77826" name="Rectangle 2"/>
           <p:cNvSpPr>
             <a:spLocks noGrp="1" noChangeArrowheads="1"/>
@@ -42549,7 +42850,7 @@
 </p:sld>
 </file>
 
-<file path=ppt/slides/slide41.xml><?xml version="1.0" encoding="utf-8"?>
+<file path=ppt/slides/slide43.xml><?xml version="1.0" encoding="utf-8"?>
 <p:sld xmlns:a="http://schemas.openxmlformats.org/drawingml/2006/main" xmlns:r="http://schemas.openxmlformats.org/officeDocument/2006/relationships" xmlns:p="http://schemas.openxmlformats.org/presentationml/2006/main">
   <p:cSld>
     <p:spTree>
@@ -43027,7 +43328,7 @@
 </p:sld>
 </file>
 
-<file path=ppt/slides/slide42.xml><?xml version="1.0" encoding="utf-8"?>
+<file path=ppt/slides/slide44.xml><?xml version="1.0" encoding="utf-8"?>
 <p:sld xmlns:a="http://schemas.openxmlformats.org/drawingml/2006/main" xmlns:r="http://schemas.openxmlformats.org/officeDocument/2006/relationships" xmlns:p="http://schemas.openxmlformats.org/presentationml/2006/main">
   <p:cSld>
     <p:spTree>
@@ -43224,7 +43525,7 @@
 </p:sld>
 </file>
 
-<file path=ppt/slides/slide43.xml><?xml version="1.0" encoding="utf-8"?>
+<file path=ppt/slides/slide45.xml><?xml version="1.0" encoding="utf-8"?>
 <p:sld xmlns:a="http://schemas.openxmlformats.org/drawingml/2006/main" xmlns:r="http://schemas.openxmlformats.org/officeDocument/2006/relationships" xmlns:p="http://schemas.openxmlformats.org/presentationml/2006/main">
   <p:cSld>
     <p:spTree>
@@ -43631,7 +43932,7 @@
 </p:sld>
 </file>
 
-<file path=ppt/slides/slide44.xml><?xml version="1.0" encoding="utf-8"?>
+<file path=ppt/slides/slide46.xml><?xml version="1.0" encoding="utf-8"?>
 <p:sld xmlns:a="http://schemas.openxmlformats.org/drawingml/2006/main" xmlns:r="http://schemas.openxmlformats.org/officeDocument/2006/relationships" xmlns:p="http://schemas.openxmlformats.org/presentationml/2006/main">
   <p:cSld>
     <p:spTree>
@@ -44316,7 +44617,7 @@
 </p:sld>
 </file>
 
-<file path=ppt/slides/slide45.xml><?xml version="1.0" encoding="utf-8"?>
+<file path=ppt/slides/slide47.xml><?xml version="1.0" encoding="utf-8"?>
 <p:sld xmlns:a="http://schemas.openxmlformats.org/drawingml/2006/main" xmlns:r="http://schemas.openxmlformats.org/officeDocument/2006/relationships" xmlns:p="http://schemas.openxmlformats.org/presentationml/2006/main">
   <p:cSld>
     <p:spTree>
@@ -45021,7 +45322,7 @@
 </p:sld>
 </file>
 
-<file path=ppt/slides/slide46.xml><?xml version="1.0" encoding="utf-8"?>
+<file path=ppt/slides/slide48.xml><?xml version="1.0" encoding="utf-8"?>
 <p:sld xmlns:a="http://schemas.openxmlformats.org/drawingml/2006/main" xmlns:r="http://schemas.openxmlformats.org/officeDocument/2006/relationships" xmlns:p="http://schemas.openxmlformats.org/presentationml/2006/main">
   <p:cSld>
     <p:spTree>
@@ -46100,7 +46401,7 @@
 </p:sld>
 </file>
 
-<file path=ppt/slides/slide47.xml><?xml version="1.0" encoding="utf-8"?>
+<file path=ppt/slides/slide49.xml><?xml version="1.0" encoding="utf-8"?>
 <p:sld xmlns:a="http://schemas.openxmlformats.org/drawingml/2006/main" xmlns:r="http://schemas.openxmlformats.org/officeDocument/2006/relationships" xmlns:p="http://schemas.openxmlformats.org/presentationml/2006/main">
   <p:cSld>
     <p:spTree>
@@ -46388,1058 +46689,6 @@
             <a:r>
               <a:rPr lang="en-US" sz="2400" b="1" dirty="0"/>
               <a:t>)]</a:t>
-            </a:r>
-          </a:p>
-        </p:txBody>
-      </p:sp>
-    </p:spTree>
-  </p:cSld>
-  <p:clrMapOvr>
-    <a:masterClrMapping/>
-  </p:clrMapOvr>
-</p:sld>
-</file>
-
-<file path=ppt/slides/slide48.xml><?xml version="1.0" encoding="utf-8"?>
-<p:sld xmlns:a="http://schemas.openxmlformats.org/drawingml/2006/main" xmlns:r="http://schemas.openxmlformats.org/officeDocument/2006/relationships" xmlns:p="http://schemas.openxmlformats.org/presentationml/2006/main">
-  <p:cSld>
-    <p:spTree>
-      <p:nvGrpSpPr>
-        <p:cNvPr id="1" name=""/>
-        <p:cNvGrpSpPr/>
-        <p:nvPr/>
-      </p:nvGrpSpPr>
-      <p:grpSpPr>
-        <a:xfrm>
-          <a:off x="0" y="0"/>
-          <a:ext cx="0" cy="0"/>
-          <a:chOff x="0" y="0"/>
-          <a:chExt cx="0" cy="0"/>
-        </a:xfrm>
-      </p:grpSpPr>
-      <p:sp>
-        <p:nvSpPr>
-          <p:cNvPr id="18434" name="Rectangle 2"/>
-          <p:cNvSpPr>
-            <a:spLocks noGrp="1" noChangeArrowheads="1"/>
-          </p:cNvSpPr>
-          <p:nvPr>
-            <p:ph type="title"/>
-          </p:nvPr>
-        </p:nvSpPr>
-        <p:spPr/>
-        <p:txBody>
-          <a:bodyPr/>
-          <a:lstStyle/>
-          <a:p>
-            <a:r>
-              <a:rPr lang="en-US" dirty="0"/>
-              <a:t>Example: The Kinship Domain</a:t>
-            </a:r>
-          </a:p>
-        </p:txBody>
-      </p:sp>
-      <p:sp>
-        <p:nvSpPr>
-          <p:cNvPr id="18435" name="Rectangle 3"/>
-          <p:cNvSpPr>
-            <a:spLocks noGrp="1" noChangeArrowheads="1"/>
-          </p:cNvSpPr>
-          <p:nvPr>
-            <p:ph idx="1"/>
-          </p:nvPr>
-        </p:nvSpPr>
-        <p:spPr/>
-        <p:txBody>
-          <a:bodyPr/>
-          <a:lstStyle/>
-          <a:p>
-            <a:r>
-              <a:rPr lang="en-US" sz="2800" dirty="0"/>
-              <a:t>Brothers are siblings</a:t>
-            </a:r>
-          </a:p>
-          <a:p>
-            <a:pPr lvl="1">
-              <a:buFontTx/>
-              <a:buNone/>
-            </a:pPr>
-            <a:r>
-              <a:rPr lang="en-US" sz="2400" b="1" dirty="0">
-                <a:sym typeface="Symbol" pitchFamily="18" charset="2"/>
-              </a:rPr>
-              <a:t></a:t>
-            </a:r>
-            <a:r>
-              <a:rPr lang="en-US" sz="2400" b="1" dirty="0" err="1"/>
-              <a:t>x,y</a:t>
-            </a:r>
-            <a:r>
-              <a:rPr lang="en-US" sz="2400" b="1" dirty="0"/>
-              <a:t> Brother(</a:t>
-            </a:r>
-            <a:r>
-              <a:rPr lang="en-US" sz="2400" b="1" dirty="0" err="1"/>
-              <a:t>x,y</a:t>
-            </a:r>
-            <a:r>
-              <a:rPr lang="en-US" sz="2400" b="1" dirty="0"/>
-              <a:t>) </a:t>
-            </a:r>
-            <a:r>
-              <a:rPr lang="en-US" sz="2400" b="1" dirty="0">
-                <a:sym typeface="Symbol" pitchFamily="18" charset="2"/>
-              </a:rPr>
-              <a:t></a:t>
-            </a:r>
-            <a:r>
-              <a:rPr lang="en-US" sz="2400" b="1" dirty="0"/>
-              <a:t> Sibling(</a:t>
-            </a:r>
-            <a:r>
-              <a:rPr lang="en-US" sz="2400" b="1" dirty="0" err="1"/>
-              <a:t>x,y</a:t>
-            </a:r>
-            <a:r>
-              <a:rPr lang="en-US" sz="2400" b="1" dirty="0"/>
-              <a:t>)</a:t>
-            </a:r>
-          </a:p>
-          <a:p>
-            <a:r>
-              <a:rPr lang="en-US" sz="2800" dirty="0"/>
-              <a:t>“Sibling” is symmetric</a:t>
-            </a:r>
-          </a:p>
-          <a:p>
-            <a:pPr lvl="1">
-              <a:buFontTx/>
-              <a:buNone/>
-            </a:pPr>
-            <a:r>
-              <a:rPr lang="en-US" sz="2400" b="1" dirty="0">
-                <a:sym typeface="Symbol" pitchFamily="18" charset="2"/>
-              </a:rPr>
-              <a:t></a:t>
-            </a:r>
-            <a:r>
-              <a:rPr lang="en-US" sz="2400" b="1" dirty="0" err="1"/>
-              <a:t>x,y</a:t>
-            </a:r>
-            <a:r>
-              <a:rPr lang="en-US" sz="2400" b="1" dirty="0"/>
-              <a:t> Sibling(</a:t>
-            </a:r>
-            <a:r>
-              <a:rPr lang="en-US" sz="2400" b="1" dirty="0" err="1"/>
-              <a:t>x,y</a:t>
-            </a:r>
-            <a:r>
-              <a:rPr lang="en-US" sz="2400" b="1" dirty="0"/>
-              <a:t>) </a:t>
-            </a:r>
-            <a:r>
-              <a:rPr lang="en-US" sz="2400" b="1" dirty="0">
-                <a:sym typeface="Symbol" pitchFamily="18" charset="2"/>
-              </a:rPr>
-              <a:t> </a:t>
-            </a:r>
-            <a:r>
-              <a:rPr lang="en-US" sz="2400" b="1" dirty="0"/>
-              <a:t>Sibling(</a:t>
-            </a:r>
-            <a:r>
-              <a:rPr lang="en-US" sz="2400" b="1" dirty="0" err="1"/>
-              <a:t>y,x</a:t>
-            </a:r>
-            <a:r>
-              <a:rPr lang="en-US" sz="2400" b="1" dirty="0"/>
-              <a:t>)</a:t>
-            </a:r>
-          </a:p>
-          <a:p>
-            <a:r>
-              <a:rPr lang="en-US" sz="2800" dirty="0"/>
-              <a:t>One's mother is one's female parent</a:t>
-            </a:r>
-          </a:p>
-          <a:p>
-            <a:pPr lvl="1">
-              <a:buFontTx/>
-              <a:buNone/>
-            </a:pPr>
-            <a:r>
-              <a:rPr lang="en-US" sz="2400" b="1" dirty="0">
-                <a:sym typeface="Symbol" pitchFamily="18" charset="2"/>
-              </a:rPr>
-              <a:t></a:t>
-            </a:r>
-            <a:r>
-              <a:rPr lang="en-US" sz="2400" b="1" dirty="0" err="1"/>
-              <a:t>m,c</a:t>
-            </a:r>
-            <a:r>
-              <a:rPr lang="en-US" sz="2400" b="1" dirty="0"/>
-              <a:t> (Mother(c) = m) </a:t>
-            </a:r>
-            <a:r>
-              <a:rPr lang="en-US" sz="2400" b="1" dirty="0">
-                <a:sym typeface="Symbol" pitchFamily="18" charset="2"/>
-              </a:rPr>
-              <a:t></a:t>
-            </a:r>
-            <a:r>
-              <a:rPr lang="en-US" sz="2400" b="1" dirty="0"/>
-              <a:t> (Female(m) </a:t>
-            </a:r>
-            <a:r>
-              <a:rPr lang="en-US" sz="2400" b="1" dirty="0">
-                <a:sym typeface="Symbol" pitchFamily="18" charset="2"/>
-              </a:rPr>
-              <a:t> </a:t>
-            </a:r>
-            <a:r>
-              <a:rPr lang="en-US" sz="2400" b="1" dirty="0"/>
-              <a:t>Parent(</a:t>
-            </a:r>
-            <a:r>
-              <a:rPr lang="en-US" sz="2400" b="1" dirty="0" err="1"/>
-              <a:t>m,c</a:t>
-            </a:r>
-            <a:r>
-              <a:rPr lang="en-US" sz="2400" b="1" dirty="0"/>
-              <a:t>))</a:t>
-            </a:r>
-          </a:p>
-        </p:txBody>
-      </p:sp>
-    </p:spTree>
-  </p:cSld>
-  <p:clrMapOvr>
-    <a:masterClrMapping/>
-  </p:clrMapOvr>
-</p:sld>
-</file>
-
-<file path=ppt/slides/slide49.xml><?xml version="1.0" encoding="utf-8"?>
-<p:sld xmlns:a="http://schemas.openxmlformats.org/drawingml/2006/main" xmlns:r="http://schemas.openxmlformats.org/officeDocument/2006/relationships" xmlns:p="http://schemas.openxmlformats.org/presentationml/2006/main">
-  <p:cSld>
-    <p:spTree>
-      <p:nvGrpSpPr>
-        <p:cNvPr id="1" name=""/>
-        <p:cNvGrpSpPr/>
-        <p:nvPr/>
-      </p:nvGrpSpPr>
-      <p:grpSpPr>
-        <a:xfrm>
-          <a:off x="0" y="0"/>
-          <a:ext cx="0" cy="0"/>
-          <a:chOff x="0" y="0"/>
-          <a:chExt cx="0" cy="0"/>
-        </a:xfrm>
-      </p:grpSpPr>
-      <p:sp>
-        <p:nvSpPr>
-          <p:cNvPr id="19458" name="Rectangle 2"/>
-          <p:cNvSpPr>
-            <a:spLocks noGrp="1" noChangeArrowheads="1"/>
-          </p:cNvSpPr>
-          <p:nvPr>
-            <p:ph type="title"/>
-          </p:nvPr>
-        </p:nvSpPr>
-        <p:spPr/>
-        <p:txBody>
-          <a:bodyPr/>
-          <a:lstStyle/>
-          <a:p>
-            <a:r>
-              <a:rPr lang="en-US" dirty="0"/>
-              <a:t>Example: The Set Domain</a:t>
-            </a:r>
-          </a:p>
-        </p:txBody>
-      </p:sp>
-      <p:sp>
-        <p:nvSpPr>
-          <p:cNvPr id="19459" name="Rectangle 3"/>
-          <p:cNvSpPr>
-            <a:spLocks noGrp="1" noChangeArrowheads="1"/>
-          </p:cNvSpPr>
-          <p:nvPr>
-            <p:ph idx="1"/>
-          </p:nvPr>
-        </p:nvSpPr>
-        <p:spPr/>
-        <p:txBody>
-          <a:bodyPr/>
-          <a:lstStyle/>
-          <a:p>
-            <a:pPr>
-              <a:lnSpc>
-                <a:spcPct val="90000"/>
-              </a:lnSpc>
-            </a:pPr>
-            <a:r>
-              <a:rPr lang="en-US" sz="2400" b="1" dirty="0">
-                <a:sym typeface="Symbol" pitchFamily="18" charset="2"/>
-              </a:rPr>
-              <a:t></a:t>
-            </a:r>
-            <a:r>
-              <a:rPr lang="en-US" sz="2400" b="1" dirty="0"/>
-              <a:t>s Set(s) </a:t>
-            </a:r>
-            <a:r>
-              <a:rPr lang="en-US" sz="2400" b="1" dirty="0">
-                <a:sym typeface="Symbol" pitchFamily="18" charset="2"/>
-              </a:rPr>
-              <a:t></a:t>
-            </a:r>
-            <a:r>
-              <a:rPr lang="en-US" sz="2400" b="1" dirty="0"/>
-              <a:t> (s = {}) </a:t>
-            </a:r>
-            <a:r>
-              <a:rPr lang="en-US" sz="2400" b="1" dirty="0">
-                <a:sym typeface="Symbol" pitchFamily="18" charset="2"/>
-              </a:rPr>
-              <a:t></a:t>
-            </a:r>
-            <a:r>
-              <a:rPr lang="en-US" sz="2400" b="1" dirty="0"/>
-              <a:t> (</a:t>
-            </a:r>
-            <a:r>
-              <a:rPr lang="en-US" sz="2400" b="1" dirty="0">
-                <a:sym typeface="Symbol" pitchFamily="18" charset="2"/>
-              </a:rPr>
-              <a:t></a:t>
-            </a:r>
-            <a:r>
-              <a:rPr lang="en-US" sz="2400" b="1" dirty="0"/>
-              <a:t>x,s</a:t>
-            </a:r>
-            <a:r>
-              <a:rPr lang="en-US" sz="2400" b="1" baseline="-25000" dirty="0"/>
-              <a:t>2</a:t>
-            </a:r>
-            <a:r>
-              <a:rPr lang="en-US" sz="2400" b="1" dirty="0"/>
-              <a:t> Set(s</a:t>
-            </a:r>
-            <a:r>
-              <a:rPr lang="en-US" sz="2400" b="1" baseline="-25000" dirty="0"/>
-              <a:t>2</a:t>
-            </a:r>
-            <a:r>
-              <a:rPr lang="en-US" sz="2400" b="1" dirty="0"/>
-              <a:t>) </a:t>
-            </a:r>
-            <a:r>
-              <a:rPr lang="en-US" sz="2400" b="1" dirty="0">
-                <a:sym typeface="Symbol" pitchFamily="18" charset="2"/>
-              </a:rPr>
-              <a:t></a:t>
-            </a:r>
-            <a:r>
-              <a:rPr lang="en-US" sz="2400" b="1" dirty="0"/>
-              <a:t> s = {x|s</a:t>
-            </a:r>
-            <a:r>
-              <a:rPr lang="en-US" sz="2400" b="1" baseline="-25000" dirty="0"/>
-              <a:t>2</a:t>
-            </a:r>
-            <a:r>
-              <a:rPr lang="en-US" sz="2400" b="1" dirty="0"/>
-              <a:t>})</a:t>
-            </a:r>
-          </a:p>
-          <a:p>
-            <a:pPr>
-              <a:lnSpc>
-                <a:spcPct val="90000"/>
-              </a:lnSpc>
-            </a:pPr>
-            <a:r>
-              <a:rPr lang="en-US" sz="2400" b="1" dirty="0">
-                <a:sym typeface="Symbol" pitchFamily="18" charset="2"/>
-              </a:rPr>
-              <a:t></a:t>
-            </a:r>
-            <a:r>
-              <a:rPr lang="en-US" sz="2400" b="1" dirty="0" err="1"/>
-              <a:t>x,s</a:t>
-            </a:r>
-            <a:r>
-              <a:rPr lang="en-US" sz="2400" b="1" dirty="0"/>
-              <a:t> {</a:t>
-            </a:r>
-            <a:r>
-              <a:rPr lang="en-US" sz="2400" b="1" dirty="0" err="1"/>
-              <a:t>x|s</a:t>
-            </a:r>
-            <a:r>
-              <a:rPr lang="en-US" sz="2400" b="1" dirty="0"/>
-              <a:t>} = {}</a:t>
-            </a:r>
-          </a:p>
-          <a:p>
-            <a:pPr>
-              <a:lnSpc>
-                <a:spcPct val="90000"/>
-              </a:lnSpc>
-            </a:pPr>
-            <a:r>
-              <a:rPr lang="en-US" sz="2400" b="1" dirty="0">
-                <a:sym typeface="Symbol" pitchFamily="18" charset="2"/>
-              </a:rPr>
-              <a:t></a:t>
-            </a:r>
-            <a:r>
-              <a:rPr lang="en-US" sz="2400" b="1" dirty="0" err="1"/>
-              <a:t>x,s</a:t>
-            </a:r>
-            <a:r>
-              <a:rPr lang="en-US" sz="2400" b="1" dirty="0"/>
-              <a:t> x </a:t>
-            </a:r>
-            <a:r>
-              <a:rPr lang="en-US" sz="2400" b="1" dirty="0">
-                <a:sym typeface="Symbol" pitchFamily="18" charset="2"/>
-              </a:rPr>
-              <a:t></a:t>
-            </a:r>
-            <a:r>
-              <a:rPr lang="en-US" sz="2400" b="1" dirty="0"/>
-              <a:t> s </a:t>
-            </a:r>
-            <a:r>
-              <a:rPr lang="en-US" sz="2400" b="1" dirty="0">
-                <a:sym typeface="Symbol" pitchFamily="18" charset="2"/>
-              </a:rPr>
-              <a:t></a:t>
-            </a:r>
-            <a:r>
-              <a:rPr lang="en-US" sz="2400" b="1" dirty="0"/>
-              <a:t> s = {</a:t>
-            </a:r>
-            <a:r>
-              <a:rPr lang="en-US" sz="2400" b="1" dirty="0" err="1"/>
-              <a:t>x|s</a:t>
-            </a:r>
-            <a:r>
-              <a:rPr lang="en-US" sz="2400" b="1" dirty="0"/>
-              <a:t>}</a:t>
-            </a:r>
-          </a:p>
-          <a:p>
-            <a:pPr>
-              <a:lnSpc>
-                <a:spcPct val="90000"/>
-              </a:lnSpc>
-            </a:pPr>
-            <a:r>
-              <a:rPr lang="en-US" sz="2400" b="1" dirty="0">
-                <a:sym typeface="Symbol" pitchFamily="18" charset="2"/>
-              </a:rPr>
-              <a:t></a:t>
-            </a:r>
-            <a:r>
-              <a:rPr lang="en-US" sz="2400" b="1" dirty="0" err="1"/>
-              <a:t>x,s</a:t>
-            </a:r>
-            <a:r>
-              <a:rPr lang="en-US" sz="2400" b="1" dirty="0"/>
-              <a:t> x </a:t>
-            </a:r>
-            <a:r>
-              <a:rPr lang="en-US" sz="2400" b="1" dirty="0">
-                <a:sym typeface="Symbol" pitchFamily="18" charset="2"/>
-              </a:rPr>
-              <a:t></a:t>
-            </a:r>
-            <a:r>
-              <a:rPr lang="en-US" sz="2400" b="1" dirty="0"/>
-              <a:t> s </a:t>
-            </a:r>
-            <a:r>
-              <a:rPr lang="en-US" sz="2400" b="1" dirty="0">
-                <a:sym typeface="Symbol" pitchFamily="18" charset="2"/>
-              </a:rPr>
-              <a:t></a:t>
-            </a:r>
-            <a:r>
-              <a:rPr lang="en-US" sz="2400" b="1" dirty="0"/>
-              <a:t> [ </a:t>
-            </a:r>
-            <a:r>
-              <a:rPr lang="en-US" sz="2400" b="1" dirty="0">
-                <a:sym typeface="Symbol" pitchFamily="18" charset="2"/>
-              </a:rPr>
-              <a:t></a:t>
-            </a:r>
-            <a:r>
-              <a:rPr lang="en-US" sz="2400" b="1" dirty="0"/>
-              <a:t>y,s</a:t>
-            </a:r>
-            <a:r>
-              <a:rPr lang="en-US" sz="2400" b="1" baseline="-25000" dirty="0"/>
-              <a:t>2</a:t>
-            </a:r>
-            <a:r>
-              <a:rPr lang="en-US" sz="2400" b="1" dirty="0"/>
-              <a:t> (s = {y|s</a:t>
-            </a:r>
-            <a:r>
-              <a:rPr lang="en-US" sz="2400" b="1" baseline="-25000" dirty="0"/>
-              <a:t>2</a:t>
-            </a:r>
-            <a:r>
-              <a:rPr lang="en-US" sz="2400" b="1" dirty="0"/>
-              <a:t>} </a:t>
-            </a:r>
-            <a:r>
-              <a:rPr lang="en-US" sz="2400" b="1" dirty="0">
-                <a:sym typeface="Symbol" pitchFamily="18" charset="2"/>
-              </a:rPr>
-              <a:t> </a:t>
-            </a:r>
-            <a:r>
-              <a:rPr lang="en-US" sz="2400" b="1" dirty="0"/>
-              <a:t>(x = y </a:t>
-            </a:r>
-            <a:r>
-              <a:rPr lang="en-US" sz="2400" b="1" dirty="0">
-                <a:sym typeface="Symbol" pitchFamily="18" charset="2"/>
-              </a:rPr>
-              <a:t></a:t>
-            </a:r>
-            <a:r>
-              <a:rPr lang="en-US" sz="2400" b="1" dirty="0"/>
-              <a:t> x </a:t>
-            </a:r>
-            <a:r>
-              <a:rPr lang="en-US" sz="2400" b="1" dirty="0">
-                <a:sym typeface="Symbol" pitchFamily="18" charset="2"/>
-              </a:rPr>
-              <a:t></a:t>
-            </a:r>
-            <a:r>
-              <a:rPr lang="en-US" sz="2400" b="1" dirty="0"/>
-              <a:t> s</a:t>
-            </a:r>
-            <a:r>
-              <a:rPr lang="en-US" sz="2400" b="1" baseline="-25000" dirty="0"/>
-              <a:t>2</a:t>
-            </a:r>
-            <a:r>
-              <a:rPr lang="en-US" sz="2400" b="1" dirty="0"/>
-              <a:t>))]</a:t>
-            </a:r>
-          </a:p>
-          <a:p>
-            <a:pPr>
-              <a:lnSpc>
-                <a:spcPct val="90000"/>
-              </a:lnSpc>
-            </a:pPr>
-            <a:r>
-              <a:rPr lang="en-US" sz="2400" b="1" dirty="0">
-                <a:sym typeface="Symbol" pitchFamily="18" charset="2"/>
-              </a:rPr>
-              <a:t></a:t>
-            </a:r>
-            <a:r>
-              <a:rPr lang="en-US" sz="2400" b="1" dirty="0"/>
-              <a:t>s</a:t>
-            </a:r>
-            <a:r>
-              <a:rPr lang="en-US" sz="2400" b="1" baseline="-25000" dirty="0"/>
-              <a:t>1</a:t>
-            </a:r>
-            <a:r>
-              <a:rPr lang="en-US" sz="2400" b="1" dirty="0"/>
-              <a:t>,s</a:t>
-            </a:r>
-            <a:r>
-              <a:rPr lang="en-US" sz="2400" b="1" baseline="-25000" dirty="0"/>
-              <a:t>2</a:t>
-            </a:r>
-            <a:r>
-              <a:rPr lang="en-US" sz="2400" b="1" dirty="0"/>
-              <a:t> s</a:t>
-            </a:r>
-            <a:r>
-              <a:rPr lang="en-US" sz="2400" b="1" baseline="-25000" dirty="0"/>
-              <a:t>1</a:t>
-            </a:r>
-            <a:r>
-              <a:rPr lang="en-US" sz="2400" b="1" dirty="0"/>
-              <a:t> </a:t>
-            </a:r>
-            <a:r>
-              <a:rPr lang="en-US" sz="2400" b="1" dirty="0">
-                <a:sym typeface="Symbol" pitchFamily="18" charset="2"/>
-              </a:rPr>
-              <a:t></a:t>
-            </a:r>
-            <a:r>
-              <a:rPr lang="en-US" sz="2400" b="1" dirty="0"/>
-              <a:t> s</a:t>
-            </a:r>
-            <a:r>
-              <a:rPr lang="en-US" sz="2400" b="1" baseline="-25000" dirty="0"/>
-              <a:t>2</a:t>
-            </a:r>
-            <a:r>
-              <a:rPr lang="en-US" sz="2400" b="1" dirty="0"/>
-              <a:t> </a:t>
-            </a:r>
-            <a:r>
-              <a:rPr lang="en-US" sz="2400" b="1" dirty="0">
-                <a:sym typeface="Symbol" pitchFamily="18" charset="2"/>
-              </a:rPr>
-              <a:t></a:t>
-            </a:r>
-            <a:r>
-              <a:rPr lang="en-US" sz="2400" b="1" dirty="0"/>
-              <a:t> (</a:t>
-            </a:r>
-            <a:r>
-              <a:rPr lang="en-US" sz="2400" b="1" dirty="0">
-                <a:sym typeface="Symbol" pitchFamily="18" charset="2"/>
-              </a:rPr>
-              <a:t></a:t>
-            </a:r>
-            <a:r>
-              <a:rPr lang="en-US" sz="2400" b="1" dirty="0"/>
-              <a:t>x </a:t>
-            </a:r>
-            <a:r>
-              <a:rPr lang="en-US" sz="2400" b="1" dirty="0" err="1"/>
-              <a:t>x</a:t>
-            </a:r>
-            <a:r>
-              <a:rPr lang="en-US" sz="2400" b="1" dirty="0"/>
-              <a:t> </a:t>
-            </a:r>
-            <a:r>
-              <a:rPr lang="en-US" sz="2400" b="1" dirty="0">
-                <a:sym typeface="Symbol" pitchFamily="18" charset="2"/>
-              </a:rPr>
-              <a:t></a:t>
-            </a:r>
-            <a:r>
-              <a:rPr lang="en-US" sz="2400" b="1" dirty="0"/>
-              <a:t> s</a:t>
-            </a:r>
-            <a:r>
-              <a:rPr lang="en-US" sz="2400" b="1" baseline="-25000" dirty="0"/>
-              <a:t>1</a:t>
-            </a:r>
-            <a:r>
-              <a:rPr lang="en-US" sz="2400" b="1" dirty="0"/>
-              <a:t> </a:t>
-            </a:r>
-            <a:r>
-              <a:rPr lang="en-US" sz="2400" b="1" dirty="0">
-                <a:sym typeface="Symbol" pitchFamily="18" charset="2"/>
-              </a:rPr>
-              <a:t></a:t>
-            </a:r>
-            <a:r>
-              <a:rPr lang="en-US" sz="2400" b="1" dirty="0"/>
-              <a:t> x </a:t>
-            </a:r>
-            <a:r>
-              <a:rPr lang="en-US" sz="2400" b="1" dirty="0">
-                <a:sym typeface="Symbol" pitchFamily="18" charset="2"/>
-              </a:rPr>
-              <a:t></a:t>
-            </a:r>
-            <a:r>
-              <a:rPr lang="en-US" sz="2400" b="1" dirty="0"/>
-              <a:t> s</a:t>
-            </a:r>
-            <a:r>
-              <a:rPr lang="en-US" sz="2400" b="1" baseline="-25000" dirty="0"/>
-              <a:t>2</a:t>
-            </a:r>
-            <a:r>
-              <a:rPr lang="en-US" sz="2400" b="1" dirty="0"/>
-              <a:t>)</a:t>
-            </a:r>
-          </a:p>
-          <a:p>
-            <a:pPr>
-              <a:lnSpc>
-                <a:spcPct val="90000"/>
-              </a:lnSpc>
-            </a:pPr>
-            <a:r>
-              <a:rPr lang="en-US" sz="2400" b="1" dirty="0">
-                <a:sym typeface="Symbol" pitchFamily="18" charset="2"/>
-              </a:rPr>
-              <a:t></a:t>
-            </a:r>
-            <a:r>
-              <a:rPr lang="en-US" sz="2400" b="1" dirty="0"/>
-              <a:t>s</a:t>
-            </a:r>
-            <a:r>
-              <a:rPr lang="en-US" sz="2400" b="1" baseline="-25000" dirty="0"/>
-              <a:t>1</a:t>
-            </a:r>
-            <a:r>
-              <a:rPr lang="en-US" sz="2400" b="1" dirty="0"/>
-              <a:t>,s</a:t>
-            </a:r>
-            <a:r>
-              <a:rPr lang="en-US" sz="2400" b="1" baseline="-25000" dirty="0"/>
-              <a:t>2</a:t>
-            </a:r>
-            <a:r>
-              <a:rPr lang="en-US" sz="2400" b="1" dirty="0"/>
-              <a:t> (s</a:t>
-            </a:r>
-            <a:r>
-              <a:rPr lang="en-US" sz="2400" b="1" baseline="-25000" dirty="0"/>
-              <a:t>1</a:t>
-            </a:r>
-            <a:r>
-              <a:rPr lang="en-US" sz="2400" b="1" dirty="0"/>
-              <a:t> = s</a:t>
-            </a:r>
-            <a:r>
-              <a:rPr lang="en-US" sz="2400" b="1" baseline="-25000" dirty="0"/>
-              <a:t>2</a:t>
-            </a:r>
-            <a:r>
-              <a:rPr lang="en-US" sz="2400" b="1" dirty="0"/>
-              <a:t>) </a:t>
-            </a:r>
-            <a:r>
-              <a:rPr lang="en-US" sz="2400" b="1" dirty="0">
-                <a:sym typeface="Symbol" pitchFamily="18" charset="2"/>
-              </a:rPr>
-              <a:t></a:t>
-            </a:r>
-            <a:r>
-              <a:rPr lang="en-US" sz="2400" b="1" dirty="0"/>
-              <a:t> (s</a:t>
-            </a:r>
-            <a:r>
-              <a:rPr lang="en-US" sz="2400" b="1" baseline="-25000" dirty="0"/>
-              <a:t>1</a:t>
-            </a:r>
-            <a:r>
-              <a:rPr lang="en-US" sz="2400" b="1" dirty="0"/>
-              <a:t> </a:t>
-            </a:r>
-            <a:r>
-              <a:rPr lang="en-US" sz="2400" b="1" dirty="0">
-                <a:sym typeface="Symbol" pitchFamily="18" charset="2"/>
-              </a:rPr>
-              <a:t></a:t>
-            </a:r>
-            <a:r>
-              <a:rPr lang="en-US" sz="2400" b="1" dirty="0"/>
-              <a:t> s</a:t>
-            </a:r>
-            <a:r>
-              <a:rPr lang="en-US" sz="2400" b="1" baseline="-25000" dirty="0"/>
-              <a:t>2</a:t>
-            </a:r>
-            <a:r>
-              <a:rPr lang="en-US" sz="2400" b="1" dirty="0"/>
-              <a:t> </a:t>
-            </a:r>
-            <a:r>
-              <a:rPr lang="en-US" sz="2400" b="1" dirty="0">
-                <a:sym typeface="Symbol" pitchFamily="18" charset="2"/>
-              </a:rPr>
-              <a:t> </a:t>
-            </a:r>
-            <a:r>
-              <a:rPr lang="en-US" sz="2400" b="1" dirty="0"/>
-              <a:t>s</a:t>
-            </a:r>
-            <a:r>
-              <a:rPr lang="en-US" sz="2400" b="1" baseline="-25000" dirty="0"/>
-              <a:t>2</a:t>
-            </a:r>
-            <a:r>
-              <a:rPr lang="en-US" sz="2400" b="1" dirty="0"/>
-              <a:t> </a:t>
-            </a:r>
-            <a:r>
-              <a:rPr lang="en-US" sz="2400" b="1" dirty="0">
-                <a:sym typeface="Symbol" pitchFamily="18" charset="2"/>
-              </a:rPr>
-              <a:t></a:t>
-            </a:r>
-            <a:r>
-              <a:rPr lang="en-US" sz="2400" b="1" dirty="0"/>
-              <a:t> s</a:t>
-            </a:r>
-            <a:r>
-              <a:rPr lang="en-US" sz="2400" b="1" baseline="-25000" dirty="0"/>
-              <a:t>1</a:t>
-            </a:r>
-            <a:r>
-              <a:rPr lang="en-US" sz="2400" b="1" dirty="0"/>
-              <a:t>)</a:t>
-            </a:r>
-          </a:p>
-          <a:p>
-            <a:pPr>
-              <a:lnSpc>
-                <a:spcPct val="90000"/>
-              </a:lnSpc>
-            </a:pPr>
-            <a:r>
-              <a:rPr lang="en-US" sz="2400" b="1" dirty="0">
-                <a:sym typeface="Symbol" pitchFamily="18" charset="2"/>
-              </a:rPr>
-              <a:t></a:t>
-            </a:r>
-            <a:r>
-              <a:rPr lang="en-US" sz="2400" b="1" dirty="0"/>
-              <a:t>x,s</a:t>
-            </a:r>
-            <a:r>
-              <a:rPr lang="en-US" sz="2400" b="1" baseline="-25000" dirty="0"/>
-              <a:t>1</a:t>
-            </a:r>
-            <a:r>
-              <a:rPr lang="en-US" sz="2400" b="1" dirty="0"/>
-              <a:t>,s</a:t>
-            </a:r>
-            <a:r>
-              <a:rPr lang="en-US" sz="2400" b="1" baseline="-25000" dirty="0"/>
-              <a:t>2</a:t>
-            </a:r>
-            <a:r>
-              <a:rPr lang="en-US" sz="2400" b="1" dirty="0"/>
-              <a:t> x </a:t>
-            </a:r>
-            <a:r>
-              <a:rPr lang="en-US" sz="2400" b="1" dirty="0">
-                <a:sym typeface="Symbol" pitchFamily="18" charset="2"/>
-              </a:rPr>
-              <a:t></a:t>
-            </a:r>
-            <a:r>
-              <a:rPr lang="en-US" sz="2400" b="1" dirty="0"/>
-              <a:t> (s</a:t>
-            </a:r>
-            <a:r>
-              <a:rPr lang="en-US" sz="2400" b="1" baseline="-25000" dirty="0"/>
-              <a:t>1</a:t>
-            </a:r>
-            <a:r>
-              <a:rPr lang="en-US" sz="2400" b="1" dirty="0"/>
-              <a:t> </a:t>
-            </a:r>
-            <a:r>
-              <a:rPr lang="en-US" sz="2400" b="1" dirty="0">
-                <a:sym typeface="Symbol" pitchFamily="18" charset="2"/>
-              </a:rPr>
-              <a:t></a:t>
-            </a:r>
-            <a:r>
-              <a:rPr lang="en-US" sz="2400" b="1" dirty="0"/>
-              <a:t> s</a:t>
-            </a:r>
-            <a:r>
-              <a:rPr lang="en-US" sz="2400" b="1" baseline="-25000" dirty="0"/>
-              <a:t>2</a:t>
-            </a:r>
-            <a:r>
-              <a:rPr lang="en-US" sz="2400" b="1" dirty="0"/>
-              <a:t>) </a:t>
-            </a:r>
-            <a:r>
-              <a:rPr lang="en-US" sz="2400" b="1" dirty="0">
-                <a:sym typeface="Symbol" pitchFamily="18" charset="2"/>
-              </a:rPr>
-              <a:t> </a:t>
-            </a:r>
-            <a:r>
-              <a:rPr lang="en-US" sz="2400" b="1" dirty="0"/>
-              <a:t>(x </a:t>
-            </a:r>
-            <a:r>
-              <a:rPr lang="en-US" sz="2400" b="1" dirty="0">
-                <a:sym typeface="Symbol" pitchFamily="18" charset="2"/>
-              </a:rPr>
-              <a:t></a:t>
-            </a:r>
-            <a:r>
-              <a:rPr lang="en-US" sz="2400" b="1" dirty="0"/>
-              <a:t> s</a:t>
-            </a:r>
-            <a:r>
-              <a:rPr lang="en-US" sz="2400" b="1" baseline="-25000" dirty="0"/>
-              <a:t>1</a:t>
-            </a:r>
-            <a:r>
-              <a:rPr lang="en-US" sz="2400" b="1" dirty="0"/>
-              <a:t> </a:t>
-            </a:r>
-            <a:r>
-              <a:rPr lang="en-US" sz="2400" b="1" dirty="0">
-                <a:sym typeface="Symbol" pitchFamily="18" charset="2"/>
-              </a:rPr>
-              <a:t></a:t>
-            </a:r>
-            <a:r>
-              <a:rPr lang="en-US" sz="2400" b="1" dirty="0"/>
-              <a:t> x </a:t>
-            </a:r>
-            <a:r>
-              <a:rPr lang="en-US" sz="2400" b="1" dirty="0">
-                <a:sym typeface="Symbol" pitchFamily="18" charset="2"/>
-              </a:rPr>
-              <a:t></a:t>
-            </a:r>
-            <a:r>
-              <a:rPr lang="en-US" sz="2400" b="1" dirty="0"/>
-              <a:t> s</a:t>
-            </a:r>
-            <a:r>
-              <a:rPr lang="en-US" sz="2400" b="1" baseline="-25000" dirty="0"/>
-              <a:t>2</a:t>
-            </a:r>
-            <a:r>
-              <a:rPr lang="en-US" sz="2400" b="1" dirty="0"/>
-              <a:t>)</a:t>
-            </a:r>
-          </a:p>
-          <a:p>
-            <a:pPr>
-              <a:lnSpc>
-                <a:spcPct val="90000"/>
-              </a:lnSpc>
-            </a:pPr>
-            <a:r>
-              <a:rPr lang="en-US" sz="2400" b="1" dirty="0">
-                <a:sym typeface="Symbol" pitchFamily="18" charset="2"/>
-              </a:rPr>
-              <a:t></a:t>
-            </a:r>
-            <a:r>
-              <a:rPr lang="en-US" sz="2400" b="1" dirty="0"/>
-              <a:t>x,s</a:t>
-            </a:r>
-            <a:r>
-              <a:rPr lang="en-US" sz="2400" b="1" baseline="-25000" dirty="0"/>
-              <a:t>1</a:t>
-            </a:r>
-            <a:r>
-              <a:rPr lang="en-US" sz="2400" b="1" dirty="0"/>
-              <a:t>,s</a:t>
-            </a:r>
-            <a:r>
-              <a:rPr lang="en-US" sz="2400" b="1" baseline="-25000" dirty="0"/>
-              <a:t>2</a:t>
-            </a:r>
-            <a:r>
-              <a:rPr lang="en-US" sz="2400" b="1" dirty="0"/>
-              <a:t> x </a:t>
-            </a:r>
-            <a:r>
-              <a:rPr lang="en-US" sz="2400" b="1" dirty="0">
-                <a:sym typeface="Symbol" pitchFamily="18" charset="2"/>
-              </a:rPr>
-              <a:t></a:t>
-            </a:r>
-            <a:r>
-              <a:rPr lang="en-US" sz="2400" b="1" dirty="0"/>
-              <a:t> (s</a:t>
-            </a:r>
-            <a:r>
-              <a:rPr lang="en-US" sz="2400" b="1" baseline="-25000" dirty="0"/>
-              <a:t>1</a:t>
-            </a:r>
-            <a:r>
-              <a:rPr lang="en-US" sz="2400" b="1" dirty="0"/>
-              <a:t> </a:t>
-            </a:r>
-            <a:r>
-              <a:rPr lang="en-US" sz="2400" b="1" dirty="0">
-                <a:sym typeface="Symbol" pitchFamily="18" charset="2"/>
-              </a:rPr>
-              <a:t> </a:t>
-            </a:r>
-            <a:r>
-              <a:rPr lang="en-US" sz="2400" b="1" dirty="0"/>
-              <a:t>s</a:t>
-            </a:r>
-            <a:r>
-              <a:rPr lang="en-US" sz="2400" b="1" baseline="-25000" dirty="0"/>
-              <a:t>2</a:t>
-            </a:r>
-            <a:r>
-              <a:rPr lang="en-US" sz="2400" b="1" dirty="0"/>
-              <a:t>) </a:t>
-            </a:r>
-            <a:r>
-              <a:rPr lang="en-US" sz="2400" b="1" dirty="0">
-                <a:sym typeface="Symbol" pitchFamily="18" charset="2"/>
-              </a:rPr>
-              <a:t></a:t>
-            </a:r>
-            <a:r>
-              <a:rPr lang="en-US" sz="2400" b="1" dirty="0"/>
-              <a:t> (x </a:t>
-            </a:r>
-            <a:r>
-              <a:rPr lang="en-US" sz="2400" b="1" dirty="0">
-                <a:sym typeface="Symbol" pitchFamily="18" charset="2"/>
-              </a:rPr>
-              <a:t></a:t>
-            </a:r>
-            <a:r>
-              <a:rPr lang="en-US" sz="2400" b="1" dirty="0"/>
-              <a:t> s</a:t>
-            </a:r>
-            <a:r>
-              <a:rPr lang="en-US" sz="2400" b="1" baseline="-25000" dirty="0"/>
-              <a:t>1</a:t>
-            </a:r>
-            <a:r>
-              <a:rPr lang="en-US" sz="2400" b="1" dirty="0"/>
-              <a:t> </a:t>
-            </a:r>
-            <a:r>
-              <a:rPr lang="en-US" sz="2400" b="1" dirty="0">
-                <a:sym typeface="Symbol" pitchFamily="18" charset="2"/>
-              </a:rPr>
-              <a:t></a:t>
-            </a:r>
-            <a:r>
-              <a:rPr lang="en-US" sz="2400" b="1" dirty="0"/>
-              <a:t> x </a:t>
-            </a:r>
-            <a:r>
-              <a:rPr lang="en-US" sz="2400" b="1" dirty="0">
-                <a:sym typeface="Symbol" pitchFamily="18" charset="2"/>
-              </a:rPr>
-              <a:t></a:t>
-            </a:r>
-            <a:r>
-              <a:rPr lang="en-US" sz="2400" b="1" dirty="0"/>
-              <a:t> s</a:t>
-            </a:r>
-            <a:r>
-              <a:rPr lang="en-US" sz="2400" b="1" baseline="-25000" dirty="0"/>
-              <a:t>2</a:t>
-            </a:r>
-            <a:r>
-              <a:rPr lang="en-US" sz="2400" b="1" dirty="0"/>
-              <a:t>)</a:t>
             </a:r>
           </a:p>
         </p:txBody>
@@ -48178,6 +47427,1058 @@
 </file>
 
 <file path=ppt/slides/slide50.xml><?xml version="1.0" encoding="utf-8"?>
+<p:sld xmlns:a="http://schemas.openxmlformats.org/drawingml/2006/main" xmlns:r="http://schemas.openxmlformats.org/officeDocument/2006/relationships" xmlns:p="http://schemas.openxmlformats.org/presentationml/2006/main">
+  <p:cSld>
+    <p:spTree>
+      <p:nvGrpSpPr>
+        <p:cNvPr id="1" name=""/>
+        <p:cNvGrpSpPr/>
+        <p:nvPr/>
+      </p:nvGrpSpPr>
+      <p:grpSpPr>
+        <a:xfrm>
+          <a:off x="0" y="0"/>
+          <a:ext cx="0" cy="0"/>
+          <a:chOff x="0" y="0"/>
+          <a:chExt cx="0" cy="0"/>
+        </a:xfrm>
+      </p:grpSpPr>
+      <p:sp>
+        <p:nvSpPr>
+          <p:cNvPr id="18434" name="Rectangle 2"/>
+          <p:cNvSpPr>
+            <a:spLocks noGrp="1" noChangeArrowheads="1"/>
+          </p:cNvSpPr>
+          <p:nvPr>
+            <p:ph type="title"/>
+          </p:nvPr>
+        </p:nvSpPr>
+        <p:spPr/>
+        <p:txBody>
+          <a:bodyPr/>
+          <a:lstStyle/>
+          <a:p>
+            <a:r>
+              <a:rPr lang="en-US" dirty="0"/>
+              <a:t>Example: The Kinship Domain</a:t>
+            </a:r>
+          </a:p>
+        </p:txBody>
+      </p:sp>
+      <p:sp>
+        <p:nvSpPr>
+          <p:cNvPr id="18435" name="Rectangle 3"/>
+          <p:cNvSpPr>
+            <a:spLocks noGrp="1" noChangeArrowheads="1"/>
+          </p:cNvSpPr>
+          <p:nvPr>
+            <p:ph idx="1"/>
+          </p:nvPr>
+        </p:nvSpPr>
+        <p:spPr/>
+        <p:txBody>
+          <a:bodyPr/>
+          <a:lstStyle/>
+          <a:p>
+            <a:r>
+              <a:rPr lang="en-US" sz="2800" dirty="0"/>
+              <a:t>Brothers are siblings</a:t>
+            </a:r>
+          </a:p>
+          <a:p>
+            <a:pPr lvl="1">
+              <a:buFontTx/>
+              <a:buNone/>
+            </a:pPr>
+            <a:r>
+              <a:rPr lang="en-US" sz="2400" b="1" dirty="0">
+                <a:sym typeface="Symbol" pitchFamily="18" charset="2"/>
+              </a:rPr>
+              <a:t></a:t>
+            </a:r>
+            <a:r>
+              <a:rPr lang="en-US" sz="2400" b="1" dirty="0" err="1"/>
+              <a:t>x,y</a:t>
+            </a:r>
+            <a:r>
+              <a:rPr lang="en-US" sz="2400" b="1" dirty="0"/>
+              <a:t> Brother(</a:t>
+            </a:r>
+            <a:r>
+              <a:rPr lang="en-US" sz="2400" b="1" dirty="0" err="1"/>
+              <a:t>x,y</a:t>
+            </a:r>
+            <a:r>
+              <a:rPr lang="en-US" sz="2400" b="1" dirty="0"/>
+              <a:t>) </a:t>
+            </a:r>
+            <a:r>
+              <a:rPr lang="en-US" sz="2400" b="1" dirty="0">
+                <a:sym typeface="Symbol" pitchFamily="18" charset="2"/>
+              </a:rPr>
+              <a:t></a:t>
+            </a:r>
+            <a:r>
+              <a:rPr lang="en-US" sz="2400" b="1" dirty="0"/>
+              <a:t> Sibling(</a:t>
+            </a:r>
+            <a:r>
+              <a:rPr lang="en-US" sz="2400" b="1" dirty="0" err="1"/>
+              <a:t>x,y</a:t>
+            </a:r>
+            <a:r>
+              <a:rPr lang="en-US" sz="2400" b="1" dirty="0"/>
+              <a:t>)</a:t>
+            </a:r>
+          </a:p>
+          <a:p>
+            <a:r>
+              <a:rPr lang="en-US" sz="2800" dirty="0"/>
+              <a:t>“Sibling” is symmetric</a:t>
+            </a:r>
+          </a:p>
+          <a:p>
+            <a:pPr lvl="1">
+              <a:buFontTx/>
+              <a:buNone/>
+            </a:pPr>
+            <a:r>
+              <a:rPr lang="en-US" sz="2400" b="1" dirty="0">
+                <a:sym typeface="Symbol" pitchFamily="18" charset="2"/>
+              </a:rPr>
+              <a:t></a:t>
+            </a:r>
+            <a:r>
+              <a:rPr lang="en-US" sz="2400" b="1" dirty="0" err="1"/>
+              <a:t>x,y</a:t>
+            </a:r>
+            <a:r>
+              <a:rPr lang="en-US" sz="2400" b="1" dirty="0"/>
+              <a:t> Sibling(</a:t>
+            </a:r>
+            <a:r>
+              <a:rPr lang="en-US" sz="2400" b="1" dirty="0" err="1"/>
+              <a:t>x,y</a:t>
+            </a:r>
+            <a:r>
+              <a:rPr lang="en-US" sz="2400" b="1" dirty="0"/>
+              <a:t>) </a:t>
+            </a:r>
+            <a:r>
+              <a:rPr lang="en-US" sz="2400" b="1" dirty="0">
+                <a:sym typeface="Symbol" pitchFamily="18" charset="2"/>
+              </a:rPr>
+              <a:t> </a:t>
+            </a:r>
+            <a:r>
+              <a:rPr lang="en-US" sz="2400" b="1" dirty="0"/>
+              <a:t>Sibling(</a:t>
+            </a:r>
+            <a:r>
+              <a:rPr lang="en-US" sz="2400" b="1" dirty="0" err="1"/>
+              <a:t>y,x</a:t>
+            </a:r>
+            <a:r>
+              <a:rPr lang="en-US" sz="2400" b="1" dirty="0"/>
+              <a:t>)</a:t>
+            </a:r>
+          </a:p>
+          <a:p>
+            <a:r>
+              <a:rPr lang="en-US" sz="2800" dirty="0"/>
+              <a:t>One's mother is one's female parent</a:t>
+            </a:r>
+          </a:p>
+          <a:p>
+            <a:pPr lvl="1">
+              <a:buFontTx/>
+              <a:buNone/>
+            </a:pPr>
+            <a:r>
+              <a:rPr lang="en-US" sz="2400" b="1" dirty="0">
+                <a:sym typeface="Symbol" pitchFamily="18" charset="2"/>
+              </a:rPr>
+              <a:t></a:t>
+            </a:r>
+            <a:r>
+              <a:rPr lang="en-US" sz="2400" b="1" dirty="0" err="1"/>
+              <a:t>m,c</a:t>
+            </a:r>
+            <a:r>
+              <a:rPr lang="en-US" sz="2400" b="1" dirty="0"/>
+              <a:t> (Mother(c) = m) </a:t>
+            </a:r>
+            <a:r>
+              <a:rPr lang="en-US" sz="2400" b="1" dirty="0">
+                <a:sym typeface="Symbol" pitchFamily="18" charset="2"/>
+              </a:rPr>
+              <a:t></a:t>
+            </a:r>
+            <a:r>
+              <a:rPr lang="en-US" sz="2400" b="1" dirty="0"/>
+              <a:t> (Female(m) </a:t>
+            </a:r>
+            <a:r>
+              <a:rPr lang="en-US" sz="2400" b="1" dirty="0">
+                <a:sym typeface="Symbol" pitchFamily="18" charset="2"/>
+              </a:rPr>
+              <a:t> </a:t>
+            </a:r>
+            <a:r>
+              <a:rPr lang="en-US" sz="2400" b="1" dirty="0"/>
+              <a:t>Parent(</a:t>
+            </a:r>
+            <a:r>
+              <a:rPr lang="en-US" sz="2400" b="1" dirty="0" err="1"/>
+              <a:t>m,c</a:t>
+            </a:r>
+            <a:r>
+              <a:rPr lang="en-US" sz="2400" b="1" dirty="0"/>
+              <a:t>))</a:t>
+            </a:r>
+          </a:p>
+        </p:txBody>
+      </p:sp>
+    </p:spTree>
+  </p:cSld>
+  <p:clrMapOvr>
+    <a:masterClrMapping/>
+  </p:clrMapOvr>
+</p:sld>
+</file>
+
+<file path=ppt/slides/slide51.xml><?xml version="1.0" encoding="utf-8"?>
+<p:sld xmlns:a="http://schemas.openxmlformats.org/drawingml/2006/main" xmlns:r="http://schemas.openxmlformats.org/officeDocument/2006/relationships" xmlns:p="http://schemas.openxmlformats.org/presentationml/2006/main">
+  <p:cSld>
+    <p:spTree>
+      <p:nvGrpSpPr>
+        <p:cNvPr id="1" name=""/>
+        <p:cNvGrpSpPr/>
+        <p:nvPr/>
+      </p:nvGrpSpPr>
+      <p:grpSpPr>
+        <a:xfrm>
+          <a:off x="0" y="0"/>
+          <a:ext cx="0" cy="0"/>
+          <a:chOff x="0" y="0"/>
+          <a:chExt cx="0" cy="0"/>
+        </a:xfrm>
+      </p:grpSpPr>
+      <p:sp>
+        <p:nvSpPr>
+          <p:cNvPr id="19458" name="Rectangle 2"/>
+          <p:cNvSpPr>
+            <a:spLocks noGrp="1" noChangeArrowheads="1"/>
+          </p:cNvSpPr>
+          <p:nvPr>
+            <p:ph type="title"/>
+          </p:nvPr>
+        </p:nvSpPr>
+        <p:spPr/>
+        <p:txBody>
+          <a:bodyPr/>
+          <a:lstStyle/>
+          <a:p>
+            <a:r>
+              <a:rPr lang="en-US" dirty="0"/>
+              <a:t>Example: The Set Domain</a:t>
+            </a:r>
+          </a:p>
+        </p:txBody>
+      </p:sp>
+      <p:sp>
+        <p:nvSpPr>
+          <p:cNvPr id="19459" name="Rectangle 3"/>
+          <p:cNvSpPr>
+            <a:spLocks noGrp="1" noChangeArrowheads="1"/>
+          </p:cNvSpPr>
+          <p:nvPr>
+            <p:ph idx="1"/>
+          </p:nvPr>
+        </p:nvSpPr>
+        <p:spPr/>
+        <p:txBody>
+          <a:bodyPr/>
+          <a:lstStyle/>
+          <a:p>
+            <a:pPr>
+              <a:lnSpc>
+                <a:spcPct val="90000"/>
+              </a:lnSpc>
+            </a:pPr>
+            <a:r>
+              <a:rPr lang="en-US" sz="2400" b="1" dirty="0">
+                <a:sym typeface="Symbol" pitchFamily="18" charset="2"/>
+              </a:rPr>
+              <a:t></a:t>
+            </a:r>
+            <a:r>
+              <a:rPr lang="en-US" sz="2400" b="1" dirty="0"/>
+              <a:t>s Set(s) </a:t>
+            </a:r>
+            <a:r>
+              <a:rPr lang="en-US" sz="2400" b="1" dirty="0">
+                <a:sym typeface="Symbol" pitchFamily="18" charset="2"/>
+              </a:rPr>
+              <a:t></a:t>
+            </a:r>
+            <a:r>
+              <a:rPr lang="en-US" sz="2400" b="1" dirty="0"/>
+              <a:t> (s = {}) </a:t>
+            </a:r>
+            <a:r>
+              <a:rPr lang="en-US" sz="2400" b="1" dirty="0">
+                <a:sym typeface="Symbol" pitchFamily="18" charset="2"/>
+              </a:rPr>
+              <a:t></a:t>
+            </a:r>
+            <a:r>
+              <a:rPr lang="en-US" sz="2400" b="1" dirty="0"/>
+              <a:t> (</a:t>
+            </a:r>
+            <a:r>
+              <a:rPr lang="en-US" sz="2400" b="1" dirty="0">
+                <a:sym typeface="Symbol" pitchFamily="18" charset="2"/>
+              </a:rPr>
+              <a:t></a:t>
+            </a:r>
+            <a:r>
+              <a:rPr lang="en-US" sz="2400" b="1" dirty="0"/>
+              <a:t>x,s</a:t>
+            </a:r>
+            <a:r>
+              <a:rPr lang="en-US" sz="2400" b="1" baseline="-25000" dirty="0"/>
+              <a:t>2</a:t>
+            </a:r>
+            <a:r>
+              <a:rPr lang="en-US" sz="2400" b="1" dirty="0"/>
+              <a:t> Set(s</a:t>
+            </a:r>
+            <a:r>
+              <a:rPr lang="en-US" sz="2400" b="1" baseline="-25000" dirty="0"/>
+              <a:t>2</a:t>
+            </a:r>
+            <a:r>
+              <a:rPr lang="en-US" sz="2400" b="1" dirty="0"/>
+              <a:t>) </a:t>
+            </a:r>
+            <a:r>
+              <a:rPr lang="en-US" sz="2400" b="1" dirty="0">
+                <a:sym typeface="Symbol" pitchFamily="18" charset="2"/>
+              </a:rPr>
+              <a:t></a:t>
+            </a:r>
+            <a:r>
+              <a:rPr lang="en-US" sz="2400" b="1" dirty="0"/>
+              <a:t> s = {x|s</a:t>
+            </a:r>
+            <a:r>
+              <a:rPr lang="en-US" sz="2400" b="1" baseline="-25000" dirty="0"/>
+              <a:t>2</a:t>
+            </a:r>
+            <a:r>
+              <a:rPr lang="en-US" sz="2400" b="1" dirty="0"/>
+              <a:t>})</a:t>
+            </a:r>
+          </a:p>
+          <a:p>
+            <a:pPr>
+              <a:lnSpc>
+                <a:spcPct val="90000"/>
+              </a:lnSpc>
+            </a:pPr>
+            <a:r>
+              <a:rPr lang="en-US" sz="2400" b="1" dirty="0">
+                <a:sym typeface="Symbol" pitchFamily="18" charset="2"/>
+              </a:rPr>
+              <a:t></a:t>
+            </a:r>
+            <a:r>
+              <a:rPr lang="en-US" sz="2400" b="1" dirty="0" err="1"/>
+              <a:t>x,s</a:t>
+            </a:r>
+            <a:r>
+              <a:rPr lang="en-US" sz="2400" b="1" dirty="0"/>
+              <a:t> {</a:t>
+            </a:r>
+            <a:r>
+              <a:rPr lang="en-US" sz="2400" b="1" dirty="0" err="1"/>
+              <a:t>x|s</a:t>
+            </a:r>
+            <a:r>
+              <a:rPr lang="en-US" sz="2400" b="1" dirty="0"/>
+              <a:t>} = {}</a:t>
+            </a:r>
+          </a:p>
+          <a:p>
+            <a:pPr>
+              <a:lnSpc>
+                <a:spcPct val="90000"/>
+              </a:lnSpc>
+            </a:pPr>
+            <a:r>
+              <a:rPr lang="en-US" sz="2400" b="1" dirty="0">
+                <a:sym typeface="Symbol" pitchFamily="18" charset="2"/>
+              </a:rPr>
+              <a:t></a:t>
+            </a:r>
+            <a:r>
+              <a:rPr lang="en-US" sz="2400" b="1" dirty="0" err="1"/>
+              <a:t>x,s</a:t>
+            </a:r>
+            <a:r>
+              <a:rPr lang="en-US" sz="2400" b="1" dirty="0"/>
+              <a:t> x </a:t>
+            </a:r>
+            <a:r>
+              <a:rPr lang="en-US" sz="2400" b="1" dirty="0">
+                <a:sym typeface="Symbol" pitchFamily="18" charset="2"/>
+              </a:rPr>
+              <a:t></a:t>
+            </a:r>
+            <a:r>
+              <a:rPr lang="en-US" sz="2400" b="1" dirty="0"/>
+              <a:t> s </a:t>
+            </a:r>
+            <a:r>
+              <a:rPr lang="en-US" sz="2400" b="1" dirty="0">
+                <a:sym typeface="Symbol" pitchFamily="18" charset="2"/>
+              </a:rPr>
+              <a:t></a:t>
+            </a:r>
+            <a:r>
+              <a:rPr lang="en-US" sz="2400" b="1" dirty="0"/>
+              <a:t> s = {</a:t>
+            </a:r>
+            <a:r>
+              <a:rPr lang="en-US" sz="2400" b="1" dirty="0" err="1"/>
+              <a:t>x|s</a:t>
+            </a:r>
+            <a:r>
+              <a:rPr lang="en-US" sz="2400" b="1" dirty="0"/>
+              <a:t>}</a:t>
+            </a:r>
+          </a:p>
+          <a:p>
+            <a:pPr>
+              <a:lnSpc>
+                <a:spcPct val="90000"/>
+              </a:lnSpc>
+            </a:pPr>
+            <a:r>
+              <a:rPr lang="en-US" sz="2400" b="1" dirty="0">
+                <a:sym typeface="Symbol" pitchFamily="18" charset="2"/>
+              </a:rPr>
+              <a:t></a:t>
+            </a:r>
+            <a:r>
+              <a:rPr lang="en-US" sz="2400" b="1" dirty="0" err="1"/>
+              <a:t>x,s</a:t>
+            </a:r>
+            <a:r>
+              <a:rPr lang="en-US" sz="2400" b="1" dirty="0"/>
+              <a:t> x </a:t>
+            </a:r>
+            <a:r>
+              <a:rPr lang="en-US" sz="2400" b="1" dirty="0">
+                <a:sym typeface="Symbol" pitchFamily="18" charset="2"/>
+              </a:rPr>
+              <a:t></a:t>
+            </a:r>
+            <a:r>
+              <a:rPr lang="en-US" sz="2400" b="1" dirty="0"/>
+              <a:t> s </a:t>
+            </a:r>
+            <a:r>
+              <a:rPr lang="en-US" sz="2400" b="1" dirty="0">
+                <a:sym typeface="Symbol" pitchFamily="18" charset="2"/>
+              </a:rPr>
+              <a:t></a:t>
+            </a:r>
+            <a:r>
+              <a:rPr lang="en-US" sz="2400" b="1" dirty="0"/>
+              <a:t> [ </a:t>
+            </a:r>
+            <a:r>
+              <a:rPr lang="en-US" sz="2400" b="1" dirty="0">
+                <a:sym typeface="Symbol" pitchFamily="18" charset="2"/>
+              </a:rPr>
+              <a:t></a:t>
+            </a:r>
+            <a:r>
+              <a:rPr lang="en-US" sz="2400" b="1" dirty="0"/>
+              <a:t>y,s</a:t>
+            </a:r>
+            <a:r>
+              <a:rPr lang="en-US" sz="2400" b="1" baseline="-25000" dirty="0"/>
+              <a:t>2</a:t>
+            </a:r>
+            <a:r>
+              <a:rPr lang="en-US" sz="2400" b="1" dirty="0"/>
+              <a:t> (s = {y|s</a:t>
+            </a:r>
+            <a:r>
+              <a:rPr lang="en-US" sz="2400" b="1" baseline="-25000" dirty="0"/>
+              <a:t>2</a:t>
+            </a:r>
+            <a:r>
+              <a:rPr lang="en-US" sz="2400" b="1" dirty="0"/>
+              <a:t>} </a:t>
+            </a:r>
+            <a:r>
+              <a:rPr lang="en-US" sz="2400" b="1" dirty="0">
+                <a:sym typeface="Symbol" pitchFamily="18" charset="2"/>
+              </a:rPr>
+              <a:t> </a:t>
+            </a:r>
+            <a:r>
+              <a:rPr lang="en-US" sz="2400" b="1" dirty="0"/>
+              <a:t>(x = y </a:t>
+            </a:r>
+            <a:r>
+              <a:rPr lang="en-US" sz="2400" b="1" dirty="0">
+                <a:sym typeface="Symbol" pitchFamily="18" charset="2"/>
+              </a:rPr>
+              <a:t></a:t>
+            </a:r>
+            <a:r>
+              <a:rPr lang="en-US" sz="2400" b="1" dirty="0"/>
+              <a:t> x </a:t>
+            </a:r>
+            <a:r>
+              <a:rPr lang="en-US" sz="2400" b="1" dirty="0">
+                <a:sym typeface="Symbol" pitchFamily="18" charset="2"/>
+              </a:rPr>
+              <a:t></a:t>
+            </a:r>
+            <a:r>
+              <a:rPr lang="en-US" sz="2400" b="1" dirty="0"/>
+              <a:t> s</a:t>
+            </a:r>
+            <a:r>
+              <a:rPr lang="en-US" sz="2400" b="1" baseline="-25000" dirty="0"/>
+              <a:t>2</a:t>
+            </a:r>
+            <a:r>
+              <a:rPr lang="en-US" sz="2400" b="1" dirty="0"/>
+              <a:t>))]</a:t>
+            </a:r>
+          </a:p>
+          <a:p>
+            <a:pPr>
+              <a:lnSpc>
+                <a:spcPct val="90000"/>
+              </a:lnSpc>
+            </a:pPr>
+            <a:r>
+              <a:rPr lang="en-US" sz="2400" b="1" dirty="0">
+                <a:sym typeface="Symbol" pitchFamily="18" charset="2"/>
+              </a:rPr>
+              <a:t></a:t>
+            </a:r>
+            <a:r>
+              <a:rPr lang="en-US" sz="2400" b="1" dirty="0"/>
+              <a:t>s</a:t>
+            </a:r>
+            <a:r>
+              <a:rPr lang="en-US" sz="2400" b="1" baseline="-25000" dirty="0"/>
+              <a:t>1</a:t>
+            </a:r>
+            <a:r>
+              <a:rPr lang="en-US" sz="2400" b="1" dirty="0"/>
+              <a:t>,s</a:t>
+            </a:r>
+            <a:r>
+              <a:rPr lang="en-US" sz="2400" b="1" baseline="-25000" dirty="0"/>
+              <a:t>2</a:t>
+            </a:r>
+            <a:r>
+              <a:rPr lang="en-US" sz="2400" b="1" dirty="0"/>
+              <a:t> s</a:t>
+            </a:r>
+            <a:r>
+              <a:rPr lang="en-US" sz="2400" b="1" baseline="-25000" dirty="0"/>
+              <a:t>1</a:t>
+            </a:r>
+            <a:r>
+              <a:rPr lang="en-US" sz="2400" b="1" dirty="0"/>
+              <a:t> </a:t>
+            </a:r>
+            <a:r>
+              <a:rPr lang="en-US" sz="2400" b="1" dirty="0">
+                <a:sym typeface="Symbol" pitchFamily="18" charset="2"/>
+              </a:rPr>
+              <a:t></a:t>
+            </a:r>
+            <a:r>
+              <a:rPr lang="en-US" sz="2400" b="1" dirty="0"/>
+              <a:t> s</a:t>
+            </a:r>
+            <a:r>
+              <a:rPr lang="en-US" sz="2400" b="1" baseline="-25000" dirty="0"/>
+              <a:t>2</a:t>
+            </a:r>
+            <a:r>
+              <a:rPr lang="en-US" sz="2400" b="1" dirty="0"/>
+              <a:t> </a:t>
+            </a:r>
+            <a:r>
+              <a:rPr lang="en-US" sz="2400" b="1" dirty="0">
+                <a:sym typeface="Symbol" pitchFamily="18" charset="2"/>
+              </a:rPr>
+              <a:t></a:t>
+            </a:r>
+            <a:r>
+              <a:rPr lang="en-US" sz="2400" b="1" dirty="0"/>
+              <a:t> (</a:t>
+            </a:r>
+            <a:r>
+              <a:rPr lang="en-US" sz="2400" b="1" dirty="0">
+                <a:sym typeface="Symbol" pitchFamily="18" charset="2"/>
+              </a:rPr>
+              <a:t></a:t>
+            </a:r>
+            <a:r>
+              <a:rPr lang="en-US" sz="2400" b="1" dirty="0"/>
+              <a:t>x </a:t>
+            </a:r>
+            <a:r>
+              <a:rPr lang="en-US" sz="2400" b="1" dirty="0" err="1"/>
+              <a:t>x</a:t>
+            </a:r>
+            <a:r>
+              <a:rPr lang="en-US" sz="2400" b="1" dirty="0"/>
+              <a:t> </a:t>
+            </a:r>
+            <a:r>
+              <a:rPr lang="en-US" sz="2400" b="1" dirty="0">
+                <a:sym typeface="Symbol" pitchFamily="18" charset="2"/>
+              </a:rPr>
+              <a:t></a:t>
+            </a:r>
+            <a:r>
+              <a:rPr lang="en-US" sz="2400" b="1" dirty="0"/>
+              <a:t> s</a:t>
+            </a:r>
+            <a:r>
+              <a:rPr lang="en-US" sz="2400" b="1" baseline="-25000" dirty="0"/>
+              <a:t>1</a:t>
+            </a:r>
+            <a:r>
+              <a:rPr lang="en-US" sz="2400" b="1" dirty="0"/>
+              <a:t> </a:t>
+            </a:r>
+            <a:r>
+              <a:rPr lang="en-US" sz="2400" b="1" dirty="0">
+                <a:sym typeface="Symbol" pitchFamily="18" charset="2"/>
+              </a:rPr>
+              <a:t></a:t>
+            </a:r>
+            <a:r>
+              <a:rPr lang="en-US" sz="2400" b="1" dirty="0"/>
+              <a:t> x </a:t>
+            </a:r>
+            <a:r>
+              <a:rPr lang="en-US" sz="2400" b="1" dirty="0">
+                <a:sym typeface="Symbol" pitchFamily="18" charset="2"/>
+              </a:rPr>
+              <a:t></a:t>
+            </a:r>
+            <a:r>
+              <a:rPr lang="en-US" sz="2400" b="1" dirty="0"/>
+              <a:t> s</a:t>
+            </a:r>
+            <a:r>
+              <a:rPr lang="en-US" sz="2400" b="1" baseline="-25000" dirty="0"/>
+              <a:t>2</a:t>
+            </a:r>
+            <a:r>
+              <a:rPr lang="en-US" sz="2400" b="1" dirty="0"/>
+              <a:t>)</a:t>
+            </a:r>
+          </a:p>
+          <a:p>
+            <a:pPr>
+              <a:lnSpc>
+                <a:spcPct val="90000"/>
+              </a:lnSpc>
+            </a:pPr>
+            <a:r>
+              <a:rPr lang="en-US" sz="2400" b="1" dirty="0">
+                <a:sym typeface="Symbol" pitchFamily="18" charset="2"/>
+              </a:rPr>
+              <a:t></a:t>
+            </a:r>
+            <a:r>
+              <a:rPr lang="en-US" sz="2400" b="1" dirty="0"/>
+              <a:t>s</a:t>
+            </a:r>
+            <a:r>
+              <a:rPr lang="en-US" sz="2400" b="1" baseline="-25000" dirty="0"/>
+              <a:t>1</a:t>
+            </a:r>
+            <a:r>
+              <a:rPr lang="en-US" sz="2400" b="1" dirty="0"/>
+              <a:t>,s</a:t>
+            </a:r>
+            <a:r>
+              <a:rPr lang="en-US" sz="2400" b="1" baseline="-25000" dirty="0"/>
+              <a:t>2</a:t>
+            </a:r>
+            <a:r>
+              <a:rPr lang="en-US" sz="2400" b="1" dirty="0"/>
+              <a:t> (s</a:t>
+            </a:r>
+            <a:r>
+              <a:rPr lang="en-US" sz="2400" b="1" baseline="-25000" dirty="0"/>
+              <a:t>1</a:t>
+            </a:r>
+            <a:r>
+              <a:rPr lang="en-US" sz="2400" b="1" dirty="0"/>
+              <a:t> = s</a:t>
+            </a:r>
+            <a:r>
+              <a:rPr lang="en-US" sz="2400" b="1" baseline="-25000" dirty="0"/>
+              <a:t>2</a:t>
+            </a:r>
+            <a:r>
+              <a:rPr lang="en-US" sz="2400" b="1" dirty="0"/>
+              <a:t>) </a:t>
+            </a:r>
+            <a:r>
+              <a:rPr lang="en-US" sz="2400" b="1" dirty="0">
+                <a:sym typeface="Symbol" pitchFamily="18" charset="2"/>
+              </a:rPr>
+              <a:t></a:t>
+            </a:r>
+            <a:r>
+              <a:rPr lang="en-US" sz="2400" b="1" dirty="0"/>
+              <a:t> (s</a:t>
+            </a:r>
+            <a:r>
+              <a:rPr lang="en-US" sz="2400" b="1" baseline="-25000" dirty="0"/>
+              <a:t>1</a:t>
+            </a:r>
+            <a:r>
+              <a:rPr lang="en-US" sz="2400" b="1" dirty="0"/>
+              <a:t> </a:t>
+            </a:r>
+            <a:r>
+              <a:rPr lang="en-US" sz="2400" b="1" dirty="0">
+                <a:sym typeface="Symbol" pitchFamily="18" charset="2"/>
+              </a:rPr>
+              <a:t></a:t>
+            </a:r>
+            <a:r>
+              <a:rPr lang="en-US" sz="2400" b="1" dirty="0"/>
+              <a:t> s</a:t>
+            </a:r>
+            <a:r>
+              <a:rPr lang="en-US" sz="2400" b="1" baseline="-25000" dirty="0"/>
+              <a:t>2</a:t>
+            </a:r>
+            <a:r>
+              <a:rPr lang="en-US" sz="2400" b="1" dirty="0"/>
+              <a:t> </a:t>
+            </a:r>
+            <a:r>
+              <a:rPr lang="en-US" sz="2400" b="1" dirty="0">
+                <a:sym typeface="Symbol" pitchFamily="18" charset="2"/>
+              </a:rPr>
+              <a:t> </a:t>
+            </a:r>
+            <a:r>
+              <a:rPr lang="en-US" sz="2400" b="1" dirty="0"/>
+              <a:t>s</a:t>
+            </a:r>
+            <a:r>
+              <a:rPr lang="en-US" sz="2400" b="1" baseline="-25000" dirty="0"/>
+              <a:t>2</a:t>
+            </a:r>
+            <a:r>
+              <a:rPr lang="en-US" sz="2400" b="1" dirty="0"/>
+              <a:t> </a:t>
+            </a:r>
+            <a:r>
+              <a:rPr lang="en-US" sz="2400" b="1" dirty="0">
+                <a:sym typeface="Symbol" pitchFamily="18" charset="2"/>
+              </a:rPr>
+              <a:t></a:t>
+            </a:r>
+            <a:r>
+              <a:rPr lang="en-US" sz="2400" b="1" dirty="0"/>
+              <a:t> s</a:t>
+            </a:r>
+            <a:r>
+              <a:rPr lang="en-US" sz="2400" b="1" baseline="-25000" dirty="0"/>
+              <a:t>1</a:t>
+            </a:r>
+            <a:r>
+              <a:rPr lang="en-US" sz="2400" b="1" dirty="0"/>
+              <a:t>)</a:t>
+            </a:r>
+          </a:p>
+          <a:p>
+            <a:pPr>
+              <a:lnSpc>
+                <a:spcPct val="90000"/>
+              </a:lnSpc>
+            </a:pPr>
+            <a:r>
+              <a:rPr lang="en-US" sz="2400" b="1" dirty="0">
+                <a:sym typeface="Symbol" pitchFamily="18" charset="2"/>
+              </a:rPr>
+              <a:t></a:t>
+            </a:r>
+            <a:r>
+              <a:rPr lang="en-US" sz="2400" b="1" dirty="0"/>
+              <a:t>x,s</a:t>
+            </a:r>
+            <a:r>
+              <a:rPr lang="en-US" sz="2400" b="1" baseline="-25000" dirty="0"/>
+              <a:t>1</a:t>
+            </a:r>
+            <a:r>
+              <a:rPr lang="en-US" sz="2400" b="1" dirty="0"/>
+              <a:t>,s</a:t>
+            </a:r>
+            <a:r>
+              <a:rPr lang="en-US" sz="2400" b="1" baseline="-25000" dirty="0"/>
+              <a:t>2</a:t>
+            </a:r>
+            <a:r>
+              <a:rPr lang="en-US" sz="2400" b="1" dirty="0"/>
+              <a:t> x </a:t>
+            </a:r>
+            <a:r>
+              <a:rPr lang="en-US" sz="2400" b="1" dirty="0">
+                <a:sym typeface="Symbol" pitchFamily="18" charset="2"/>
+              </a:rPr>
+              <a:t></a:t>
+            </a:r>
+            <a:r>
+              <a:rPr lang="en-US" sz="2400" b="1" dirty="0"/>
+              <a:t> (s</a:t>
+            </a:r>
+            <a:r>
+              <a:rPr lang="en-US" sz="2400" b="1" baseline="-25000" dirty="0"/>
+              <a:t>1</a:t>
+            </a:r>
+            <a:r>
+              <a:rPr lang="en-US" sz="2400" b="1" dirty="0"/>
+              <a:t> </a:t>
+            </a:r>
+            <a:r>
+              <a:rPr lang="en-US" sz="2400" b="1" dirty="0">
+                <a:sym typeface="Symbol" pitchFamily="18" charset="2"/>
+              </a:rPr>
+              <a:t></a:t>
+            </a:r>
+            <a:r>
+              <a:rPr lang="en-US" sz="2400" b="1" dirty="0"/>
+              <a:t> s</a:t>
+            </a:r>
+            <a:r>
+              <a:rPr lang="en-US" sz="2400" b="1" baseline="-25000" dirty="0"/>
+              <a:t>2</a:t>
+            </a:r>
+            <a:r>
+              <a:rPr lang="en-US" sz="2400" b="1" dirty="0"/>
+              <a:t>) </a:t>
+            </a:r>
+            <a:r>
+              <a:rPr lang="en-US" sz="2400" b="1" dirty="0">
+                <a:sym typeface="Symbol" pitchFamily="18" charset="2"/>
+              </a:rPr>
+              <a:t> </a:t>
+            </a:r>
+            <a:r>
+              <a:rPr lang="en-US" sz="2400" b="1" dirty="0"/>
+              <a:t>(x </a:t>
+            </a:r>
+            <a:r>
+              <a:rPr lang="en-US" sz="2400" b="1" dirty="0">
+                <a:sym typeface="Symbol" pitchFamily="18" charset="2"/>
+              </a:rPr>
+              <a:t></a:t>
+            </a:r>
+            <a:r>
+              <a:rPr lang="en-US" sz="2400" b="1" dirty="0"/>
+              <a:t> s</a:t>
+            </a:r>
+            <a:r>
+              <a:rPr lang="en-US" sz="2400" b="1" baseline="-25000" dirty="0"/>
+              <a:t>1</a:t>
+            </a:r>
+            <a:r>
+              <a:rPr lang="en-US" sz="2400" b="1" dirty="0"/>
+              <a:t> </a:t>
+            </a:r>
+            <a:r>
+              <a:rPr lang="en-US" sz="2400" b="1" dirty="0">
+                <a:sym typeface="Symbol" pitchFamily="18" charset="2"/>
+              </a:rPr>
+              <a:t></a:t>
+            </a:r>
+            <a:r>
+              <a:rPr lang="en-US" sz="2400" b="1" dirty="0"/>
+              <a:t> x </a:t>
+            </a:r>
+            <a:r>
+              <a:rPr lang="en-US" sz="2400" b="1" dirty="0">
+                <a:sym typeface="Symbol" pitchFamily="18" charset="2"/>
+              </a:rPr>
+              <a:t></a:t>
+            </a:r>
+            <a:r>
+              <a:rPr lang="en-US" sz="2400" b="1" dirty="0"/>
+              <a:t> s</a:t>
+            </a:r>
+            <a:r>
+              <a:rPr lang="en-US" sz="2400" b="1" baseline="-25000" dirty="0"/>
+              <a:t>2</a:t>
+            </a:r>
+            <a:r>
+              <a:rPr lang="en-US" sz="2400" b="1" dirty="0"/>
+              <a:t>)</a:t>
+            </a:r>
+          </a:p>
+          <a:p>
+            <a:pPr>
+              <a:lnSpc>
+                <a:spcPct val="90000"/>
+              </a:lnSpc>
+            </a:pPr>
+            <a:r>
+              <a:rPr lang="en-US" sz="2400" b="1" dirty="0">
+                <a:sym typeface="Symbol" pitchFamily="18" charset="2"/>
+              </a:rPr>
+              <a:t></a:t>
+            </a:r>
+            <a:r>
+              <a:rPr lang="en-US" sz="2400" b="1" dirty="0"/>
+              <a:t>x,s</a:t>
+            </a:r>
+            <a:r>
+              <a:rPr lang="en-US" sz="2400" b="1" baseline="-25000" dirty="0"/>
+              <a:t>1</a:t>
+            </a:r>
+            <a:r>
+              <a:rPr lang="en-US" sz="2400" b="1" dirty="0"/>
+              <a:t>,s</a:t>
+            </a:r>
+            <a:r>
+              <a:rPr lang="en-US" sz="2400" b="1" baseline="-25000" dirty="0"/>
+              <a:t>2</a:t>
+            </a:r>
+            <a:r>
+              <a:rPr lang="en-US" sz="2400" b="1" dirty="0"/>
+              <a:t> x </a:t>
+            </a:r>
+            <a:r>
+              <a:rPr lang="en-US" sz="2400" b="1" dirty="0">
+                <a:sym typeface="Symbol" pitchFamily="18" charset="2"/>
+              </a:rPr>
+              <a:t></a:t>
+            </a:r>
+            <a:r>
+              <a:rPr lang="en-US" sz="2400" b="1" dirty="0"/>
+              <a:t> (s</a:t>
+            </a:r>
+            <a:r>
+              <a:rPr lang="en-US" sz="2400" b="1" baseline="-25000" dirty="0"/>
+              <a:t>1</a:t>
+            </a:r>
+            <a:r>
+              <a:rPr lang="en-US" sz="2400" b="1" dirty="0"/>
+              <a:t> </a:t>
+            </a:r>
+            <a:r>
+              <a:rPr lang="en-US" sz="2400" b="1" dirty="0">
+                <a:sym typeface="Symbol" pitchFamily="18" charset="2"/>
+              </a:rPr>
+              <a:t> </a:t>
+            </a:r>
+            <a:r>
+              <a:rPr lang="en-US" sz="2400" b="1" dirty="0"/>
+              <a:t>s</a:t>
+            </a:r>
+            <a:r>
+              <a:rPr lang="en-US" sz="2400" b="1" baseline="-25000" dirty="0"/>
+              <a:t>2</a:t>
+            </a:r>
+            <a:r>
+              <a:rPr lang="en-US" sz="2400" b="1" dirty="0"/>
+              <a:t>) </a:t>
+            </a:r>
+            <a:r>
+              <a:rPr lang="en-US" sz="2400" b="1" dirty="0">
+                <a:sym typeface="Symbol" pitchFamily="18" charset="2"/>
+              </a:rPr>
+              <a:t></a:t>
+            </a:r>
+            <a:r>
+              <a:rPr lang="en-US" sz="2400" b="1" dirty="0"/>
+              <a:t> (x </a:t>
+            </a:r>
+            <a:r>
+              <a:rPr lang="en-US" sz="2400" b="1" dirty="0">
+                <a:sym typeface="Symbol" pitchFamily="18" charset="2"/>
+              </a:rPr>
+              <a:t></a:t>
+            </a:r>
+            <a:r>
+              <a:rPr lang="en-US" sz="2400" b="1" dirty="0"/>
+              <a:t> s</a:t>
+            </a:r>
+            <a:r>
+              <a:rPr lang="en-US" sz="2400" b="1" baseline="-25000" dirty="0"/>
+              <a:t>1</a:t>
+            </a:r>
+            <a:r>
+              <a:rPr lang="en-US" sz="2400" b="1" dirty="0"/>
+              <a:t> </a:t>
+            </a:r>
+            <a:r>
+              <a:rPr lang="en-US" sz="2400" b="1" dirty="0">
+                <a:sym typeface="Symbol" pitchFamily="18" charset="2"/>
+              </a:rPr>
+              <a:t></a:t>
+            </a:r>
+            <a:r>
+              <a:rPr lang="en-US" sz="2400" b="1" dirty="0"/>
+              <a:t> x </a:t>
+            </a:r>
+            <a:r>
+              <a:rPr lang="en-US" sz="2400" b="1" dirty="0">
+                <a:sym typeface="Symbol" pitchFamily="18" charset="2"/>
+              </a:rPr>
+              <a:t></a:t>
+            </a:r>
+            <a:r>
+              <a:rPr lang="en-US" sz="2400" b="1" dirty="0"/>
+              <a:t> s</a:t>
+            </a:r>
+            <a:r>
+              <a:rPr lang="en-US" sz="2400" b="1" baseline="-25000" dirty="0"/>
+              <a:t>2</a:t>
+            </a:r>
+            <a:r>
+              <a:rPr lang="en-US" sz="2400" b="1" dirty="0"/>
+              <a:t>)</a:t>
+            </a:r>
+          </a:p>
+        </p:txBody>
+      </p:sp>
+    </p:spTree>
+  </p:cSld>
+  <p:clrMapOvr>
+    <a:masterClrMapping/>
+  </p:clrMapOvr>
+</p:sld>
+</file>
+
+<file path=ppt/slides/slide52.xml><?xml version="1.0" encoding="utf-8"?>
 <p:sld xmlns:a="http://schemas.openxmlformats.org/drawingml/2006/main" xmlns:r="http://schemas.openxmlformats.org/officeDocument/2006/relationships" xmlns:p="http://schemas.openxmlformats.org/presentationml/2006/main">
   <p:cSld>
     <p:spTree>
